--- a/artifacts/speaking-portfolio-expanded/decks/free-tier-30min-handout.pptx
+++ b/artifacts/speaking-portfolio-expanded/decks/free-tier-30min-handout.pptx
@@ -154,7 +154,7 @@
                 <a:ea typeface="Arial"/>
                 <a:cs typeface="Arial"/>
               </a:rPr>
-              <a:t xml:space="preserve">Rewritten 2026-09-06. 40 minutes, 15 slides, four audience moments, no Q&amp;A. Nobody outside a provider knows its margins and this talk never estimates one; the fixture arithmetic is synthetic. Say that once, on slide 1, then argue.</a:t>
+              <a:t xml:space="preserve">Rewritten and retitled 2026-09-06 (was "Cry Me a Free Tier"). 40 minutes, 15 slides, four audience moments, no Q&amp;A. Nobody outside a provider knows its margins and this talk never estimates one; the fixture arithmetic is synthetic. Say that once, on slide 1, then argue.</a:t>
             </a:r>
             <a:endParaRPr lang="en-US" sz="1200"/>
           </a:p>
@@ -359,7 +359,7 @@
                 <a:ea typeface="Arial"/>
                 <a:cs typeface="Arial"/>
               </a:rPr>
-              <a:t xml:space="preserve">Cry Me a Free Tier</a:t>
+              <a:t xml:space="preserve">Buy Me a Free Tier</a:t>
             </a:r>
             <a:endParaRPr lang="en-US" sz="1200"/>
           </a:p>
@@ -451,7 +451,7 @@
                 <a:ea typeface="Arial"/>
                 <a:cs typeface="Arial"/>
               </a:rPr>
-              <a:t xml:space="preserve">Sensitivity, not prediction. Quality is held fixed, which is itself an assumption.</a:t>
+              <a:t xml:space="preserve">Sensitivity, not prediction.</a:t>
             </a:r>
             <a:endParaRPr lang="en-US" sz="1200"/>
           </a:p>
@@ -794,7 +794,7 @@
                 <a:ea typeface="Arial"/>
                 <a:cs typeface="Arial"/>
               </a:rPr>
-              <a:t xml:space="preserve">Cry Me a Free Tier</a:t>
+              <a:t xml:space="preserve">Buy Me a Free Tier</a:t>
             </a:r>
             <a:endParaRPr lang="en-US" sz="1200"/>
           </a:p>
@@ -886,7 +886,7 @@
                 <a:ea typeface="Arial"/>
                 <a:cs typeface="Arial"/>
               </a:rPr>
-              <a:t xml:space="preserve">Sensitivity, not prediction. Quality is held fixed, which is itself an assumption.</a:t>
+              <a:t xml:space="preserve">Sensitivity, not prediction.</a:t>
             </a:r>
             <a:endParaRPr lang="en-US" sz="1200"/>
           </a:p>
@@ -1229,7 +1229,7 @@
                 <a:ea typeface="Arial"/>
                 <a:cs typeface="Arial"/>
               </a:rPr>
-              <a:t xml:space="preserve">Cry Me a Free Tier</a:t>
+              <a:t xml:space="preserve">Buy Me a Free Tier</a:t>
             </a:r>
             <a:endParaRPr lang="en-US" sz="1200"/>
           </a:p>
@@ -1597,7 +1597,7 @@
                 <a:ea typeface="Arial"/>
                 <a:cs typeface="Arial"/>
               </a:rPr>
-              <a:t xml:space="preserve">So stop thinking of this as shopping, where the customer holds the power because they can leave. You are contracting, with a much better capitalized counterparty, and your architecture is the collateral. That reframe is the whole talk, and everything on the next three slides is just a way of reducing specificity or pricing the exposure.</a:t>
+              <a:t xml:space="preserve">So stop thinking of this as shopping, where the customer holds the power because they can leave. You are contracting, with a much better capitalized counterparty, and your architecture is the collateral. That reframe is the whole talk, and everything after this is just a way of reducing specificity or pricing the exposure.</a:t>
             </a:r>
             <a:endParaRPr lang="en-US" sz="1200"/>
           </a:p>
@@ -1802,7 +1802,7 @@
                 <a:ea typeface="Arial"/>
                 <a:cs typeface="Arial"/>
               </a:rPr>
-              <a:t xml:space="preserve">Cry Me a Free Tier</a:t>
+              <a:t xml:space="preserve">Buy Me a Free Tier</a:t>
             </a:r>
             <a:endParaRPr lang="en-US" sz="1200"/>
           </a:p>
@@ -2170,7 +2170,7 @@
                 <a:ea typeface="Arial"/>
                 <a:cs typeface="Arial"/>
               </a:rPr>
-              <a:t xml:space="preserve">So stop thinking of this as shopping, where the customer holds the power because they can leave. You are contracting, with a much better capitalized counterparty, and your architecture is the collateral. That reframe is the whole talk, and everything on the next three slides is just a way of reducing specificity or pricing the exposure.</a:t>
+              <a:t xml:space="preserve">So stop thinking of this as shopping, where the customer holds the power because they can leave. You are contracting, with a much better capitalized counterparty, and your architecture is the collateral. That reframe is the whole talk, and everything after this is just a way of reducing specificity or pricing the exposure.</a:t>
             </a:r>
             <a:endParaRPr lang="en-US" sz="1200"/>
           </a:p>
@@ -2375,7 +2375,7 @@
                 <a:ea typeface="Arial"/>
                 <a:cs typeface="Arial"/>
               </a:rPr>
-              <a:t xml:space="preserve">Cry Me a Free Tier</a:t>
+              <a:t xml:space="preserve">Buy Me a Free Tier</a:t>
             </a:r>
             <a:endParaRPr lang="en-US" sz="1200"/>
           </a:p>
@@ -2856,7 +2856,7 @@
                 <a:ea typeface="Arial"/>
                 <a:cs typeface="Arial"/>
               </a:rPr>
-              <a:t xml:space="preserve">Cry Me a Free Tier</a:t>
+              <a:t xml:space="preserve">Buy Me a Free Tier</a:t>
             </a:r>
             <a:endParaRPr lang="en-US" sz="1200"/>
           </a:p>
@@ -3224,7 +3224,7 @@
                 <a:ea typeface="Arial"/>
                 <a:cs typeface="Arial"/>
               </a:rPr>
-              <a:t xml:space="preserve">Cheap intelligence changes incentives before it changes organizations. Leave the table up.</a:t>
+              <a:t xml:space="preserve">Cheap intelligence changes incentives before it changes organizations.</a:t>
             </a:r>
             <a:endParaRPr lang="en-US" sz="1200"/>
           </a:p>
@@ -3316,7 +3316,7 @@
                 <a:ea typeface="Arial"/>
                 <a:cs typeface="Arial"/>
               </a:rPr>
-              <a:t xml:space="preserve">Say the last line slowly. Leave the sweep table on screen for questions.</a:t>
+              <a:t xml:space="preserve">Say the last line slowly, then stop talking. For questions, jump back to the sweep table if this route kept slide 11.</a:t>
             </a:r>
             <a:endParaRPr lang="en-US" sz="1200"/>
           </a:p>
@@ -3726,7 +3726,7 @@
                 <a:ea typeface="Arial"/>
                 <a:cs typeface="Arial"/>
               </a:rPr>
-              <a:t xml:space="preserve">Cry Me a Free Tier</a:t>
+              <a:t xml:space="preserve">Buy Me a Free Tier</a:t>
             </a:r>
             <a:endParaRPr lang="en-US" sz="1200"/>
           </a:p>
@@ -4207,7 +4207,7 @@
                 <a:ea typeface="Arial"/>
                 <a:cs typeface="Arial"/>
               </a:rPr>
-              <a:t xml:space="preserve">Cry Me a Free Tier</a:t>
+              <a:t xml:space="preserve">Buy Me a Free Tier</a:t>
             </a:r>
             <a:endParaRPr lang="en-US" sz="1200"/>
           </a:p>
@@ -4688,7 +4688,7 @@
                 <a:ea typeface="Arial"/>
                 <a:cs typeface="Arial"/>
               </a:rPr>
-              <a:t xml:space="preserve">Cry Me a Free Tier</a:t>
+              <a:t xml:space="preserve">Buy Me a Free Tier</a:t>
             </a:r>
             <a:endParaRPr lang="en-US" sz="1200"/>
           </a:p>
@@ -5261,7 +5261,7 @@
                 <a:ea typeface="Arial"/>
                 <a:cs typeface="Arial"/>
               </a:rPr>
-              <a:t xml:space="preserve">Cry Me a Free Tier</a:t>
+              <a:t xml:space="preserve">Buy Me a Free Tier</a:t>
             </a:r>
             <a:endParaRPr lang="en-US" sz="1200"/>
           </a:p>
@@ -5834,7 +5834,7 @@
                 <a:ea typeface="Arial"/>
                 <a:cs typeface="Arial"/>
               </a:rPr>
-              <a:t xml:space="preserve">Cry Me a Free Tier</a:t>
+              <a:t xml:space="preserve">Buy Me a Free Tier</a:t>
             </a:r>
             <a:endParaRPr lang="en-US" sz="1200"/>
           </a:p>
@@ -6453,7 +6453,7 @@
                 <a:ea typeface="Arial"/>
                 <a:cs typeface="Arial"/>
               </a:rPr>
-              <a:t xml:space="preserve">Cry Me a Free Tier</a:t>
+              <a:t xml:space="preserve">Buy Me a Free Tier</a:t>
             </a:r>
             <a:endParaRPr lang="en-US" sz="1200"/>
           </a:p>
@@ -6980,7 +6980,7 @@
                 <a:ea typeface="Arial"/>
                 <a:cs typeface="Arial"/>
               </a:rPr>
-              <a:t xml:space="preserve">Cry Me a Free Tier</a:t>
+              <a:t xml:space="preserve">Buy Me a Free Tier</a:t>
             </a:r>
             <a:endParaRPr lang="en-US" sz="1200"/>
           </a:p>
@@ -7553,7 +7553,7 @@
                 <a:ea typeface="Arial"/>
                 <a:cs typeface="Arial"/>
               </a:rPr>
-              <a:t xml:space="preserve">Cry Me a Free Tier</a:t>
+              <a:t xml:space="preserve">Buy Me a Free Tier</a:t>
             </a:r>
             <a:endParaRPr lang="en-US" sz="1200"/>
           </a:p>
@@ -8200,7 +8200,7 @@
                 <a:ea typeface="Arial"/>
                 <a:cs typeface="Arial"/>
               </a:rPr>
-              <a:t xml:space="preserve">Cry Me a Free Tier</a:t>
+              <a:t xml:space="preserve">Buy Me a Free Tier</a:t>
             </a:r>
             <a:endParaRPr lang="en-US" sz="3750"/>
           </a:p>
@@ -8370,7 +8370,7 @@
                 <a:ea typeface="Arial"/>
                 <a:cs typeface="Arial"/>
               </a:rPr>
-              <a:t xml:space="preserve">Cry Me a Free Tier</a:t>
+              <a:t xml:space="preserve">Buy Me a Free Tier</a:t>
             </a:r>
             <a:endParaRPr lang="en-US" sz="975"/>
           </a:p>
@@ -8550,7 +8550,7 @@
                 <a:ea typeface="Arial"/>
                 <a:cs typeface="Arial"/>
               </a:rPr>
-              <a:t xml:space="preserve">Demo: change one assumption, watch the unit cost</a:t>
+              <a:t xml:space="preserve">Turn the dial</a:t>
             </a:r>
             <a:endParaRPr lang="en-US" sz="2550"/>
           </a:p>
@@ -8599,30 +8599,7 @@
                 <a:ea typeface="Arial"/>
                 <a:cs typeface="Arial"/>
               </a:rPr>
-              <a:t xml:space="preserve">Sensitivity, not prediction. Quality is</a:t>
-            </a:r>
-            <a:endParaRPr lang="en-US" sz="1500"/>
-          </a:p>
-          <a:p>
-            <a:pPr marL="0" indent="0">
-              <a:lnSpc>
-                <a:spcPts val="1950"/>
-              </a:lnSpc>
-              <a:spcAft>
-                <a:spcPts val="0"/>
-              </a:spcAft>
-              <a:buNone/>
-            </a:pPr>
-            <a:r>
-              <a:rPr lang="en-US" sz="1500" b="0">
-                <a:solidFill>
-                  <a:srgbClr val="202B33"/>
-                </a:solidFill>
-                <a:latin typeface="Arial"/>
-                <a:ea typeface="Arial"/>
-                <a:cs typeface="Arial"/>
-              </a:rPr>
-              <a:t xml:space="preserve">held fixed, which is itself an assumption.</a:t>
+              <a:t xml:space="preserve">Sensitivity, not prediction.</a:t>
             </a:r>
             <a:endParaRPr lang="en-US" sz="1500"/>
           </a:p>
@@ -8830,6 +8807,29 @@
                 <a:cs typeface="Arial"/>
               </a:rPr>
               <a:t xml:space="preserve"/>
+            </a:r>
+            <a:endParaRPr lang="en-US" sz="1500"/>
+          </a:p>
+          <a:p>
+            <a:pPr marL="0" indent="0">
+              <a:lnSpc>
+                <a:spcPts val="1950"/>
+              </a:lnSpc>
+              <a:spcAft>
+                <a:spcPts val="0"/>
+              </a:spcAft>
+              <a:buNone/>
+            </a:pPr>
+            <a:r>
+              <a:rPr lang="en-US" sz="1500" b="0">
+                <a:solidFill>
+                  <a:srgbClr val="202B33"/>
+                </a:solidFill>
+                <a:latin typeface="Arial"/>
+                <a:ea typeface="Arial"/>
+                <a:cs typeface="Arial"/>
+              </a:rPr>
+              <a:t xml:space="preserve">Then multiply by your own volume, because</a:t>
             </a:r>
             <a:endParaRPr lang="en-US" sz="1500"/>
           </a:p>
@@ -8878,29 +8878,6 @@
                 <a:ea typeface="Arial"/>
                 <a:cs typeface="Arial"/>
               </a:rPr>
-              <a:t xml:space="preserve">Then multiply by your own volume, because</a:t>
-            </a:r>
-            <a:endParaRPr lang="en-US" sz="1500"/>
-          </a:p>
-          <a:p>
-            <a:pPr marL="0" indent="0">
-              <a:lnSpc>
-                <a:spcPts val="1950"/>
-              </a:lnSpc>
-              <a:spcAft>
-                <a:spcPts val="0"/>
-              </a:spcAft>
-              <a:buNone/>
-            </a:pPr>
-            <a:r>
-              <a:rPr lang="en-US" sz="1500" b="0">
-                <a:solidFill>
-                  <a:srgbClr val="202B33"/>
-                </a:solidFill>
-                <a:latin typeface="Arial"/>
-                <a:ea typeface="Arial"/>
-                <a:cs typeface="Arial"/>
-              </a:rPr>
               <a:t xml:space="preserve">the table is meaningless without it. At a</a:t>
             </a:r>
             <a:endParaRPr lang="en-US" sz="1500"/>
@@ -9157,7 +9134,7 @@
                 <a:ea typeface="Arial"/>
                 <a:cs typeface="Arial"/>
               </a:rPr>
-              <a:t xml:space="preserve">Cry Me a Free Tier</a:t>
+              <a:t xml:space="preserve">Buy Me a Free Tier</a:t>
             </a:r>
             <a:endParaRPr lang="en-US" sz="975"/>
           </a:p>
@@ -9337,7 +9314,7 @@
                 <a:ea typeface="Arial"/>
                 <a:cs typeface="Arial"/>
               </a:rPr>
-              <a:t xml:space="preserve">Demo: change one assumption, watch the unit cost</a:t>
+              <a:t xml:space="preserve">Turn the dial</a:t>
             </a:r>
             <a:endParaRPr lang="en-US" sz="2550"/>
           </a:p>
@@ -9974,7 +9951,7 @@
                 <a:ea typeface="Arial"/>
                 <a:cs typeface="Arial"/>
               </a:rPr>
-              <a:t xml:space="preserve">Cry Me a Free Tier</a:t>
+              <a:t xml:space="preserve">Buy Me a Free Tier</a:t>
             </a:r>
             <a:endParaRPr lang="en-US" sz="975"/>
           </a:p>
@@ -11129,7 +11106,7 @@
                 <a:ea typeface="Arial"/>
                 <a:cs typeface="Arial"/>
               </a:rPr>
-              <a:t xml:space="preserve">Cry Me a Free Tier</a:t>
+              <a:t xml:space="preserve">Buy Me a Free Tier</a:t>
             </a:r>
             <a:endParaRPr lang="en-US" sz="975"/>
           </a:p>
@@ -11431,29 +11408,6 @@
             </a:r>
             <a:endParaRPr lang="en-US" sz="1500"/>
           </a:p>
-          <a:p>
-            <a:pPr marL="0" indent="0">
-              <a:lnSpc>
-                <a:spcPts val="1950"/>
-              </a:lnSpc>
-              <a:spcAft>
-                <a:spcPts val="0"/>
-              </a:spcAft>
-              <a:buNone/>
-            </a:pPr>
-            <a:r>
-              <a:rPr lang="en-US" sz="1500" b="0">
-                <a:solidFill>
-                  <a:srgbClr val="202B33"/>
-                </a:solidFill>
-                <a:latin typeface="Arial"/>
-                <a:ea typeface="Arial"/>
-                <a:cs typeface="Arial"/>
-              </a:rPr>
-              <a:t xml:space="preserve">architecture is the collateral. That</a:t>
-            </a:r>
-            <a:endParaRPr lang="en-US" sz="1500"/>
-          </a:p>
         </p:txBody>
       </p:sp>
       <p:sp>
@@ -11499,6 +11453,29 @@
                 <a:ea typeface="Arial"/>
                 <a:cs typeface="Arial"/>
               </a:rPr>
+              <a:t xml:space="preserve">architecture is the collateral. That</a:t>
+            </a:r>
+            <a:endParaRPr lang="en-US" sz="1500"/>
+          </a:p>
+          <a:p>
+            <a:pPr marL="0" indent="0">
+              <a:lnSpc>
+                <a:spcPts val="1950"/>
+              </a:lnSpc>
+              <a:spcAft>
+                <a:spcPts val="0"/>
+              </a:spcAft>
+              <a:buNone/>
+            </a:pPr>
+            <a:r>
+              <a:rPr lang="en-US" sz="1500" b="0">
+                <a:solidFill>
+                  <a:srgbClr val="202B33"/>
+                </a:solidFill>
+                <a:latin typeface="Arial"/>
+                <a:ea typeface="Arial"/>
+                <a:cs typeface="Arial"/>
+              </a:rPr>
               <a:t xml:space="preserve">reframe is the whole talk, and everything</a:t>
             </a:r>
             <a:endParaRPr lang="en-US" sz="1500"/>
@@ -11522,53 +11499,30 @@
                 <a:ea typeface="Arial"/>
                 <a:cs typeface="Arial"/>
               </a:rPr>
-              <a:t xml:space="preserve">on the next three slides is just a way of</a:t>
-            </a:r>
-            <a:endParaRPr lang="en-US" sz="1500"/>
-          </a:p>
-          <a:p>
-            <a:pPr marL="0" indent="0">
-              <a:lnSpc>
-                <a:spcPts val="1950"/>
-              </a:lnSpc>
-              <a:spcAft>
-                <a:spcPts val="0"/>
-              </a:spcAft>
-              <a:buNone/>
-            </a:pPr>
-            <a:r>
-              <a:rPr lang="en-US" sz="1500" b="0">
-                <a:solidFill>
-                  <a:srgbClr val="202B33"/>
-                </a:solidFill>
-                <a:latin typeface="Arial"/>
-                <a:ea typeface="Arial"/>
-                <a:cs typeface="Arial"/>
-              </a:rPr>
-              <a:t xml:space="preserve">reducing specificity or pricing the</a:t>
-            </a:r>
-            <a:endParaRPr lang="en-US" sz="1500"/>
-          </a:p>
-          <a:p>
-            <a:pPr marL="0" indent="0">
-              <a:lnSpc>
-                <a:spcPts val="1950"/>
-              </a:lnSpc>
-              <a:spcAft>
-                <a:spcPts val="0"/>
-              </a:spcAft>
-              <a:buNone/>
-            </a:pPr>
-            <a:r>
-              <a:rPr lang="en-US" sz="1500" b="0">
-                <a:solidFill>
-                  <a:srgbClr val="202B33"/>
-                </a:solidFill>
-                <a:latin typeface="Arial"/>
-                <a:ea typeface="Arial"/>
-                <a:cs typeface="Arial"/>
-              </a:rPr>
-              <a:t xml:space="preserve">exposure.</a:t>
+              <a:t xml:space="preserve">after this is just a way of reducing</a:t>
+            </a:r>
+            <a:endParaRPr lang="en-US" sz="1500"/>
+          </a:p>
+          <a:p>
+            <a:pPr marL="0" indent="0">
+              <a:lnSpc>
+                <a:spcPts val="1950"/>
+              </a:lnSpc>
+              <a:spcAft>
+                <a:spcPts val="0"/>
+              </a:spcAft>
+              <a:buNone/>
+            </a:pPr>
+            <a:r>
+              <a:rPr lang="en-US" sz="1500" b="0">
+                <a:solidFill>
+                  <a:srgbClr val="202B33"/>
+                </a:solidFill>
+                <a:latin typeface="Arial"/>
+                <a:ea typeface="Arial"/>
+                <a:cs typeface="Arial"/>
+              </a:rPr>
+              <a:t xml:space="preserve">specificity or pricing the exposure.</a:t>
             </a:r>
             <a:endParaRPr lang="en-US" sz="1500"/>
           </a:p>
@@ -11617,7 +11571,7 @@
                 <a:ea typeface="Arial"/>
                 <a:cs typeface="Arial"/>
               </a:rPr>
-              <a:t xml:space="preserve">Cry Me a Free Tier</a:t>
+              <a:t xml:space="preserve">Buy Me a Free Tier</a:t>
             </a:r>
             <a:endParaRPr lang="en-US" sz="975"/>
           </a:p>
@@ -12703,7 +12657,7 @@
                 <a:ea typeface="Arial"/>
                 <a:cs typeface="Arial"/>
               </a:rPr>
-              <a:t xml:space="preserve">Cry Me a Free Tier</a:t>
+              <a:t xml:space="preserve">Buy Me a Free Tier</a:t>
             </a:r>
             <a:endParaRPr lang="en-US" sz="975"/>
           </a:p>
@@ -13350,29 +13304,6 @@
             </a:r>
             <a:endParaRPr lang="en-US" sz="1500"/>
           </a:p>
-          <a:p>
-            <a:pPr marL="0" indent="0">
-              <a:lnSpc>
-                <a:spcPts val="1950"/>
-              </a:lnSpc>
-              <a:spcAft>
-                <a:spcPts val="0"/>
-              </a:spcAft>
-              <a:buNone/>
-            </a:pPr>
-            <a:r>
-              <a:rPr lang="en-US" sz="1500" b="0">
-                <a:solidFill>
-                  <a:srgbClr val="202B33"/>
-                </a:solidFill>
-                <a:latin typeface="Arial"/>
-                <a:ea typeface="Arial"/>
-                <a:cs typeface="Arial"/>
-              </a:rPr>
-              <a:t xml:space="preserve">less. Path dependence, because the lots</a:t>
-            </a:r>
-            <a:endParaRPr lang="en-US" sz="1500"/>
-          </a:p>
         </p:txBody>
       </p:sp>
       <p:sp>
@@ -13418,6 +13349,29 @@
                 <a:ea typeface="Arial"/>
                 <a:cs typeface="Arial"/>
               </a:rPr>
+              <a:t xml:space="preserve">less. Path dependence, because the lots</a:t>
+            </a:r>
+            <a:endParaRPr lang="en-US" sz="1500"/>
+          </a:p>
+          <a:p>
+            <a:pPr marL="0" indent="0">
+              <a:lnSpc>
+                <a:spcPts val="1950"/>
+              </a:lnSpc>
+              <a:spcAft>
+                <a:spcPts val="0"/>
+              </a:spcAft>
+              <a:buNone/>
+            </a:pPr>
+            <a:r>
+              <a:rPr lang="en-US" sz="1500" b="0">
+                <a:solidFill>
+                  <a:srgbClr val="202B33"/>
+                </a:solidFill>
+                <a:latin typeface="Arial"/>
+                <a:ea typeface="Arial"/>
+                <a:cs typeface="Arial"/>
+              </a:rPr>
               <a:t xml:space="preserve">stay built. Moral hazard, because whoever</a:t>
             </a:r>
             <a:endParaRPr lang="en-US" sz="1500"/>
@@ -13809,30 +13763,7 @@
                 <a:ea typeface="Arial"/>
                 <a:cs typeface="Arial"/>
               </a:rPr>
-              <a:t xml:space="preserve">before it changes organizations. Leave the</a:t>
-            </a:r>
-            <a:endParaRPr lang="en-US" sz="1500"/>
-          </a:p>
-          <a:p>
-            <a:pPr marL="0" indent="0">
-              <a:lnSpc>
-                <a:spcPts val="1950"/>
-              </a:lnSpc>
-              <a:spcAft>
-                <a:spcPts val="0"/>
-              </a:spcAft>
-              <a:buNone/>
-            </a:pPr>
-            <a:r>
-              <a:rPr lang="en-US" sz="1500" b="0">
-                <a:solidFill>
-                  <a:srgbClr val="202B33"/>
-                </a:solidFill>
-                <a:latin typeface="Arial"/>
-                <a:ea typeface="Arial"/>
-                <a:cs typeface="Arial"/>
-              </a:rPr>
-              <a:t xml:space="preserve">table up.</a:t>
+              <a:t xml:space="preserve">before it changes organizations.</a:t>
             </a:r>
             <a:endParaRPr lang="en-US" sz="1500"/>
           </a:p>
@@ -13881,7 +13812,7 @@
                 <a:ea typeface="Arial"/>
                 <a:cs typeface="Arial"/>
               </a:rPr>
-              <a:t xml:space="preserve">Cry Me a Free Tier</a:t>
+              <a:t xml:space="preserve">Buy Me a Free Tier</a:t>
             </a:r>
             <a:endParaRPr lang="en-US" sz="975"/>
           </a:p>
@@ -14898,7 +14829,7 @@
                 <a:ea typeface="Arial"/>
                 <a:cs typeface="Arial"/>
               </a:rPr>
-              <a:t xml:space="preserve">Cry Me a Free Tier</a:t>
+              <a:t xml:space="preserve">Buy Me a Free Tier</a:t>
             </a:r>
             <a:endParaRPr lang="en-US" sz="975"/>
           </a:p>
@@ -15846,7 +15777,7 @@
                 <a:ea typeface="Arial"/>
                 <a:cs typeface="Arial"/>
               </a:rPr>
-              <a:t xml:space="preserve">Cry Me a Free Tier</a:t>
+              <a:t xml:space="preserve">Buy Me a Free Tier</a:t>
             </a:r>
             <a:endParaRPr lang="en-US" sz="975"/>
           </a:p>
@@ -16026,7 +15957,7 @@
                 <a:ea typeface="Arial"/>
                 <a:cs typeface="Arial"/>
               </a:rPr>
-              <a:t xml:space="preserve">Price, cost, and value are three different numbers</a:t>
+              <a:t xml:space="preserve">Four boxes, one invoice</a:t>
             </a:r>
             <a:endParaRPr lang="en-US" sz="2550"/>
           </a:p>
@@ -16748,7 +16679,7 @@
                 <a:ea typeface="Arial"/>
                 <a:cs typeface="Arial"/>
               </a:rPr>
-              <a:t xml:space="preserve">Cry Me a Free Tier</a:t>
+              <a:t xml:space="preserve">Buy Me a Free Tier</a:t>
             </a:r>
             <a:endParaRPr lang="en-US" sz="975"/>
           </a:p>
@@ -17903,7 +17834,7 @@
                 <a:ea typeface="Arial"/>
                 <a:cs typeface="Arial"/>
               </a:rPr>
-              <a:t xml:space="preserve">Cry Me a Free Tier</a:t>
+              <a:t xml:space="preserve">Buy Me a Free Tier</a:t>
             </a:r>
             <a:endParaRPr lang="en-US" sz="975"/>
           </a:p>
@@ -18943,7 +18874,7 @@
                 <a:ea typeface="Arial"/>
                 <a:cs typeface="Arial"/>
               </a:rPr>
-              <a:t xml:space="preserve">Cry Me a Free Tier</a:t>
+              <a:t xml:space="preserve">Buy Me a Free Tier</a:t>
             </a:r>
             <a:endParaRPr lang="en-US" sz="975"/>
           </a:p>
@@ -20190,7 +20121,7 @@
                 <a:ea typeface="Arial"/>
                 <a:cs typeface="Arial"/>
               </a:rPr>
-              <a:t xml:space="preserve">Cry Me a Free Tier</a:t>
+              <a:t xml:space="preserve">Buy Me a Free Tier</a:t>
             </a:r>
             <a:endParaRPr lang="en-US" sz="975"/>
           </a:p>
@@ -21299,7 +21230,7 @@
                 <a:ea typeface="Arial"/>
                 <a:cs typeface="Arial"/>
               </a:rPr>
-              <a:t xml:space="preserve">Cry Me a Free Tier</a:t>
+              <a:t xml:space="preserve">Buy Me a Free Tier</a:t>
             </a:r>
             <a:endParaRPr lang="en-US" sz="975"/>
           </a:p>
@@ -22454,7 +22385,7 @@
                 <a:ea typeface="Arial"/>
                 <a:cs typeface="Arial"/>
               </a:rPr>
-              <a:t xml:space="preserve">Cry Me a Free Tier</a:t>
+              <a:t xml:space="preserve">Buy Me a Free Tier</a:t>
             </a:r>
             <a:endParaRPr lang="en-US" sz="975"/>
           </a:p>
@@ -22634,7 +22565,7 @@
                 <a:ea typeface="Arial"/>
                 <a:cs typeface="Arial"/>
               </a:rPr>
-              <a:t xml:space="preserve">Your acceptance rate is a price multiplier</a:t>
+              <a:t xml:space="preserve">Doubling on a Tuesday</a:t>
             </a:r>
             <a:endParaRPr lang="en-US" sz="2550"/>
           </a:p>
@@ -23632,7 +23563,7 @@
                 <a:ea typeface="Arial"/>
                 <a:cs typeface="Arial"/>
               </a:rPr>
-              <a:t xml:space="preserve">Cry Me a Free Tier</a:t>
+              <a:t xml:space="preserve">Buy Me a Free Tier</a:t>
             </a:r>
             <a:endParaRPr lang="en-US" sz="975"/>
           </a:p>

--- a/artifacts/speaking-portfolio-expanded/decks/free-tier-30min-handout.pptx
+++ b/artifacts/speaking-portfolio-expanded/decks/free-tier-30min-handout.pptx
@@ -23,7 +23,6 @@
     <p:sldId id="268" r:id="rIdSlide13"/>
     <p:sldId id="269" r:id="rIdSlide14"/>
     <p:sldId id="270" r:id="rIdSlide15"/>
-    <p:sldId id="271" r:id="rIdSlide16"/>
   </p:sldIdLst>
   <p:sldSz cx="10058400" cy="7772400" type="custom"/>
   <p:notesSz cx="6858000" cy="9144000"/>
@@ -405,7 +404,7 @@
                 <a:ea typeface="Arial"/>
                 <a:cs typeface="Arial"/>
               </a:rPr>
-              <a:t xml:space="preserve">Source slide 11. 19:00 to 23:00</a:t>
+              <a:t xml:space="preserve">Source slide 11. 19:00 to 22:00</a:t>
             </a:r>
             <a:endParaRPr lang="en-US" sz="1200"/>
           </a:p>
@@ -840,7 +839,7 @@
                 <a:ea typeface="Arial"/>
                 <a:cs typeface="Arial"/>
               </a:rPr>
-              <a:t xml:space="preserve">Source slide 11. 19:00 to 23:00</a:t>
+              <a:t xml:space="preserve">Source slide 11. 19:00 to 22:00</a:t>
             </a:r>
             <a:endParaRPr lang="en-US" sz="1200"/>
           </a:p>
@@ -1275,7 +1274,7 @@
                 <a:ea typeface="Arial"/>
                 <a:cs typeface="Arial"/>
               </a:rPr>
-              <a:t xml:space="preserve">Source slide 12. 23:00 to 26:00</a:t>
+              <a:t xml:space="preserve">Source slide 12. 22:00 to 25:00</a:t>
             </a:r>
             <a:endParaRPr lang="en-US" sz="1200"/>
           </a:p>
@@ -1460,52 +1459,6 @@
                 <a:cs typeface="Arial"/>
               </a:rPr>
               <a:t xml:space="preserve">This is the slide I would keep if you cut every other one. Oliver Williamson won a Nobel in 2009 for working out what happens when two parties make investments that only pay off inside their relationship. He called it asset specificity, and the trouble it produces is called hold-up.</a:t>
-            </a:r>
-            <a:endParaRPr lang="en-US" sz="1200"/>
-          </a:p>
-          <a:p>
-            <a:pPr marL="0" indent="0">
-              <a:lnSpc>
-                <a:spcPts val="1560"/>
-              </a:lnSpc>
-              <a:spcAft>
-                <a:spcPts val="0"/>
-              </a:spcAft>
-              <a:buNone/>
-            </a:pPr>
-            <a:r>
-              <a:rPr lang="en-US" sz="1200" b="0">
-                <a:solidFill>
-                  <a:srgbClr val="202b33"/>
-                </a:solidFill>
-                <a:latin typeface="Arial"/>
-                <a:ea typeface="Arial"/>
-                <a:cs typeface="Arial"/>
-              </a:rPr>
-              <a:t xml:space="preserve"/>
-            </a:r>
-            <a:endParaRPr lang="en-US" sz="1200"/>
-          </a:p>
-          <a:p>
-            <a:pPr marL="0" indent="0">
-              <a:lnSpc>
-                <a:spcPts val="1560"/>
-              </a:lnSpc>
-              <a:spcAft>
-                <a:spcPts val="0"/>
-              </a:spcAft>
-              <a:buNone/>
-            </a:pPr>
-            <a:r>
-              <a:rPr lang="en-US" sz="1200" b="0">
-                <a:solidFill>
-                  <a:srgbClr val="202b33"/>
-                </a:solidFill>
-                <a:latin typeface="Arial"/>
-                <a:ea typeface="Arial"/>
-                <a:cs typeface="Arial"/>
-              </a:rPr>
-              <a:t xml:space="preserve">The shape is always the same. You make an investment that is worth a great deal here and very little anywhere else. That surplus, the part that exists only because you are locked in, is a prize, and at renewal your counterparty can reach for it. Nobody has to be a villain. It is simply what the structure permits, and rational parties do it.</a:t>
             </a:r>
             <a:endParaRPr lang="en-US" sz="1200"/>
           </a:p>
@@ -1848,7 +1801,7 @@
                 <a:ea typeface="Arial"/>
                 <a:cs typeface="Arial"/>
               </a:rPr>
-              <a:t xml:space="preserve">Source slide 12. 23:00 to 26:00</a:t>
+              <a:t xml:space="preserve">Source slide 14. 25:00 to 27:30</a:t>
             </a:r>
             <a:endParaRPr lang="en-US" sz="1200"/>
           </a:p>
@@ -1894,7 +1847,7 @@
                 <a:ea typeface="Arial"/>
                 <a:cs typeface="Arial"/>
               </a:rPr>
-              <a:t xml:space="preserve">Word six: asset specificity. Word seven: hold-up.</a:t>
+              <a:t xml:space="preserve">What we pay today · What we pay without the offer · What we can survive paying</a:t>
             </a:r>
             <a:endParaRPr lang="en-US" sz="1200"/>
           </a:p>
@@ -1940,7 +1893,7 @@
                 <a:ea typeface="Arial"/>
                 <a:cs typeface="Arial"/>
               </a:rPr>
-              <a:t xml:space="preserve">An investment worth a lot inside this relationship and little outside it</a:t>
+              <a:t xml:space="preserve">Record gross usage separately from credits</a:t>
             </a:r>
             <a:endParaRPr lang="en-US" sz="1200"/>
           </a:p>
@@ -1986,7 +1939,7 @@
                 <a:ea typeface="Arial"/>
                 <a:cs typeface="Arial"/>
               </a:rPr>
-              <a:t xml:space="preserve">Your prompts, evals, fine-tunes, and that unlimited-usage clause</a:t>
+              <a:t xml:space="preserve">Keep an acceptance suite · Rehearse one replacement · Price the portability</a:t>
             </a:r>
             <a:endParaRPr lang="en-US" sz="1200"/>
           </a:p>
@@ -2032,7 +1985,7 @@
                 <a:ea typeface="Arial"/>
                 <a:cs typeface="Arial"/>
               </a:rPr>
-              <a:t xml:space="preserve">This is the slide I would keep if you cut every other one. Oliver Williamson won a Nobel in 2009 for working out what happens when two parties make investments that only pay off inside their relationship. He called it asset specificity, and the trouble it produces is called hold-up.</a:t>
+              <a:t xml:space="preserve">Three numbers, and if you take nothing else, take these. The effective rate you pay today. The gross rate with no promotional treatment, which is your exposure if the offer ends. And the highest rate at which this product still makes sense, which is the number nobody has ever calculated and everybody should. Sweep downward too, so you can cancel the optimization project when efficiency makes it pointless.</a:t>
             </a:r>
             <a:endParaRPr lang="en-US" sz="1200"/>
           </a:p>
@@ -2078,7 +2031,7 @@
                 <a:ea typeface="Arial"/>
                 <a:cs typeface="Arial"/>
               </a:rPr>
-              <a:t xml:space="preserve">The shape is always the same. You make an investment that is worth a great deal here and very little anywhere else. That surplus, the part that exists only because you are locked in, is a prize, and at renewal your counterparty can reach for it. Nobody has to be a villain. It is simply what the structure permits, and rational parties do it.</a:t>
+              <a:t xml:space="preserve">Four actions, and each one is one of the words. Record gross consumption separately from credits, so price and subsidy stop being the same number on your dashboard. Keep a small representative acceptance suite, because that is the strike test on your option. Rehearse one provider replacement before you need it, latency and recovery included, because that is how you reduce asset specificity from a slide into a fact. And put the estimated cost per accepted outcome in the design doc next to the latency budget, because that is the meter, and the meter is the fix for moral hazard.</a:t>
             </a:r>
             <a:endParaRPr lang="en-US" sz="1200"/>
           </a:p>
@@ -2124,29 +2077,6 @@
                 <a:ea typeface="Arial"/>
                 <a:cs typeface="Arial"/>
               </a:rPr>
-              <a:t xml:space="preserve">Now inventory your specific assets. Prompts tuned against one model's quirks. An eval suite that only means anything against one provider's outputs. A fine-tune. A latency budget that assumes one serving stack. And the sharpest one, an unlimited-usage promise you made to your customers, priced against an input you do not control and cannot cap. Every one of those is worth more inside the relationship than outside it.</a:t>
-            </a:r>
-            <a:endParaRPr lang="en-US" sz="1200"/>
-          </a:p>
-          <a:p>
-            <a:pPr marL="0" indent="0">
-              <a:lnSpc>
-                <a:spcPts val="1560"/>
-              </a:lnSpc>
-              <a:spcAft>
-                <a:spcPts val="0"/>
-              </a:spcAft>
-              <a:buNone/>
-            </a:pPr>
-            <a:r>
-              <a:rPr lang="en-US" sz="1200" b="0">
-                <a:solidFill>
-                  <a:srgbClr val="202b33"/>
-                </a:solidFill>
-                <a:latin typeface="Arial"/>
-                <a:ea typeface="Arial"/>
-                <a:cs typeface="Arial"/>
-              </a:rPr>
               <a:t xml:space="preserve"/>
             </a:r>
             <a:endParaRPr lang="en-US" sz="1200"/>
@@ -2170,29 +2100,6 @@
                 <a:ea typeface="Arial"/>
                 <a:cs typeface="Arial"/>
               </a:rPr>
-              <a:t xml:space="preserve">So stop thinking of this as shopping, where the customer holds the power because they can leave. You are contracting, with a much better capitalized counterparty, and your architecture is the collateral. That reframe is the whole talk, and everything after this is just a way of reducing specificity or pricing the exposure.</a:t>
-            </a:r>
-            <a:endParaRPr lang="en-US" sz="1200"/>
-          </a:p>
-          <a:p>
-            <a:pPr marL="0" indent="0">
-              <a:lnSpc>
-                <a:spcPts val="1560"/>
-              </a:lnSpc>
-              <a:spcAft>
-                <a:spcPts val="0"/>
-              </a:spcAft>
-              <a:buNone/>
-            </a:pPr>
-            <a:r>
-              <a:rPr lang="en-US" sz="1200" b="0">
-                <a:solidFill>
-                  <a:srgbClr val="202b33"/>
-                </a:solidFill>
-                <a:latin typeface="Arial"/>
-                <a:ea typeface="Arial"/>
-                <a:cs typeface="Arial"/>
-              </a:rPr>
               <a:t xml:space="preserve"/>
             </a:r>
             <a:endParaRPr lang="en-US" sz="1200"/>
@@ -2216,6 +2123,29 @@
                 <a:ea typeface="Arial"/>
                 <a:cs typeface="Arial"/>
               </a:rPr>
+              <a:t xml:space="preserve">45 seconds in pairs on the third price. Most rooms have never computed it and the silence is useful.</a:t>
+            </a:r>
+            <a:endParaRPr lang="en-US" sz="1200"/>
+          </a:p>
+          <a:p>
+            <a:pPr marL="0" indent="0">
+              <a:lnSpc>
+                <a:spcPts val="1560"/>
+              </a:lnSpc>
+              <a:spcAft>
+                <a:spcPts val="0"/>
+              </a:spcAft>
+              <a:buNone/>
+            </a:pPr>
+            <a:r>
+              <a:rPr lang="en-US" sz="1200" b="0">
+                <a:solidFill>
+                  <a:srgbClr val="202b33"/>
+                </a:solidFill>
+                <a:latin typeface="Arial"/>
+                <a:ea typeface="Arial"/>
+                <a:cs typeface="Arial"/>
+              </a:rPr>
               <a:t xml:space="preserve"/>
             </a:r>
             <a:endParaRPr lang="en-US" sz="1200"/>
@@ -2240,75 +2170,6 @@
                 <a:cs typeface="Arial"/>
               </a:rPr>
               <a:t xml:space="preserve"/>
-            </a:r>
-            <a:endParaRPr lang="en-US" sz="1200"/>
-          </a:p>
-          <a:p>
-            <a:pPr marL="0" indent="0">
-              <a:lnSpc>
-                <a:spcPts val="1560"/>
-              </a:lnSpc>
-              <a:spcAft>
-                <a:spcPts val="0"/>
-              </a:spcAft>
-              <a:buNone/>
-            </a:pPr>
-            <a:r>
-              <a:rPr lang="en-US" sz="1200" b="0">
-                <a:solidFill>
-                  <a:srgbClr val="202b33"/>
-                </a:solidFill>
-                <a:latin typeface="Arial"/>
-                <a:ea typeface="Arial"/>
-                <a:cs typeface="Arial"/>
-              </a:rPr>
-              <a:t xml:space="preserve"/>
-            </a:r>
-            <a:endParaRPr lang="en-US" sz="1200"/>
-          </a:p>
-          <a:p>
-            <a:pPr marL="0" indent="0">
-              <a:lnSpc>
-                <a:spcPts val="1560"/>
-              </a:lnSpc>
-              <a:spcAft>
-                <a:spcPts val="0"/>
-              </a:spcAft>
-              <a:buNone/>
-            </a:pPr>
-            <a:r>
-              <a:rPr lang="en-US" sz="1200" b="0">
-                <a:solidFill>
-                  <a:srgbClr val="202b33"/>
-                </a:solidFill>
-                <a:latin typeface="Arial"/>
-                <a:ea typeface="Arial"/>
-                <a:cs typeface="Arial"/>
-              </a:rPr>
-              <a:t xml:space="preserve"/>
-            </a:r>
-            <a:endParaRPr lang="en-US" sz="1200"/>
-          </a:p>
-          <a:p>
-            <a:pPr marL="0" indent="0">
-              <a:lnSpc>
-                <a:spcPts val="1560"/>
-              </a:lnSpc>
-              <a:spcAft>
-                <a:spcPts val="0"/>
-              </a:spcAft>
-              <a:buNone/>
-            </a:pPr>
-            <a:r>
-              <a:rPr lang="en-US" sz="1200" b="0">
-                <a:solidFill>
-                  <a:srgbClr val="202b33"/>
-                </a:solidFill>
-                <a:latin typeface="Arial"/>
-                <a:ea typeface="Arial"/>
-                <a:cs typeface="Arial"/>
-              </a:rPr>
-              <a:t xml:space="preserve">Bridge: reversibility is a real option with a value and a premium, so price it against your exposure instead of arguing about it on vibes.</a:t>
             </a:r>
             <a:endParaRPr lang="en-US" sz="1200"/>
           </a:p>
@@ -2421,7 +2282,7 @@
                 <a:ea typeface="Arial"/>
                 <a:cs typeface="Arial"/>
               </a:rPr>
-              <a:t xml:space="preserve">Source slide 14. 26:00 to 28:30</a:t>
+              <a:t xml:space="preserve">Source slide 15. 27:30 to 30:00</a:t>
             </a:r>
             <a:endParaRPr lang="en-US" sz="1200"/>
           </a:p>
@@ -2467,7 +2328,7 @@
                 <a:ea typeface="Arial"/>
                 <a:cs typeface="Arial"/>
               </a:rPr>
-              <a:t xml:space="preserve">What we pay today · What we pay without the offer · What we can survive paying</a:t>
+              <a:t xml:space="preserve">Externality · Induced demand · Jevons paradox · Path dependence</a:t>
             </a:r>
             <a:endParaRPr lang="en-US" sz="1200"/>
           </a:p>
@@ -2513,7 +2374,7 @@
                 <a:ea typeface="Arial"/>
                 <a:cs typeface="Arial"/>
               </a:rPr>
-              <a:t xml:space="preserve">Record gross usage separately from credits</a:t>
+              <a:t xml:space="preserve">Moral hazard · Credible commitment · Asset specificity · Real option</a:t>
             </a:r>
             <a:endParaRPr lang="en-US" sz="1200"/>
           </a:p>
@@ -2559,7 +2420,7 @@
                 <a:ea typeface="Arial"/>
                 <a:cs typeface="Arial"/>
               </a:rPr>
-              <a:t xml:space="preserve">Keep an acceptance suite · Rehearse one replacement · Price the portability</a:t>
+              <a:t xml:space="preserve">Build for more than one price.</a:t>
             </a:r>
             <a:endParaRPr lang="en-US" sz="1200"/>
           </a:p>
@@ -2605,7 +2466,7 @@
                 <a:ea typeface="Arial"/>
                 <a:cs typeface="Arial"/>
               </a:rPr>
-              <a:t xml:space="preserve">Three numbers, and if you take nothing else, take these. The effective rate you pay today. The gross rate with no promotional treatment, which is your exposure if the offer ends. And the highest rate at which this product still makes sense, which is the number nobody has ever calculated and everybody should. Sweep downward too, so you can cancel the optimization project when efficiency makes it pointless.</a:t>
+              <a:t xml:space="preserve">Back to the electricity. Use the cheap input. It is genuinely great and I am not asking anyone to be miserable about it. Just understand what it encouraged you to build, and keep the expensive decisions reversible while you find out.</a:t>
             </a:r>
             <a:endParaRPr lang="en-US" sz="1200"/>
           </a:p>
@@ -2651,7 +2512,7 @@
                 <a:ea typeface="Arial"/>
                 <a:cs typeface="Arial"/>
               </a:rPr>
-              <a:t xml:space="preserve">Four actions, and each one is one of the words. Record gross consumption separately from credits, so price and subsidy stop being the same number on your dashboard. Keep a small representative acceptance suite, because that is the strike test on your option. Rehearse one provider replacement before you need it, latency and recovery included, because that is how you reduce asset specificity from a slide into a fact. And put the estimated cost per accepted outcome in the design doc next to the latency budget, because that is the meter, and the meter is the fix for moral hazard.</a:t>
+              <a:t xml:space="preserve">There are your eight words. Externality, because the cost moved rather than vanished. Induced demand and Jevons, because cheaper made you use more, not less. Path dependence, because the lots stay built. Moral hazard, because whoever chooses is not whoever pays. Credible commitment, because those contracts are moves in a game and not disclosures about it. Asset specificity, because your architecture is worth more here than anywhere else. And real option, because reversibility is something you buy, not something you feel.</a:t>
             </a:r>
             <a:endParaRPr lang="en-US" sz="1200"/>
           </a:p>
@@ -2697,6 +2558,29 @@
                 <a:ea typeface="Arial"/>
                 <a:cs typeface="Arial"/>
               </a:rPr>
+              <a:t xml:space="preserve">Cheap intelligence changes incentives before it changes organizations.</a:t>
+            </a:r>
+            <a:endParaRPr lang="en-US" sz="1200"/>
+          </a:p>
+          <a:p>
+            <a:pPr marL="0" indent="0">
+              <a:lnSpc>
+                <a:spcPts val="1560"/>
+              </a:lnSpc>
+              <a:spcAft>
+                <a:spcPts val="0"/>
+              </a:spcAft>
+              <a:buNone/>
+            </a:pPr>
+            <a:r>
+              <a:rPr lang="en-US" sz="1200" b="0">
+                <a:solidFill>
+                  <a:srgbClr val="202b33"/>
+                </a:solidFill>
+                <a:latin typeface="Arial"/>
+                <a:ea typeface="Arial"/>
+                <a:cs typeface="Arial"/>
+              </a:rPr>
               <a:t xml:space="preserve"/>
             </a:r>
             <a:endParaRPr lang="en-US" sz="1200"/>
@@ -2743,7 +2627,30 @@
                 <a:ea typeface="Arial"/>
                 <a:cs typeface="Arial"/>
               </a:rPr>
-              <a:t xml:space="preserve">45 seconds in pairs on the third price. Most rooms have never computed it and the silence is useful.</a:t>
+              <a:t xml:space="preserve"/>
+            </a:r>
+            <a:endParaRPr lang="en-US" sz="1200"/>
+          </a:p>
+          <a:p>
+            <a:pPr marL="0" indent="0">
+              <a:lnSpc>
+                <a:spcPts val="1560"/>
+              </a:lnSpc>
+              <a:spcAft>
+                <a:spcPts val="0"/>
+              </a:spcAft>
+              <a:buNone/>
+            </a:pPr>
+            <a:r>
+              <a:rPr lang="en-US" sz="1200" b="0">
+                <a:solidFill>
+                  <a:srgbClr val="202b33"/>
+                </a:solidFill>
+                <a:latin typeface="Arial"/>
+                <a:ea typeface="Arial"/>
+                <a:cs typeface="Arial"/>
+              </a:rPr>
+              <a:t xml:space="preserve">Say the last line slowly, then stop talking. For questions, jump back to the sweep table if this route kept slide 11.</a:t>
             </a:r>
             <a:endParaRPr lang="en-US" sz="1200"/>
           </a:p>
@@ -2856,579 +2763,6 @@
                 <a:ea typeface="Arial"/>
                 <a:cs typeface="Arial"/>
               </a:rPr>
-              <a:t xml:space="preserve">Buy Me a Free Tier</a:t>
-            </a:r>
-            <a:endParaRPr lang="en-US" sz="1200"/>
-          </a:p>
-          <a:p>
-            <a:pPr marL="0" indent="0">
-              <a:lnSpc>
-                <a:spcPts val="1560"/>
-              </a:lnSpc>
-              <a:spcAft>
-                <a:spcPts val="0"/>
-              </a:spcAft>
-              <a:buNone/>
-            </a:pPr>
-            <a:r>
-              <a:rPr lang="en-US" sz="1200" b="0">
-                <a:solidFill>
-                  <a:srgbClr val="202b33"/>
-                </a:solidFill>
-                <a:latin typeface="Arial"/>
-                <a:ea typeface="Arial"/>
-                <a:cs typeface="Arial"/>
-              </a:rPr>
-              <a:t xml:space="preserve"/>
-            </a:r>
-            <a:endParaRPr lang="en-US" sz="1200"/>
-          </a:p>
-          <a:p>
-            <a:pPr marL="0" indent="0">
-              <a:lnSpc>
-                <a:spcPts val="1560"/>
-              </a:lnSpc>
-              <a:spcAft>
-                <a:spcPts val="0"/>
-              </a:spcAft>
-              <a:buNone/>
-            </a:pPr>
-            <a:r>
-              <a:rPr lang="en-US" sz="1200" b="0">
-                <a:solidFill>
-                  <a:srgbClr val="202b33"/>
-                </a:solidFill>
-                <a:latin typeface="Arial"/>
-                <a:ea typeface="Arial"/>
-                <a:cs typeface="Arial"/>
-              </a:rPr>
-              <a:t xml:space="preserve">Source slide 15. 28:30 to 30:00</a:t>
-            </a:r>
-            <a:endParaRPr lang="en-US" sz="1200"/>
-          </a:p>
-          <a:p>
-            <a:pPr marL="0" indent="0">
-              <a:lnSpc>
-                <a:spcPts val="1560"/>
-              </a:lnSpc>
-              <a:spcAft>
-                <a:spcPts val="0"/>
-              </a:spcAft>
-              <a:buNone/>
-            </a:pPr>
-            <a:r>
-              <a:rPr lang="en-US" sz="1200" b="0">
-                <a:solidFill>
-                  <a:srgbClr val="202b33"/>
-                </a:solidFill>
-                <a:latin typeface="Arial"/>
-                <a:ea typeface="Arial"/>
-                <a:cs typeface="Arial"/>
-              </a:rPr>
-              <a:t xml:space="preserve"/>
-            </a:r>
-            <a:endParaRPr lang="en-US" sz="1200"/>
-          </a:p>
-          <a:p>
-            <a:pPr marL="0" indent="0">
-              <a:lnSpc>
-                <a:spcPts val="1560"/>
-              </a:lnSpc>
-              <a:spcAft>
-                <a:spcPts val="0"/>
-              </a:spcAft>
-              <a:buNone/>
-            </a:pPr>
-            <a:r>
-              <a:rPr lang="en-US" sz="1200" b="0">
-                <a:solidFill>
-                  <a:srgbClr val="202b33"/>
-                </a:solidFill>
-                <a:latin typeface="Arial"/>
-                <a:ea typeface="Arial"/>
-                <a:cs typeface="Arial"/>
-              </a:rPr>
-              <a:t xml:space="preserve">Externality · Induced demand · Jevons paradox · Path dependence</a:t>
-            </a:r>
-            <a:endParaRPr lang="en-US" sz="1200"/>
-          </a:p>
-          <a:p>
-            <a:pPr marL="0" indent="0">
-              <a:lnSpc>
-                <a:spcPts val="1560"/>
-              </a:lnSpc>
-              <a:spcAft>
-                <a:spcPts val="0"/>
-              </a:spcAft>
-              <a:buNone/>
-            </a:pPr>
-            <a:r>
-              <a:rPr lang="en-US" sz="1200" b="0">
-                <a:solidFill>
-                  <a:srgbClr val="202b33"/>
-                </a:solidFill>
-                <a:latin typeface="Arial"/>
-                <a:ea typeface="Arial"/>
-                <a:cs typeface="Arial"/>
-              </a:rPr>
-              <a:t xml:space="preserve"/>
-            </a:r>
-            <a:endParaRPr lang="en-US" sz="1200"/>
-          </a:p>
-          <a:p>
-            <a:pPr marL="0" indent="0">
-              <a:lnSpc>
-                <a:spcPts val="1560"/>
-              </a:lnSpc>
-              <a:spcAft>
-                <a:spcPts val="0"/>
-              </a:spcAft>
-              <a:buNone/>
-            </a:pPr>
-            <a:r>
-              <a:rPr lang="en-US" sz="1200" b="0">
-                <a:solidFill>
-                  <a:srgbClr val="202b33"/>
-                </a:solidFill>
-                <a:latin typeface="Arial"/>
-                <a:ea typeface="Arial"/>
-                <a:cs typeface="Arial"/>
-              </a:rPr>
-              <a:t xml:space="preserve">Moral hazard · Credible commitment · Asset specificity · Real option</a:t>
-            </a:r>
-            <a:endParaRPr lang="en-US" sz="1200"/>
-          </a:p>
-          <a:p>
-            <a:pPr marL="0" indent="0">
-              <a:lnSpc>
-                <a:spcPts val="1560"/>
-              </a:lnSpc>
-              <a:spcAft>
-                <a:spcPts val="0"/>
-              </a:spcAft>
-              <a:buNone/>
-            </a:pPr>
-            <a:r>
-              <a:rPr lang="en-US" sz="1200" b="0">
-                <a:solidFill>
-                  <a:srgbClr val="202b33"/>
-                </a:solidFill>
-                <a:latin typeface="Arial"/>
-                <a:ea typeface="Arial"/>
-                <a:cs typeface="Arial"/>
-              </a:rPr>
-              <a:t xml:space="preserve"/>
-            </a:r>
-            <a:endParaRPr lang="en-US" sz="1200"/>
-          </a:p>
-          <a:p>
-            <a:pPr marL="0" indent="0">
-              <a:lnSpc>
-                <a:spcPts val="1560"/>
-              </a:lnSpc>
-              <a:spcAft>
-                <a:spcPts val="0"/>
-              </a:spcAft>
-              <a:buNone/>
-            </a:pPr>
-            <a:r>
-              <a:rPr lang="en-US" sz="1200" b="0">
-                <a:solidFill>
-                  <a:srgbClr val="202b33"/>
-                </a:solidFill>
-                <a:latin typeface="Arial"/>
-                <a:ea typeface="Arial"/>
-                <a:cs typeface="Arial"/>
-              </a:rPr>
-              <a:t xml:space="preserve">Build for more than one price.</a:t>
-            </a:r>
-            <a:endParaRPr lang="en-US" sz="1200"/>
-          </a:p>
-          <a:p>
-            <a:pPr marL="0" indent="0">
-              <a:lnSpc>
-                <a:spcPts val="1560"/>
-              </a:lnSpc>
-              <a:spcAft>
-                <a:spcPts val="0"/>
-              </a:spcAft>
-              <a:buNone/>
-            </a:pPr>
-            <a:r>
-              <a:rPr lang="en-US" sz="1200" b="0">
-                <a:solidFill>
-                  <a:srgbClr val="202b33"/>
-                </a:solidFill>
-                <a:latin typeface="Arial"/>
-                <a:ea typeface="Arial"/>
-                <a:cs typeface="Arial"/>
-              </a:rPr>
-              <a:t xml:space="preserve"/>
-            </a:r>
-            <a:endParaRPr lang="en-US" sz="1200"/>
-          </a:p>
-          <a:p>
-            <a:pPr marL="0" indent="0">
-              <a:lnSpc>
-                <a:spcPts val="1560"/>
-              </a:lnSpc>
-              <a:spcAft>
-                <a:spcPts val="0"/>
-              </a:spcAft>
-              <a:buNone/>
-            </a:pPr>
-            <a:r>
-              <a:rPr lang="en-US" sz="1200" b="0">
-                <a:solidFill>
-                  <a:srgbClr val="202b33"/>
-                </a:solidFill>
-                <a:latin typeface="Arial"/>
-                <a:ea typeface="Arial"/>
-                <a:cs typeface="Arial"/>
-              </a:rPr>
-              <a:t xml:space="preserve">Back to the electricity. Use the cheap input. It is genuinely great and I am not asking anyone to be miserable about it. Just understand what it encouraged you to build, and keep the expensive decisions reversible while you find out.</a:t>
-            </a:r>
-            <a:endParaRPr lang="en-US" sz="1200"/>
-          </a:p>
-          <a:p>
-            <a:pPr marL="0" indent="0">
-              <a:lnSpc>
-                <a:spcPts val="1560"/>
-              </a:lnSpc>
-              <a:spcAft>
-                <a:spcPts val="0"/>
-              </a:spcAft>
-              <a:buNone/>
-            </a:pPr>
-            <a:r>
-              <a:rPr lang="en-US" sz="1200" b="0">
-                <a:solidFill>
-                  <a:srgbClr val="202b33"/>
-                </a:solidFill>
-                <a:latin typeface="Arial"/>
-                <a:ea typeface="Arial"/>
-                <a:cs typeface="Arial"/>
-              </a:rPr>
-              <a:t xml:space="preserve"/>
-            </a:r>
-            <a:endParaRPr lang="en-US" sz="1200"/>
-          </a:p>
-          <a:p>
-            <a:pPr marL="0" indent="0">
-              <a:lnSpc>
-                <a:spcPts val="1560"/>
-              </a:lnSpc>
-              <a:spcAft>
-                <a:spcPts val="0"/>
-              </a:spcAft>
-              <a:buNone/>
-            </a:pPr>
-            <a:r>
-              <a:rPr lang="en-US" sz="1200" b="0">
-                <a:solidFill>
-                  <a:srgbClr val="202b33"/>
-                </a:solidFill>
-                <a:latin typeface="Arial"/>
-                <a:ea typeface="Arial"/>
-                <a:cs typeface="Arial"/>
-              </a:rPr>
-              <a:t xml:space="preserve">There are your eight words. Externality, because the cost moved rather than vanished. Induced demand and Jevons, because cheaper made you use more, not less. Path dependence, because the lots stay built. Moral hazard, because whoever chooses is not whoever pays. Credible commitment, because those contracts are moves in a game and not disclosures about it. Asset specificity, because your architecture is worth more here than anywhere else. And real option, because reversibility is something you buy, not something you feel.</a:t>
-            </a:r>
-            <a:endParaRPr lang="en-US" sz="1200"/>
-          </a:p>
-          <a:p>
-            <a:pPr marL="0" indent="0">
-              <a:lnSpc>
-                <a:spcPts val="1560"/>
-              </a:lnSpc>
-              <a:spcAft>
-                <a:spcPts val="0"/>
-              </a:spcAft>
-              <a:buNone/>
-            </a:pPr>
-            <a:r>
-              <a:rPr lang="en-US" sz="1200" b="0">
-                <a:solidFill>
-                  <a:srgbClr val="202b33"/>
-                </a:solidFill>
-                <a:latin typeface="Arial"/>
-                <a:ea typeface="Arial"/>
-                <a:cs typeface="Arial"/>
-              </a:rPr>
-              <a:t xml:space="preserve"/>
-            </a:r>
-            <a:endParaRPr lang="en-US" sz="1200"/>
-          </a:p>
-          <a:p>
-            <a:pPr marL="0" indent="0">
-              <a:lnSpc>
-                <a:spcPts val="1560"/>
-              </a:lnSpc>
-              <a:spcAft>
-                <a:spcPts val="0"/>
-              </a:spcAft>
-              <a:buNone/>
-            </a:pPr>
-            <a:r>
-              <a:rPr lang="en-US" sz="1200" b="0">
-                <a:solidFill>
-                  <a:srgbClr val="202b33"/>
-                </a:solidFill>
-                <a:latin typeface="Arial"/>
-                <a:ea typeface="Arial"/>
-                <a:cs typeface="Arial"/>
-              </a:rPr>
-              <a:t xml:space="preserve">Some low prices are temporary. Some are a preview of genuinely cheaper production. You do not have to know which. You have to measure outcomes and keep the big choices reversible either way.</a:t>
-            </a:r>
-            <a:endParaRPr lang="en-US" sz="1200"/>
-          </a:p>
-          <a:p>
-            <a:pPr marL="0" indent="0">
-              <a:lnSpc>
-                <a:spcPts val="1560"/>
-              </a:lnSpc>
-              <a:spcAft>
-                <a:spcPts val="0"/>
-              </a:spcAft>
-              <a:buNone/>
-            </a:pPr>
-            <a:r>
-              <a:rPr lang="en-US" sz="1200" b="0">
-                <a:solidFill>
-                  <a:srgbClr val="202b33"/>
-                </a:solidFill>
-                <a:latin typeface="Arial"/>
-                <a:ea typeface="Arial"/>
-                <a:cs typeface="Arial"/>
-              </a:rPr>
-              <a:t xml:space="preserve"/>
-            </a:r>
-            <a:endParaRPr lang="en-US" sz="1200"/>
-          </a:p>
-          <a:p>
-            <a:pPr marL="0" indent="0">
-              <a:lnSpc>
-                <a:spcPts val="1560"/>
-              </a:lnSpc>
-              <a:spcAft>
-                <a:spcPts val="0"/>
-              </a:spcAft>
-              <a:buNone/>
-            </a:pPr>
-            <a:r>
-              <a:rPr lang="en-US" sz="1200" b="0">
-                <a:solidFill>
-                  <a:srgbClr val="202b33"/>
-                </a:solidFill>
-                <a:latin typeface="Arial"/>
-                <a:ea typeface="Arial"/>
-                <a:cs typeface="Arial"/>
-              </a:rPr>
-              <a:t xml:space="preserve">Cheap intelligence changes incentives before it changes organizations.</a:t>
-            </a:r>
-            <a:endParaRPr lang="en-US" sz="1200"/>
-          </a:p>
-          <a:p>
-            <a:pPr marL="0" indent="0">
-              <a:lnSpc>
-                <a:spcPts val="1560"/>
-              </a:lnSpc>
-              <a:spcAft>
-                <a:spcPts val="0"/>
-              </a:spcAft>
-              <a:buNone/>
-            </a:pPr>
-            <a:r>
-              <a:rPr lang="en-US" sz="1200" b="0">
-                <a:solidFill>
-                  <a:srgbClr val="202b33"/>
-                </a:solidFill>
-                <a:latin typeface="Arial"/>
-                <a:ea typeface="Arial"/>
-                <a:cs typeface="Arial"/>
-              </a:rPr>
-              <a:t xml:space="preserve"/>
-            </a:r>
-            <a:endParaRPr lang="en-US" sz="1200"/>
-          </a:p>
-          <a:p>
-            <a:pPr marL="0" indent="0">
-              <a:lnSpc>
-                <a:spcPts val="1560"/>
-              </a:lnSpc>
-              <a:spcAft>
-                <a:spcPts val="0"/>
-              </a:spcAft>
-              <a:buNone/>
-            </a:pPr>
-            <a:r>
-              <a:rPr lang="en-US" sz="1200" b="0">
-                <a:solidFill>
-                  <a:srgbClr val="202b33"/>
-                </a:solidFill>
-                <a:latin typeface="Arial"/>
-                <a:ea typeface="Arial"/>
-                <a:cs typeface="Arial"/>
-              </a:rPr>
-              <a:t xml:space="preserve"/>
-            </a:r>
-            <a:endParaRPr lang="en-US" sz="1200"/>
-          </a:p>
-          <a:p>
-            <a:pPr marL="0" indent="0">
-              <a:lnSpc>
-                <a:spcPts val="1560"/>
-              </a:lnSpc>
-              <a:spcAft>
-                <a:spcPts val="0"/>
-              </a:spcAft>
-              <a:buNone/>
-            </a:pPr>
-            <a:r>
-              <a:rPr lang="en-US" sz="1200" b="0">
-                <a:solidFill>
-                  <a:srgbClr val="202b33"/>
-                </a:solidFill>
-                <a:latin typeface="Arial"/>
-                <a:ea typeface="Arial"/>
-                <a:cs typeface="Arial"/>
-              </a:rPr>
-              <a:t xml:space="preserve"/>
-            </a:r>
-            <a:endParaRPr lang="en-US" sz="1200"/>
-          </a:p>
-          <a:p>
-            <a:pPr marL="0" indent="0">
-              <a:lnSpc>
-                <a:spcPts val="1560"/>
-              </a:lnSpc>
-              <a:spcAft>
-                <a:spcPts val="0"/>
-              </a:spcAft>
-              <a:buNone/>
-            </a:pPr>
-            <a:r>
-              <a:rPr lang="en-US" sz="1200" b="0">
-                <a:solidFill>
-                  <a:srgbClr val="202b33"/>
-                </a:solidFill>
-                <a:latin typeface="Arial"/>
-                <a:ea typeface="Arial"/>
-                <a:cs typeface="Arial"/>
-              </a:rPr>
-              <a:t xml:space="preserve">Say the last line slowly, then stop talking. For questions, jump back to the sweep table if this route kept slide 11.</a:t>
-            </a:r>
-            <a:endParaRPr lang="en-US" sz="1200"/>
-          </a:p>
-          <a:p>
-            <a:pPr marL="0" indent="0">
-              <a:lnSpc>
-                <a:spcPts val="1560"/>
-              </a:lnSpc>
-              <a:spcAft>
-                <a:spcPts val="0"/>
-              </a:spcAft>
-              <a:buNone/>
-            </a:pPr>
-            <a:r>
-              <a:rPr lang="en-US" sz="1200" b="0">
-                <a:solidFill>
-                  <a:srgbClr val="202b33"/>
-                </a:solidFill>
-                <a:latin typeface="Arial"/>
-                <a:ea typeface="Arial"/>
-                <a:cs typeface="Arial"/>
-              </a:rPr>
-              <a:t xml:space="preserve"/>
-            </a:r>
-            <a:endParaRPr lang="en-US" sz="1200"/>
-          </a:p>
-          <a:p>
-            <a:pPr marL="0" indent="0">
-              <a:lnSpc>
-                <a:spcPts val="1560"/>
-              </a:lnSpc>
-              <a:spcAft>
-                <a:spcPts val="0"/>
-              </a:spcAft>
-              <a:buNone/>
-            </a:pPr>
-            <a:r>
-              <a:rPr lang="en-US" sz="1200" b="0">
-                <a:solidFill>
-                  <a:srgbClr val="202b33"/>
-                </a:solidFill>
-                <a:latin typeface="Arial"/>
-                <a:ea typeface="Arial"/>
-                <a:cs typeface="Arial"/>
-              </a:rPr>
-              <a:t xml:space="preserve"/>
-            </a:r>
-            <a:endParaRPr lang="en-US" sz="1200"/>
-          </a:p>
-        </p:txBody>
-      </p:sp>
-    </p:spTree>
-  </p:cSld>
-  <p:clrMapOvr>
-    <a:masterClrMapping/>
-  </p:clrMapOvr>
-</p:notes>
-</file>
-
-<file path=ppt/notesSlides/notesSlide16.xml><?xml version="1.0" encoding="utf-8"?>
-<p:notes xmlns:a="http://schemas.openxmlformats.org/drawingml/2006/main" xmlns:r="http://schemas.openxmlformats.org/officeDocument/2006/relationships" xmlns:p="http://schemas.openxmlformats.org/presentationml/2006/main">
-  <p:cSld>
-    <p:spTree>
-      <p:nvGrpSpPr>
-        <p:cNvPr id="1" name=""/>
-        <p:cNvGrpSpPr/>
-        <p:nvPr/>
-      </p:nvGrpSpPr>
-      <p:grpSpPr>
-        <a:xfrm>
-          <a:off x="0" y="0"/>
-          <a:ext cx="0" cy="0"/>
-          <a:chOff x="0" y="0"/>
-          <a:chExt cx="0" cy="0"/>
-        </a:xfrm>
-      </p:grpSpPr>
-      <p:sp>
-        <p:nvSpPr>
-          <p:cNvPr id="2" name="Presenter notes"/>
-          <p:cNvSpPr txBox="1"/>
-          <p:nvPr>
-            <p:ph type="body" idx="1"/>
-          </p:nvPr>
-        </p:nvSpPr>
-        <p:spPr>
-          <a:xfrm>
-            <a:off x="457200" y="1428750"/>
-            <a:ext cx="5715000" cy="6667500"/>
-          </a:xfrm>
-        </p:spPr>
-        <p:txBody>
-          <a:bodyPr/>
-          <a:lstStyle/>
-          <a:p>
-            <a:pPr marL="0" indent="0">
-              <a:lnSpc>
-                <a:spcPts val="1560"/>
-              </a:lnSpc>
-              <a:spcAft>
-                <a:spcPts val="0"/>
-              </a:spcAft>
-              <a:buNone/>
-            </a:pPr>
-            <a:r>
-              <a:rPr lang="en-US" sz="1200" b="0">
-                <a:solidFill>
-                  <a:srgbClr val="202b33"/>
-                </a:solidFill>
-                <a:latin typeface="Arial"/>
-                <a:ea typeface="Arial"/>
-                <a:cs typeface="Arial"/>
-              </a:rPr>
               <a:t xml:space="preserve">Brooke Group Ltd. v. Brown &amp; Williamson Tobacco Corp., 509 U.S. 209 (1993), on the recoupment requirement in predatory-pricing claims.</a:t>
             </a:r>
             <a:endParaRPr lang="en-US" sz="1200"/>
@@ -5194,7 +4528,7 @@
                 <a:ea typeface="Arial"/>
                 <a:cs typeface="Arial"/>
               </a:rPr>
-              <a:t xml:space="preserve">Bridge: the enormous compute commitments everyone quotes are credible commitments in Schelling's sense, moves in a war of attrition, not disclosures about cost.</a:t>
+              <a:t xml:space="preserve">Bridge: the enormous compute commitments everyone quotes are credible commitments in Schelling's sense, moves in a war of attrition, not disclosures about cost. And note who is not a player in that game. Somebody is buying your free tier, and it is not you. You are not a combatant. You are the terrain.</a:t>
             </a:r>
             <a:endParaRPr lang="en-US" sz="1200"/>
           </a:p>
@@ -6156,7 +5490,7 @@
                 <a:ea typeface="Arial"/>
                 <a:cs typeface="Arial"/>
               </a:rPr>
-              <a:t xml:space="preserve">So: your per-token price has fallen off a cliff over the last few years, and your bill went up. Everyone in this room has had that conversation with a CFO and lost it. You are not being gouged and you did not do anything wrong. Spend is price times consumption, and consumption is jobs times calls per job times tokens per call. Cheapness moved every term on the right. Epoch's data through 2025 shows the price of a fixed capability falling fast and very unevenly by task, which is real and worth knowing, and is also exactly the condition under which total spend rises.</a:t>
+              <a:t xml:space="preserve">Both things can be fine. A falling price and a growing bill coexist comfortably as long as customer value grows faster. That is the relationship to measure, and almost nobody measures it.</a:t>
             </a:r>
             <a:endParaRPr lang="en-US" sz="1200"/>
           </a:p>
@@ -6499,7 +5833,7 @@
                 <a:ea typeface="Arial"/>
                 <a:cs typeface="Arial"/>
               </a:rPr>
-              <a:t xml:space="preserve">Source slide 7. 11:30 to 14:30</a:t>
+              <a:t xml:space="preserve">Source slide 7. 11:30 to 14:00</a:t>
             </a:r>
             <a:endParaRPr lang="en-US" sz="1200"/>
           </a:p>
@@ -7026,7 +6360,7 @@
                 <a:ea typeface="Arial"/>
                 <a:cs typeface="Arial"/>
               </a:rPr>
-              <a:t xml:space="preserve">Source slide 9. 14:30 to 16:30</a:t>
+              <a:t xml:space="preserve">Source slide 9. 14:00 to 16:30</a:t>
             </a:r>
             <a:endParaRPr lang="en-US" sz="1200"/>
           </a:p>
@@ -10571,30 +9905,30 @@
                 <a:ea typeface="Arial"/>
                 <a:cs typeface="Arial"/>
               </a:rPr>
-              <a:t xml:space="preserve">The shape is always the same. You make an</a:t>
-            </a:r>
-            <a:endParaRPr lang="en-US" sz="1500"/>
-          </a:p>
-          <a:p>
-            <a:pPr marL="0" indent="0">
-              <a:lnSpc>
-                <a:spcPts val="1950"/>
-              </a:lnSpc>
-              <a:spcAft>
-                <a:spcPts val="0"/>
-              </a:spcAft>
-              <a:buNone/>
-            </a:pPr>
-            <a:r>
-              <a:rPr lang="en-US" sz="1500" b="0">
-                <a:solidFill>
-                  <a:srgbClr val="202B33"/>
-                </a:solidFill>
-                <a:latin typeface="Arial"/>
-                <a:ea typeface="Arial"/>
-                <a:cs typeface="Arial"/>
-              </a:rPr>
-              <a:t xml:space="preserve">investment that is worth a great deal here</a:t>
+              <a:t xml:space="preserve">Now inventory your specific assets. Prompts</a:t>
+            </a:r>
+            <a:endParaRPr lang="en-US" sz="1500"/>
+          </a:p>
+          <a:p>
+            <a:pPr marL="0" indent="0">
+              <a:lnSpc>
+                <a:spcPts val="1950"/>
+              </a:lnSpc>
+              <a:spcAft>
+                <a:spcPts val="0"/>
+              </a:spcAft>
+              <a:buNone/>
+            </a:pPr>
+            <a:r>
+              <a:rPr lang="en-US" sz="1500" b="0">
+                <a:solidFill>
+                  <a:srgbClr val="202B33"/>
+                </a:solidFill>
+                <a:latin typeface="Arial"/>
+                <a:ea typeface="Arial"/>
+                <a:cs typeface="Arial"/>
+              </a:rPr>
+              <a:t xml:space="preserve">tuned against one model's quirks. An eval</a:t>
             </a:r>
             <a:endParaRPr lang="en-US" sz="1500"/>
           </a:p>
@@ -10643,145 +9977,191 @@
                 <a:ea typeface="Arial"/>
                 <a:cs typeface="Arial"/>
               </a:rPr>
-              <a:t xml:space="preserve">and very little anywhere else. That</a:t>
-            </a:r>
-            <a:endParaRPr lang="en-US" sz="1500"/>
-          </a:p>
-          <a:p>
-            <a:pPr marL="0" indent="0">
-              <a:lnSpc>
-                <a:spcPts val="1950"/>
-              </a:lnSpc>
-              <a:spcAft>
-                <a:spcPts val="0"/>
-              </a:spcAft>
-              <a:buNone/>
-            </a:pPr>
-            <a:r>
-              <a:rPr lang="en-US" sz="1500" b="0">
-                <a:solidFill>
-                  <a:srgbClr val="202B33"/>
-                </a:solidFill>
-                <a:latin typeface="Arial"/>
-                <a:ea typeface="Arial"/>
-                <a:cs typeface="Arial"/>
-              </a:rPr>
-              <a:t xml:space="preserve">surplus, the part that exists only because</a:t>
-            </a:r>
-            <a:endParaRPr lang="en-US" sz="1500"/>
-          </a:p>
-          <a:p>
-            <a:pPr marL="0" indent="0">
-              <a:lnSpc>
-                <a:spcPts val="1950"/>
-              </a:lnSpc>
-              <a:spcAft>
-                <a:spcPts val="0"/>
-              </a:spcAft>
-              <a:buNone/>
-            </a:pPr>
-            <a:r>
-              <a:rPr lang="en-US" sz="1500" b="0">
-                <a:solidFill>
-                  <a:srgbClr val="202B33"/>
-                </a:solidFill>
-                <a:latin typeface="Arial"/>
-                <a:ea typeface="Arial"/>
-                <a:cs typeface="Arial"/>
-              </a:rPr>
-              <a:t xml:space="preserve">you are locked in, is a prize, and at</a:t>
-            </a:r>
-            <a:endParaRPr lang="en-US" sz="1500"/>
-          </a:p>
-          <a:p>
-            <a:pPr marL="0" indent="0">
-              <a:lnSpc>
-                <a:spcPts val="1950"/>
-              </a:lnSpc>
-              <a:spcAft>
-                <a:spcPts val="0"/>
-              </a:spcAft>
-              <a:buNone/>
-            </a:pPr>
-            <a:r>
-              <a:rPr lang="en-US" sz="1500" b="0">
-                <a:solidFill>
-                  <a:srgbClr val="202B33"/>
-                </a:solidFill>
-                <a:latin typeface="Arial"/>
-                <a:ea typeface="Arial"/>
-                <a:cs typeface="Arial"/>
-              </a:rPr>
-              <a:t xml:space="preserve">renewal your counterparty can reach for it.</a:t>
-            </a:r>
-            <a:endParaRPr lang="en-US" sz="1500"/>
-          </a:p>
-          <a:p>
-            <a:pPr marL="0" indent="0">
-              <a:lnSpc>
-                <a:spcPts val="1950"/>
-              </a:lnSpc>
-              <a:spcAft>
-                <a:spcPts val="0"/>
-              </a:spcAft>
-              <a:buNone/>
-            </a:pPr>
-            <a:r>
-              <a:rPr lang="en-US" sz="1500" b="0">
-                <a:solidFill>
-                  <a:srgbClr val="202B33"/>
-                </a:solidFill>
-                <a:latin typeface="Arial"/>
-                <a:ea typeface="Arial"/>
-                <a:cs typeface="Arial"/>
-              </a:rPr>
-              <a:t xml:space="preserve">Nobody has to be a villain. It is simply</a:t>
-            </a:r>
-            <a:endParaRPr lang="en-US" sz="1500"/>
-          </a:p>
-          <a:p>
-            <a:pPr marL="0" indent="0">
-              <a:lnSpc>
-                <a:spcPts val="1950"/>
-              </a:lnSpc>
-              <a:spcAft>
-                <a:spcPts val="0"/>
-              </a:spcAft>
-              <a:buNone/>
-            </a:pPr>
-            <a:r>
-              <a:rPr lang="en-US" sz="1500" b="0">
-                <a:solidFill>
-                  <a:srgbClr val="202B33"/>
-                </a:solidFill>
-                <a:latin typeface="Arial"/>
-                <a:ea typeface="Arial"/>
-                <a:cs typeface="Arial"/>
-              </a:rPr>
-              <a:t xml:space="preserve">what the structure permits, and rational</a:t>
-            </a:r>
-            <a:endParaRPr lang="en-US" sz="1500"/>
-          </a:p>
-          <a:p>
-            <a:pPr marL="0" indent="0">
-              <a:lnSpc>
-                <a:spcPts val="1950"/>
-              </a:lnSpc>
-              <a:spcAft>
-                <a:spcPts val="0"/>
-              </a:spcAft>
-              <a:buNone/>
-            </a:pPr>
-            <a:r>
-              <a:rPr lang="en-US" sz="1500" b="0">
-                <a:solidFill>
-                  <a:srgbClr val="202B33"/>
-                </a:solidFill>
-                <a:latin typeface="Arial"/>
-                <a:ea typeface="Arial"/>
-                <a:cs typeface="Arial"/>
-              </a:rPr>
-              <a:t xml:space="preserve">parties do it.</a:t>
+              <a:t xml:space="preserve">suite that only means anything against one</a:t>
+            </a:r>
+            <a:endParaRPr lang="en-US" sz="1500"/>
+          </a:p>
+          <a:p>
+            <a:pPr marL="0" indent="0">
+              <a:lnSpc>
+                <a:spcPts val="1950"/>
+              </a:lnSpc>
+              <a:spcAft>
+                <a:spcPts val="0"/>
+              </a:spcAft>
+              <a:buNone/>
+            </a:pPr>
+            <a:r>
+              <a:rPr lang="en-US" sz="1500" b="0">
+                <a:solidFill>
+                  <a:srgbClr val="202B33"/>
+                </a:solidFill>
+                <a:latin typeface="Arial"/>
+                <a:ea typeface="Arial"/>
+                <a:cs typeface="Arial"/>
+              </a:rPr>
+              <a:t xml:space="preserve">provider's outputs. A fine-tune. A latency</a:t>
+            </a:r>
+            <a:endParaRPr lang="en-US" sz="1500"/>
+          </a:p>
+          <a:p>
+            <a:pPr marL="0" indent="0">
+              <a:lnSpc>
+                <a:spcPts val="1950"/>
+              </a:lnSpc>
+              <a:spcAft>
+                <a:spcPts val="0"/>
+              </a:spcAft>
+              <a:buNone/>
+            </a:pPr>
+            <a:r>
+              <a:rPr lang="en-US" sz="1500" b="0">
+                <a:solidFill>
+                  <a:srgbClr val="202B33"/>
+                </a:solidFill>
+                <a:latin typeface="Arial"/>
+                <a:ea typeface="Arial"/>
+                <a:cs typeface="Arial"/>
+              </a:rPr>
+              <a:t xml:space="preserve">budget that assumes one serving stack. And</a:t>
+            </a:r>
+            <a:endParaRPr lang="en-US" sz="1500"/>
+          </a:p>
+          <a:p>
+            <a:pPr marL="0" indent="0">
+              <a:lnSpc>
+                <a:spcPts val="1950"/>
+              </a:lnSpc>
+              <a:spcAft>
+                <a:spcPts val="0"/>
+              </a:spcAft>
+              <a:buNone/>
+            </a:pPr>
+            <a:r>
+              <a:rPr lang="en-US" sz="1500" b="0">
+                <a:solidFill>
+                  <a:srgbClr val="202B33"/>
+                </a:solidFill>
+                <a:latin typeface="Arial"/>
+                <a:ea typeface="Arial"/>
+                <a:cs typeface="Arial"/>
+              </a:rPr>
+              <a:t xml:space="preserve">the sharpest one, an unlimited-usage</a:t>
+            </a:r>
+            <a:endParaRPr lang="en-US" sz="1500"/>
+          </a:p>
+          <a:p>
+            <a:pPr marL="0" indent="0">
+              <a:lnSpc>
+                <a:spcPts val="1950"/>
+              </a:lnSpc>
+              <a:spcAft>
+                <a:spcPts val="0"/>
+              </a:spcAft>
+              <a:buNone/>
+            </a:pPr>
+            <a:r>
+              <a:rPr lang="en-US" sz="1500" b="0">
+                <a:solidFill>
+                  <a:srgbClr val="202B33"/>
+                </a:solidFill>
+                <a:latin typeface="Arial"/>
+                <a:ea typeface="Arial"/>
+                <a:cs typeface="Arial"/>
+              </a:rPr>
+              <a:t xml:space="preserve">promise you made to your customers, priced</a:t>
+            </a:r>
+            <a:endParaRPr lang="en-US" sz="1500"/>
+          </a:p>
+          <a:p>
+            <a:pPr marL="0" indent="0">
+              <a:lnSpc>
+                <a:spcPts val="1950"/>
+              </a:lnSpc>
+              <a:spcAft>
+                <a:spcPts val="0"/>
+              </a:spcAft>
+              <a:buNone/>
+            </a:pPr>
+            <a:r>
+              <a:rPr lang="en-US" sz="1500" b="0">
+                <a:solidFill>
+                  <a:srgbClr val="202B33"/>
+                </a:solidFill>
+                <a:latin typeface="Arial"/>
+                <a:ea typeface="Arial"/>
+                <a:cs typeface="Arial"/>
+              </a:rPr>
+              <a:t xml:space="preserve">against an input you do not control and</a:t>
+            </a:r>
+            <a:endParaRPr lang="en-US" sz="1500"/>
+          </a:p>
+          <a:p>
+            <a:pPr marL="0" indent="0">
+              <a:lnSpc>
+                <a:spcPts val="1950"/>
+              </a:lnSpc>
+              <a:spcAft>
+                <a:spcPts val="0"/>
+              </a:spcAft>
+              <a:buNone/>
+            </a:pPr>
+            <a:r>
+              <a:rPr lang="en-US" sz="1500" b="0">
+                <a:solidFill>
+                  <a:srgbClr val="202B33"/>
+                </a:solidFill>
+                <a:latin typeface="Arial"/>
+                <a:ea typeface="Arial"/>
+                <a:cs typeface="Arial"/>
+              </a:rPr>
+              <a:t xml:space="preserve">cannot cap. Every one of those is worth</a:t>
+            </a:r>
+            <a:endParaRPr lang="en-US" sz="1500"/>
+          </a:p>
+          <a:p>
+            <a:pPr marL="0" indent="0">
+              <a:lnSpc>
+                <a:spcPts val="1950"/>
+              </a:lnSpc>
+              <a:spcAft>
+                <a:spcPts val="0"/>
+              </a:spcAft>
+              <a:buNone/>
+            </a:pPr>
+            <a:r>
+              <a:rPr lang="en-US" sz="1500" b="0">
+                <a:solidFill>
+                  <a:srgbClr val="202B33"/>
+                </a:solidFill>
+                <a:latin typeface="Arial"/>
+                <a:ea typeface="Arial"/>
+                <a:cs typeface="Arial"/>
+              </a:rPr>
+              <a:t xml:space="preserve">more inside the relationship than outside</a:t>
+            </a:r>
+            <a:endParaRPr lang="en-US" sz="1500"/>
+          </a:p>
+          <a:p>
+            <a:pPr marL="0" indent="0">
+              <a:lnSpc>
+                <a:spcPts val="1950"/>
+              </a:lnSpc>
+              <a:spcAft>
+                <a:spcPts val="0"/>
+              </a:spcAft>
+              <a:buNone/>
+            </a:pPr>
+            <a:r>
+              <a:rPr lang="en-US" sz="1500" b="0">
+                <a:solidFill>
+                  <a:srgbClr val="202B33"/>
+                </a:solidFill>
+                <a:latin typeface="Arial"/>
+                <a:ea typeface="Arial"/>
+                <a:cs typeface="Arial"/>
+              </a:rPr>
+              <a:t xml:space="preserve">it.</a:t>
             </a:r>
             <a:endParaRPr lang="en-US" sz="1500"/>
           </a:p>
@@ -10827,237 +10207,168 @@
                 <a:ea typeface="Arial"/>
                 <a:cs typeface="Arial"/>
               </a:rPr>
-              <a:t xml:space="preserve">Now inventory your specific assets. Prompts</a:t>
-            </a:r>
-            <a:endParaRPr lang="en-US" sz="1500"/>
-          </a:p>
-          <a:p>
-            <a:pPr marL="0" indent="0">
-              <a:lnSpc>
-                <a:spcPts val="1950"/>
-              </a:lnSpc>
-              <a:spcAft>
-                <a:spcPts val="0"/>
-              </a:spcAft>
-              <a:buNone/>
-            </a:pPr>
-            <a:r>
-              <a:rPr lang="en-US" sz="1500" b="0">
-                <a:solidFill>
-                  <a:srgbClr val="202B33"/>
-                </a:solidFill>
-                <a:latin typeface="Arial"/>
-                <a:ea typeface="Arial"/>
-                <a:cs typeface="Arial"/>
-              </a:rPr>
-              <a:t xml:space="preserve">tuned against one model's quirks. An eval</a:t>
-            </a:r>
-            <a:endParaRPr lang="en-US" sz="1500"/>
-          </a:p>
-          <a:p>
-            <a:pPr marL="0" indent="0">
-              <a:lnSpc>
-                <a:spcPts val="1950"/>
-              </a:lnSpc>
-              <a:spcAft>
-                <a:spcPts val="0"/>
-              </a:spcAft>
-              <a:buNone/>
-            </a:pPr>
-            <a:r>
-              <a:rPr lang="en-US" sz="1500" b="0">
-                <a:solidFill>
-                  <a:srgbClr val="202B33"/>
-                </a:solidFill>
-                <a:latin typeface="Arial"/>
-                <a:ea typeface="Arial"/>
-                <a:cs typeface="Arial"/>
-              </a:rPr>
-              <a:t xml:space="preserve">suite that only means anything against one</a:t>
-            </a:r>
-            <a:endParaRPr lang="en-US" sz="1500"/>
-          </a:p>
-          <a:p>
-            <a:pPr marL="0" indent="0">
-              <a:lnSpc>
-                <a:spcPts val="1950"/>
-              </a:lnSpc>
-              <a:spcAft>
-                <a:spcPts val="0"/>
-              </a:spcAft>
-              <a:buNone/>
-            </a:pPr>
-            <a:r>
-              <a:rPr lang="en-US" sz="1500" b="0">
-                <a:solidFill>
-                  <a:srgbClr val="202B33"/>
-                </a:solidFill>
-                <a:latin typeface="Arial"/>
-                <a:ea typeface="Arial"/>
-                <a:cs typeface="Arial"/>
-              </a:rPr>
-              <a:t xml:space="preserve">provider's outputs. A fine-tune. A latency</a:t>
-            </a:r>
-            <a:endParaRPr lang="en-US" sz="1500"/>
-          </a:p>
-          <a:p>
-            <a:pPr marL="0" indent="0">
-              <a:lnSpc>
-                <a:spcPts val="1950"/>
-              </a:lnSpc>
-              <a:spcAft>
-                <a:spcPts val="0"/>
-              </a:spcAft>
-              <a:buNone/>
-            </a:pPr>
-            <a:r>
-              <a:rPr lang="en-US" sz="1500" b="0">
-                <a:solidFill>
-                  <a:srgbClr val="202B33"/>
-                </a:solidFill>
-                <a:latin typeface="Arial"/>
-                <a:ea typeface="Arial"/>
-                <a:cs typeface="Arial"/>
-              </a:rPr>
-              <a:t xml:space="preserve">budget that assumes one serving stack. And</a:t>
-            </a:r>
-            <a:endParaRPr lang="en-US" sz="1500"/>
-          </a:p>
-          <a:p>
-            <a:pPr marL="0" indent="0">
-              <a:lnSpc>
-                <a:spcPts val="1950"/>
-              </a:lnSpc>
-              <a:spcAft>
-                <a:spcPts val="0"/>
-              </a:spcAft>
-              <a:buNone/>
-            </a:pPr>
-            <a:r>
-              <a:rPr lang="en-US" sz="1500" b="0">
-                <a:solidFill>
-                  <a:srgbClr val="202B33"/>
-                </a:solidFill>
-                <a:latin typeface="Arial"/>
-                <a:ea typeface="Arial"/>
-                <a:cs typeface="Arial"/>
-              </a:rPr>
-              <a:t xml:space="preserve">the sharpest one, an unlimited-usage</a:t>
-            </a:r>
-            <a:endParaRPr lang="en-US" sz="1500"/>
-          </a:p>
-          <a:p>
-            <a:pPr marL="0" indent="0">
-              <a:lnSpc>
-                <a:spcPts val="1950"/>
-              </a:lnSpc>
-              <a:spcAft>
-                <a:spcPts val="0"/>
-              </a:spcAft>
-              <a:buNone/>
-            </a:pPr>
-            <a:r>
-              <a:rPr lang="en-US" sz="1500" b="0">
-                <a:solidFill>
-                  <a:srgbClr val="202B33"/>
-                </a:solidFill>
-                <a:latin typeface="Arial"/>
-                <a:ea typeface="Arial"/>
-                <a:cs typeface="Arial"/>
-              </a:rPr>
-              <a:t xml:space="preserve">promise you made to your customers, priced</a:t>
-            </a:r>
-            <a:endParaRPr lang="en-US" sz="1500"/>
-          </a:p>
-          <a:p>
-            <a:pPr marL="0" indent="0">
-              <a:lnSpc>
-                <a:spcPts val="1950"/>
-              </a:lnSpc>
-              <a:spcAft>
-                <a:spcPts val="0"/>
-              </a:spcAft>
-              <a:buNone/>
-            </a:pPr>
-            <a:r>
-              <a:rPr lang="en-US" sz="1500" b="0">
-                <a:solidFill>
-                  <a:srgbClr val="202B33"/>
-                </a:solidFill>
-                <a:latin typeface="Arial"/>
-                <a:ea typeface="Arial"/>
-                <a:cs typeface="Arial"/>
-              </a:rPr>
-              <a:t xml:space="preserve">against an input you do not control and</a:t>
-            </a:r>
-            <a:endParaRPr lang="en-US" sz="1500"/>
-          </a:p>
-          <a:p>
-            <a:pPr marL="0" indent="0">
-              <a:lnSpc>
-                <a:spcPts val="1950"/>
-              </a:lnSpc>
-              <a:spcAft>
-                <a:spcPts val="0"/>
-              </a:spcAft>
-              <a:buNone/>
-            </a:pPr>
-            <a:r>
-              <a:rPr lang="en-US" sz="1500" b="0">
-                <a:solidFill>
-                  <a:srgbClr val="202B33"/>
-                </a:solidFill>
-                <a:latin typeface="Arial"/>
-                <a:ea typeface="Arial"/>
-                <a:cs typeface="Arial"/>
-              </a:rPr>
-              <a:t xml:space="preserve">cannot cap. Every one of those is worth</a:t>
-            </a:r>
-            <a:endParaRPr lang="en-US" sz="1500"/>
-          </a:p>
-          <a:p>
-            <a:pPr marL="0" indent="0">
-              <a:lnSpc>
-                <a:spcPts val="1950"/>
-              </a:lnSpc>
-              <a:spcAft>
-                <a:spcPts val="0"/>
-              </a:spcAft>
-              <a:buNone/>
-            </a:pPr>
-            <a:r>
-              <a:rPr lang="en-US" sz="1500" b="0">
-                <a:solidFill>
-                  <a:srgbClr val="202B33"/>
-                </a:solidFill>
-                <a:latin typeface="Arial"/>
-                <a:ea typeface="Arial"/>
-                <a:cs typeface="Arial"/>
-              </a:rPr>
-              <a:t xml:space="preserve">more inside the relationship than outside</a:t>
-            </a:r>
-            <a:endParaRPr lang="en-US" sz="1500"/>
-          </a:p>
-          <a:p>
-            <a:pPr marL="0" indent="0">
-              <a:lnSpc>
-                <a:spcPts val="1950"/>
-              </a:lnSpc>
-              <a:spcAft>
-                <a:spcPts val="0"/>
-              </a:spcAft>
-              <a:buNone/>
-            </a:pPr>
-            <a:r>
-              <a:rPr lang="en-US" sz="1500" b="0">
-                <a:solidFill>
-                  <a:srgbClr val="202B33"/>
-                </a:solidFill>
-                <a:latin typeface="Arial"/>
-                <a:ea typeface="Arial"/>
-                <a:cs typeface="Arial"/>
-              </a:rPr>
-              <a:t xml:space="preserve">it.</a:t>
+              <a:t xml:space="preserve">So stop thinking of this as shopping, where</a:t>
+            </a:r>
+            <a:endParaRPr lang="en-US" sz="1500"/>
+          </a:p>
+          <a:p>
+            <a:pPr marL="0" indent="0">
+              <a:lnSpc>
+                <a:spcPts val="1950"/>
+              </a:lnSpc>
+              <a:spcAft>
+                <a:spcPts val="0"/>
+              </a:spcAft>
+              <a:buNone/>
+            </a:pPr>
+            <a:r>
+              <a:rPr lang="en-US" sz="1500" b="0">
+                <a:solidFill>
+                  <a:srgbClr val="202B33"/>
+                </a:solidFill>
+                <a:latin typeface="Arial"/>
+                <a:ea typeface="Arial"/>
+                <a:cs typeface="Arial"/>
+              </a:rPr>
+              <a:t xml:space="preserve">the customer holds the power because they</a:t>
+            </a:r>
+            <a:endParaRPr lang="en-US" sz="1500"/>
+          </a:p>
+          <a:p>
+            <a:pPr marL="0" indent="0">
+              <a:lnSpc>
+                <a:spcPts val="1950"/>
+              </a:lnSpc>
+              <a:spcAft>
+                <a:spcPts val="0"/>
+              </a:spcAft>
+              <a:buNone/>
+            </a:pPr>
+            <a:r>
+              <a:rPr lang="en-US" sz="1500" b="0">
+                <a:solidFill>
+                  <a:srgbClr val="202B33"/>
+                </a:solidFill>
+                <a:latin typeface="Arial"/>
+                <a:ea typeface="Arial"/>
+                <a:cs typeface="Arial"/>
+              </a:rPr>
+              <a:t xml:space="preserve">can leave. You are contracting, with a much</a:t>
+            </a:r>
+            <a:endParaRPr lang="en-US" sz="1500"/>
+          </a:p>
+          <a:p>
+            <a:pPr marL="0" indent="0">
+              <a:lnSpc>
+                <a:spcPts val="1950"/>
+              </a:lnSpc>
+              <a:spcAft>
+                <a:spcPts val="0"/>
+              </a:spcAft>
+              <a:buNone/>
+            </a:pPr>
+            <a:r>
+              <a:rPr lang="en-US" sz="1500" b="0">
+                <a:solidFill>
+                  <a:srgbClr val="202B33"/>
+                </a:solidFill>
+                <a:latin typeface="Arial"/>
+                <a:ea typeface="Arial"/>
+                <a:cs typeface="Arial"/>
+              </a:rPr>
+              <a:t xml:space="preserve">better capitalized counterparty, and your</a:t>
+            </a:r>
+            <a:endParaRPr lang="en-US" sz="1500"/>
+          </a:p>
+          <a:p>
+            <a:pPr marL="0" indent="0">
+              <a:lnSpc>
+                <a:spcPts val="1950"/>
+              </a:lnSpc>
+              <a:spcAft>
+                <a:spcPts val="0"/>
+              </a:spcAft>
+              <a:buNone/>
+            </a:pPr>
+            <a:r>
+              <a:rPr lang="en-US" sz="1500" b="0">
+                <a:solidFill>
+                  <a:srgbClr val="202B33"/>
+                </a:solidFill>
+                <a:latin typeface="Arial"/>
+                <a:ea typeface="Arial"/>
+                <a:cs typeface="Arial"/>
+              </a:rPr>
+              <a:t xml:space="preserve">architecture is the collateral. That</a:t>
+            </a:r>
+            <a:endParaRPr lang="en-US" sz="1500"/>
+          </a:p>
+          <a:p>
+            <a:pPr marL="0" indent="0">
+              <a:lnSpc>
+                <a:spcPts val="1950"/>
+              </a:lnSpc>
+              <a:spcAft>
+                <a:spcPts val="0"/>
+              </a:spcAft>
+              <a:buNone/>
+            </a:pPr>
+            <a:r>
+              <a:rPr lang="en-US" sz="1500" b="0">
+                <a:solidFill>
+                  <a:srgbClr val="202B33"/>
+                </a:solidFill>
+                <a:latin typeface="Arial"/>
+                <a:ea typeface="Arial"/>
+                <a:cs typeface="Arial"/>
+              </a:rPr>
+              <a:t xml:space="preserve">reframe is the whole talk, and everything</a:t>
+            </a:r>
+            <a:endParaRPr lang="en-US" sz="1500"/>
+          </a:p>
+          <a:p>
+            <a:pPr marL="0" indent="0">
+              <a:lnSpc>
+                <a:spcPts val="1950"/>
+              </a:lnSpc>
+              <a:spcAft>
+                <a:spcPts val="0"/>
+              </a:spcAft>
+              <a:buNone/>
+            </a:pPr>
+            <a:r>
+              <a:rPr lang="en-US" sz="1500" b="0">
+                <a:solidFill>
+                  <a:srgbClr val="202B33"/>
+                </a:solidFill>
+                <a:latin typeface="Arial"/>
+                <a:ea typeface="Arial"/>
+                <a:cs typeface="Arial"/>
+              </a:rPr>
+              <a:t xml:space="preserve">after this is just a way of reducing</a:t>
+            </a:r>
+            <a:endParaRPr lang="en-US" sz="1500"/>
+          </a:p>
+          <a:p>
+            <a:pPr marL="0" indent="0">
+              <a:lnSpc>
+                <a:spcPts val="1950"/>
+              </a:lnSpc>
+              <a:spcAft>
+                <a:spcPts val="0"/>
+              </a:spcAft>
+              <a:buNone/>
+            </a:pPr>
+            <a:r>
+              <a:rPr lang="en-US" sz="1500" b="0">
+                <a:solidFill>
+                  <a:srgbClr val="202B33"/>
+                </a:solidFill>
+                <a:latin typeface="Arial"/>
+                <a:ea typeface="Arial"/>
+                <a:cs typeface="Arial"/>
+              </a:rPr>
+              <a:t xml:space="preserve">specificity or pricing the exposure.</a:t>
             </a:r>
             <a:endParaRPr lang="en-US" sz="1500"/>
           </a:p>
@@ -11237,7 +10548,7 @@
                 <a:ea typeface="Arial"/>
                 <a:cs typeface="Arial"/>
               </a:rPr>
-              <a:t xml:space="preserve">10 / 12    SOURCE SLIDE 12</a:t>
+              <a:t xml:space="preserve">11 / 12    SOURCE SLIDE 14</a:t>
             </a:r>
             <a:endParaRPr lang="en-US" sz="1050"/>
           </a:p>
@@ -11286,7 +10597,7 @@
                 <a:ea typeface="Arial"/>
                 <a:cs typeface="Arial"/>
               </a:rPr>
-              <a:t xml:space="preserve">You are not shopping, you are contracting (continued)</a:t>
+              <a:t xml:space="preserve">Three prices for the next design review</a:t>
             </a:r>
             <a:endParaRPr lang="en-US" sz="2550"/>
           </a:p>
@@ -11335,76 +10646,398 @@
                 <a:ea typeface="Arial"/>
                 <a:cs typeface="Arial"/>
               </a:rPr>
-              <a:t xml:space="preserve">So stop thinking of this as shopping, where</a:t>
-            </a:r>
-            <a:endParaRPr lang="en-US" sz="1500"/>
-          </a:p>
-          <a:p>
-            <a:pPr marL="0" indent="0">
-              <a:lnSpc>
-                <a:spcPts val="1950"/>
-              </a:lnSpc>
-              <a:spcAft>
-                <a:spcPts val="0"/>
-              </a:spcAft>
-              <a:buNone/>
-            </a:pPr>
-            <a:r>
-              <a:rPr lang="en-US" sz="1500" b="0">
-                <a:solidFill>
-                  <a:srgbClr val="202B33"/>
-                </a:solidFill>
-                <a:latin typeface="Arial"/>
-                <a:ea typeface="Arial"/>
-                <a:cs typeface="Arial"/>
-              </a:rPr>
-              <a:t xml:space="preserve">the customer holds the power because they</a:t>
-            </a:r>
-            <a:endParaRPr lang="en-US" sz="1500"/>
-          </a:p>
-          <a:p>
-            <a:pPr marL="0" indent="0">
-              <a:lnSpc>
-                <a:spcPts val="1950"/>
-              </a:lnSpc>
-              <a:spcAft>
-                <a:spcPts val="0"/>
-              </a:spcAft>
-              <a:buNone/>
-            </a:pPr>
-            <a:r>
-              <a:rPr lang="en-US" sz="1500" b="0">
-                <a:solidFill>
-                  <a:srgbClr val="202B33"/>
-                </a:solidFill>
-                <a:latin typeface="Arial"/>
-                <a:ea typeface="Arial"/>
-                <a:cs typeface="Arial"/>
-              </a:rPr>
-              <a:t xml:space="preserve">can leave. You are contracting, with a much</a:t>
-            </a:r>
-            <a:endParaRPr lang="en-US" sz="1500"/>
-          </a:p>
-          <a:p>
-            <a:pPr marL="0" indent="0">
-              <a:lnSpc>
-                <a:spcPts val="1950"/>
-              </a:lnSpc>
-              <a:spcAft>
-                <a:spcPts val="0"/>
-              </a:spcAft>
-              <a:buNone/>
-            </a:pPr>
-            <a:r>
-              <a:rPr lang="en-US" sz="1500" b="0">
-                <a:solidFill>
-                  <a:srgbClr val="202B33"/>
-                </a:solidFill>
-                <a:latin typeface="Arial"/>
-                <a:ea typeface="Arial"/>
-                <a:cs typeface="Arial"/>
-              </a:rPr>
-              <a:t xml:space="preserve">better capitalized counterparty, and your</a:t>
+              <a:t xml:space="preserve">What we pay today · What we pay without the</a:t>
+            </a:r>
+            <a:endParaRPr lang="en-US" sz="1500"/>
+          </a:p>
+          <a:p>
+            <a:pPr marL="0" indent="0">
+              <a:lnSpc>
+                <a:spcPts val="1950"/>
+              </a:lnSpc>
+              <a:spcAft>
+                <a:spcPts val="0"/>
+              </a:spcAft>
+              <a:buNone/>
+            </a:pPr>
+            <a:r>
+              <a:rPr lang="en-US" sz="1500" b="0">
+                <a:solidFill>
+                  <a:srgbClr val="202B33"/>
+                </a:solidFill>
+                <a:latin typeface="Arial"/>
+                <a:ea typeface="Arial"/>
+                <a:cs typeface="Arial"/>
+              </a:rPr>
+              <a:t xml:space="preserve">offer · What we can survive paying</a:t>
+            </a:r>
+            <a:endParaRPr lang="en-US" sz="1500"/>
+          </a:p>
+          <a:p>
+            <a:pPr marL="0" indent="0">
+              <a:lnSpc>
+                <a:spcPts val="1950"/>
+              </a:lnSpc>
+              <a:spcAft>
+                <a:spcPts val="0"/>
+              </a:spcAft>
+              <a:buNone/>
+            </a:pPr>
+            <a:r>
+              <a:rPr lang="en-US" sz="1500" b="0">
+                <a:solidFill>
+                  <a:srgbClr val="202B33"/>
+                </a:solidFill>
+                <a:latin typeface="Arial"/>
+                <a:ea typeface="Arial"/>
+                <a:cs typeface="Arial"/>
+              </a:rPr>
+              <a:t xml:space="preserve"/>
+            </a:r>
+            <a:endParaRPr lang="en-US" sz="1500"/>
+          </a:p>
+          <a:p>
+            <a:pPr marL="0" indent="0">
+              <a:lnSpc>
+                <a:spcPts val="1950"/>
+              </a:lnSpc>
+              <a:spcAft>
+                <a:spcPts val="0"/>
+              </a:spcAft>
+              <a:buNone/>
+            </a:pPr>
+            <a:r>
+              <a:rPr lang="en-US" sz="1500" b="0">
+                <a:solidFill>
+                  <a:srgbClr val="202B33"/>
+                </a:solidFill>
+                <a:latin typeface="Arial"/>
+                <a:ea typeface="Arial"/>
+                <a:cs typeface="Arial"/>
+              </a:rPr>
+              <a:t xml:space="preserve">Record gross usage separately from credits</a:t>
+            </a:r>
+            <a:endParaRPr lang="en-US" sz="1500"/>
+          </a:p>
+          <a:p>
+            <a:pPr marL="0" indent="0">
+              <a:lnSpc>
+                <a:spcPts val="1950"/>
+              </a:lnSpc>
+              <a:spcAft>
+                <a:spcPts val="0"/>
+              </a:spcAft>
+              <a:buNone/>
+            </a:pPr>
+            <a:r>
+              <a:rPr lang="en-US" sz="1500" b="0">
+                <a:solidFill>
+                  <a:srgbClr val="202B33"/>
+                </a:solidFill>
+                <a:latin typeface="Arial"/>
+                <a:ea typeface="Arial"/>
+                <a:cs typeface="Arial"/>
+              </a:rPr>
+              <a:t xml:space="preserve"/>
+            </a:r>
+            <a:endParaRPr lang="en-US" sz="1500"/>
+          </a:p>
+          <a:p>
+            <a:pPr marL="0" indent="0">
+              <a:lnSpc>
+                <a:spcPts val="1950"/>
+              </a:lnSpc>
+              <a:spcAft>
+                <a:spcPts val="0"/>
+              </a:spcAft>
+              <a:buNone/>
+            </a:pPr>
+            <a:r>
+              <a:rPr lang="en-US" sz="1500" b="0">
+                <a:solidFill>
+                  <a:srgbClr val="202B33"/>
+                </a:solidFill>
+                <a:latin typeface="Arial"/>
+                <a:ea typeface="Arial"/>
+                <a:cs typeface="Arial"/>
+              </a:rPr>
+              <a:t xml:space="preserve">Keep an acceptance suite · Rehearse one</a:t>
+            </a:r>
+            <a:endParaRPr lang="en-US" sz="1500"/>
+          </a:p>
+          <a:p>
+            <a:pPr marL="0" indent="0">
+              <a:lnSpc>
+                <a:spcPts val="1950"/>
+              </a:lnSpc>
+              <a:spcAft>
+                <a:spcPts val="0"/>
+              </a:spcAft>
+              <a:buNone/>
+            </a:pPr>
+            <a:r>
+              <a:rPr lang="en-US" sz="1500" b="0">
+                <a:solidFill>
+                  <a:srgbClr val="202B33"/>
+                </a:solidFill>
+                <a:latin typeface="Arial"/>
+                <a:ea typeface="Arial"/>
+                <a:cs typeface="Arial"/>
+              </a:rPr>
+              <a:t xml:space="preserve">replacement · Price the portability</a:t>
+            </a:r>
+            <a:endParaRPr lang="en-US" sz="1500"/>
+          </a:p>
+          <a:p>
+            <a:pPr marL="0" indent="0">
+              <a:lnSpc>
+                <a:spcPts val="1950"/>
+              </a:lnSpc>
+              <a:spcAft>
+                <a:spcPts val="0"/>
+              </a:spcAft>
+              <a:buNone/>
+            </a:pPr>
+            <a:r>
+              <a:rPr lang="en-US" sz="1500" b="0">
+                <a:solidFill>
+                  <a:srgbClr val="202B33"/>
+                </a:solidFill>
+                <a:latin typeface="Arial"/>
+                <a:ea typeface="Arial"/>
+                <a:cs typeface="Arial"/>
+              </a:rPr>
+              <a:t xml:space="preserve"/>
+            </a:r>
+            <a:endParaRPr lang="en-US" sz="1500"/>
+          </a:p>
+          <a:p>
+            <a:pPr marL="0" indent="0">
+              <a:lnSpc>
+                <a:spcPts val="1950"/>
+              </a:lnSpc>
+              <a:spcAft>
+                <a:spcPts val="0"/>
+              </a:spcAft>
+              <a:buNone/>
+            </a:pPr>
+            <a:r>
+              <a:rPr lang="en-US" sz="1500" b="0">
+                <a:solidFill>
+                  <a:srgbClr val="202B33"/>
+                </a:solidFill>
+                <a:latin typeface="Arial"/>
+                <a:ea typeface="Arial"/>
+                <a:cs typeface="Arial"/>
+              </a:rPr>
+              <a:t xml:space="preserve">Three numbers, and if you take nothing</a:t>
+            </a:r>
+            <a:endParaRPr lang="en-US" sz="1500"/>
+          </a:p>
+          <a:p>
+            <a:pPr marL="0" indent="0">
+              <a:lnSpc>
+                <a:spcPts val="1950"/>
+              </a:lnSpc>
+              <a:spcAft>
+                <a:spcPts val="0"/>
+              </a:spcAft>
+              <a:buNone/>
+            </a:pPr>
+            <a:r>
+              <a:rPr lang="en-US" sz="1500" b="0">
+                <a:solidFill>
+                  <a:srgbClr val="202B33"/>
+                </a:solidFill>
+                <a:latin typeface="Arial"/>
+                <a:ea typeface="Arial"/>
+                <a:cs typeface="Arial"/>
+              </a:rPr>
+              <a:t xml:space="preserve">else, take these. The effective rate you</a:t>
+            </a:r>
+            <a:endParaRPr lang="en-US" sz="1500"/>
+          </a:p>
+          <a:p>
+            <a:pPr marL="0" indent="0">
+              <a:lnSpc>
+                <a:spcPts val="1950"/>
+              </a:lnSpc>
+              <a:spcAft>
+                <a:spcPts val="0"/>
+              </a:spcAft>
+              <a:buNone/>
+            </a:pPr>
+            <a:r>
+              <a:rPr lang="en-US" sz="1500" b="0">
+                <a:solidFill>
+                  <a:srgbClr val="202B33"/>
+                </a:solidFill>
+                <a:latin typeface="Arial"/>
+                <a:ea typeface="Arial"/>
+                <a:cs typeface="Arial"/>
+              </a:rPr>
+              <a:t xml:space="preserve">pay today. The gross rate with no</a:t>
+            </a:r>
+            <a:endParaRPr lang="en-US" sz="1500"/>
+          </a:p>
+          <a:p>
+            <a:pPr marL="0" indent="0">
+              <a:lnSpc>
+                <a:spcPts val="1950"/>
+              </a:lnSpc>
+              <a:spcAft>
+                <a:spcPts val="0"/>
+              </a:spcAft>
+              <a:buNone/>
+            </a:pPr>
+            <a:r>
+              <a:rPr lang="en-US" sz="1500" b="0">
+                <a:solidFill>
+                  <a:srgbClr val="202B33"/>
+                </a:solidFill>
+                <a:latin typeface="Arial"/>
+                <a:ea typeface="Arial"/>
+                <a:cs typeface="Arial"/>
+              </a:rPr>
+              <a:t xml:space="preserve">promotional treatment, which is your</a:t>
+            </a:r>
+            <a:endParaRPr lang="en-US" sz="1500"/>
+          </a:p>
+          <a:p>
+            <a:pPr marL="0" indent="0">
+              <a:lnSpc>
+                <a:spcPts val="1950"/>
+              </a:lnSpc>
+              <a:spcAft>
+                <a:spcPts val="0"/>
+              </a:spcAft>
+              <a:buNone/>
+            </a:pPr>
+            <a:r>
+              <a:rPr lang="en-US" sz="1500" b="0">
+                <a:solidFill>
+                  <a:srgbClr val="202B33"/>
+                </a:solidFill>
+                <a:latin typeface="Arial"/>
+                <a:ea typeface="Arial"/>
+                <a:cs typeface="Arial"/>
+              </a:rPr>
+              <a:t xml:space="preserve">exposure if the offer ends. And the highest</a:t>
+            </a:r>
+            <a:endParaRPr lang="en-US" sz="1500"/>
+          </a:p>
+          <a:p>
+            <a:pPr marL="0" indent="0">
+              <a:lnSpc>
+                <a:spcPts val="1950"/>
+              </a:lnSpc>
+              <a:spcAft>
+                <a:spcPts val="0"/>
+              </a:spcAft>
+              <a:buNone/>
+            </a:pPr>
+            <a:r>
+              <a:rPr lang="en-US" sz="1500" b="0">
+                <a:solidFill>
+                  <a:srgbClr val="202B33"/>
+                </a:solidFill>
+                <a:latin typeface="Arial"/>
+                <a:ea typeface="Arial"/>
+                <a:cs typeface="Arial"/>
+              </a:rPr>
+              <a:t xml:space="preserve">rate at which this product still makes</a:t>
+            </a:r>
+            <a:endParaRPr lang="en-US" sz="1500"/>
+          </a:p>
+          <a:p>
+            <a:pPr marL="0" indent="0">
+              <a:lnSpc>
+                <a:spcPts val="1950"/>
+              </a:lnSpc>
+              <a:spcAft>
+                <a:spcPts val="0"/>
+              </a:spcAft>
+              <a:buNone/>
+            </a:pPr>
+            <a:r>
+              <a:rPr lang="en-US" sz="1500" b="0">
+                <a:solidFill>
+                  <a:srgbClr val="202B33"/>
+                </a:solidFill>
+                <a:latin typeface="Arial"/>
+                <a:ea typeface="Arial"/>
+                <a:cs typeface="Arial"/>
+              </a:rPr>
+              <a:t xml:space="preserve">sense, which is the number nobody has ever</a:t>
+            </a:r>
+            <a:endParaRPr lang="en-US" sz="1500"/>
+          </a:p>
+          <a:p>
+            <a:pPr marL="0" indent="0">
+              <a:lnSpc>
+                <a:spcPts val="1950"/>
+              </a:lnSpc>
+              <a:spcAft>
+                <a:spcPts val="0"/>
+              </a:spcAft>
+              <a:buNone/>
+            </a:pPr>
+            <a:r>
+              <a:rPr lang="en-US" sz="1500" b="0">
+                <a:solidFill>
+                  <a:srgbClr val="202B33"/>
+                </a:solidFill>
+                <a:latin typeface="Arial"/>
+                <a:ea typeface="Arial"/>
+                <a:cs typeface="Arial"/>
+              </a:rPr>
+              <a:t xml:space="preserve">calculated and everybody should. Sweep</a:t>
+            </a:r>
+            <a:endParaRPr lang="en-US" sz="1500"/>
+          </a:p>
+          <a:p>
+            <a:pPr marL="0" indent="0">
+              <a:lnSpc>
+                <a:spcPts val="1950"/>
+              </a:lnSpc>
+              <a:spcAft>
+                <a:spcPts val="0"/>
+              </a:spcAft>
+              <a:buNone/>
+            </a:pPr>
+            <a:r>
+              <a:rPr lang="en-US" sz="1500" b="0">
+                <a:solidFill>
+                  <a:srgbClr val="202B33"/>
+                </a:solidFill>
+                <a:latin typeface="Arial"/>
+                <a:ea typeface="Arial"/>
+                <a:cs typeface="Arial"/>
+              </a:rPr>
+              <a:t xml:space="preserve">downward too, so you can cancel the</a:t>
+            </a:r>
+            <a:endParaRPr lang="en-US" sz="1500"/>
+          </a:p>
+          <a:p>
+            <a:pPr marL="0" indent="0">
+              <a:lnSpc>
+                <a:spcPts val="1950"/>
+              </a:lnSpc>
+              <a:spcAft>
+                <a:spcPts val="0"/>
+              </a:spcAft>
+              <a:buNone/>
+            </a:pPr>
+            <a:r>
+              <a:rPr lang="en-US" sz="1500" b="0">
+                <a:solidFill>
+                  <a:srgbClr val="202B33"/>
+                </a:solidFill>
+                <a:latin typeface="Arial"/>
+                <a:ea typeface="Arial"/>
+                <a:cs typeface="Arial"/>
+              </a:rPr>
+              <a:t xml:space="preserve">optimization project when efficiency makes</a:t>
             </a:r>
             <a:endParaRPr lang="en-US" sz="1500"/>
           </a:p>
@@ -11453,76 +11086,375 @@
                 <a:ea typeface="Arial"/>
                 <a:cs typeface="Arial"/>
               </a:rPr>
-              <a:t xml:space="preserve">architecture is the collateral. That</a:t>
-            </a:r>
-            <a:endParaRPr lang="en-US" sz="1500"/>
-          </a:p>
-          <a:p>
-            <a:pPr marL="0" indent="0">
-              <a:lnSpc>
-                <a:spcPts val="1950"/>
-              </a:lnSpc>
-              <a:spcAft>
-                <a:spcPts val="0"/>
-              </a:spcAft>
-              <a:buNone/>
-            </a:pPr>
-            <a:r>
-              <a:rPr lang="en-US" sz="1500" b="0">
-                <a:solidFill>
-                  <a:srgbClr val="202B33"/>
-                </a:solidFill>
-                <a:latin typeface="Arial"/>
-                <a:ea typeface="Arial"/>
-                <a:cs typeface="Arial"/>
-              </a:rPr>
-              <a:t xml:space="preserve">reframe is the whole talk, and everything</a:t>
-            </a:r>
-            <a:endParaRPr lang="en-US" sz="1500"/>
-          </a:p>
-          <a:p>
-            <a:pPr marL="0" indent="0">
-              <a:lnSpc>
-                <a:spcPts val="1950"/>
-              </a:lnSpc>
-              <a:spcAft>
-                <a:spcPts val="0"/>
-              </a:spcAft>
-              <a:buNone/>
-            </a:pPr>
-            <a:r>
-              <a:rPr lang="en-US" sz="1500" b="0">
-                <a:solidFill>
-                  <a:srgbClr val="202B33"/>
-                </a:solidFill>
-                <a:latin typeface="Arial"/>
-                <a:ea typeface="Arial"/>
-                <a:cs typeface="Arial"/>
-              </a:rPr>
-              <a:t xml:space="preserve">after this is just a way of reducing</a:t>
-            </a:r>
-            <a:endParaRPr lang="en-US" sz="1500"/>
-          </a:p>
-          <a:p>
-            <a:pPr marL="0" indent="0">
-              <a:lnSpc>
-                <a:spcPts val="1950"/>
-              </a:lnSpc>
-              <a:spcAft>
-                <a:spcPts val="0"/>
-              </a:spcAft>
-              <a:buNone/>
-            </a:pPr>
-            <a:r>
-              <a:rPr lang="en-US" sz="1500" b="0">
-                <a:solidFill>
-                  <a:srgbClr val="202B33"/>
-                </a:solidFill>
-                <a:latin typeface="Arial"/>
-                <a:ea typeface="Arial"/>
-                <a:cs typeface="Arial"/>
-              </a:rPr>
-              <a:t xml:space="preserve">specificity or pricing the exposure.</a:t>
+              <a:t xml:space="preserve">it pointless.</a:t>
+            </a:r>
+            <a:endParaRPr lang="en-US" sz="1500"/>
+          </a:p>
+          <a:p>
+            <a:pPr marL="0" indent="0">
+              <a:lnSpc>
+                <a:spcPts val="1950"/>
+              </a:lnSpc>
+              <a:spcAft>
+                <a:spcPts val="0"/>
+              </a:spcAft>
+              <a:buNone/>
+            </a:pPr>
+            <a:r>
+              <a:rPr lang="en-US" sz="1500" b="0">
+                <a:solidFill>
+                  <a:srgbClr val="202B33"/>
+                </a:solidFill>
+                <a:latin typeface="Arial"/>
+                <a:ea typeface="Arial"/>
+                <a:cs typeface="Arial"/>
+              </a:rPr>
+              <a:t xml:space="preserve"/>
+            </a:r>
+            <a:endParaRPr lang="en-US" sz="1500"/>
+          </a:p>
+          <a:p>
+            <a:pPr marL="0" indent="0">
+              <a:lnSpc>
+                <a:spcPts val="1950"/>
+              </a:lnSpc>
+              <a:spcAft>
+                <a:spcPts val="0"/>
+              </a:spcAft>
+              <a:buNone/>
+            </a:pPr>
+            <a:r>
+              <a:rPr lang="en-US" sz="1500" b="0">
+                <a:solidFill>
+                  <a:srgbClr val="202B33"/>
+                </a:solidFill>
+                <a:latin typeface="Arial"/>
+                <a:ea typeface="Arial"/>
+                <a:cs typeface="Arial"/>
+              </a:rPr>
+              <a:t xml:space="preserve">Four actions, and each one is one of the</a:t>
+            </a:r>
+            <a:endParaRPr lang="en-US" sz="1500"/>
+          </a:p>
+          <a:p>
+            <a:pPr marL="0" indent="0">
+              <a:lnSpc>
+                <a:spcPts val="1950"/>
+              </a:lnSpc>
+              <a:spcAft>
+                <a:spcPts val="0"/>
+              </a:spcAft>
+              <a:buNone/>
+            </a:pPr>
+            <a:r>
+              <a:rPr lang="en-US" sz="1500" b="0">
+                <a:solidFill>
+                  <a:srgbClr val="202B33"/>
+                </a:solidFill>
+                <a:latin typeface="Arial"/>
+                <a:ea typeface="Arial"/>
+                <a:cs typeface="Arial"/>
+              </a:rPr>
+              <a:t xml:space="preserve">words. Record gross consumption separately</a:t>
+            </a:r>
+            <a:endParaRPr lang="en-US" sz="1500"/>
+          </a:p>
+          <a:p>
+            <a:pPr marL="0" indent="0">
+              <a:lnSpc>
+                <a:spcPts val="1950"/>
+              </a:lnSpc>
+              <a:spcAft>
+                <a:spcPts val="0"/>
+              </a:spcAft>
+              <a:buNone/>
+            </a:pPr>
+            <a:r>
+              <a:rPr lang="en-US" sz="1500" b="0">
+                <a:solidFill>
+                  <a:srgbClr val="202B33"/>
+                </a:solidFill>
+                <a:latin typeface="Arial"/>
+                <a:ea typeface="Arial"/>
+                <a:cs typeface="Arial"/>
+              </a:rPr>
+              <a:t xml:space="preserve">from credits, so price and subsidy stop</a:t>
+            </a:r>
+            <a:endParaRPr lang="en-US" sz="1500"/>
+          </a:p>
+          <a:p>
+            <a:pPr marL="0" indent="0">
+              <a:lnSpc>
+                <a:spcPts val="1950"/>
+              </a:lnSpc>
+              <a:spcAft>
+                <a:spcPts val="0"/>
+              </a:spcAft>
+              <a:buNone/>
+            </a:pPr>
+            <a:r>
+              <a:rPr lang="en-US" sz="1500" b="0">
+                <a:solidFill>
+                  <a:srgbClr val="202B33"/>
+                </a:solidFill>
+                <a:latin typeface="Arial"/>
+                <a:ea typeface="Arial"/>
+                <a:cs typeface="Arial"/>
+              </a:rPr>
+              <a:t xml:space="preserve">being the same number on your dashboard.</a:t>
+            </a:r>
+            <a:endParaRPr lang="en-US" sz="1500"/>
+          </a:p>
+          <a:p>
+            <a:pPr marL="0" indent="0">
+              <a:lnSpc>
+                <a:spcPts val="1950"/>
+              </a:lnSpc>
+              <a:spcAft>
+                <a:spcPts val="0"/>
+              </a:spcAft>
+              <a:buNone/>
+            </a:pPr>
+            <a:r>
+              <a:rPr lang="en-US" sz="1500" b="0">
+                <a:solidFill>
+                  <a:srgbClr val="202B33"/>
+                </a:solidFill>
+                <a:latin typeface="Arial"/>
+                <a:ea typeface="Arial"/>
+                <a:cs typeface="Arial"/>
+              </a:rPr>
+              <a:t xml:space="preserve">Keep a small representative acceptance</a:t>
+            </a:r>
+            <a:endParaRPr lang="en-US" sz="1500"/>
+          </a:p>
+          <a:p>
+            <a:pPr marL="0" indent="0">
+              <a:lnSpc>
+                <a:spcPts val="1950"/>
+              </a:lnSpc>
+              <a:spcAft>
+                <a:spcPts val="0"/>
+              </a:spcAft>
+              <a:buNone/>
+            </a:pPr>
+            <a:r>
+              <a:rPr lang="en-US" sz="1500" b="0">
+                <a:solidFill>
+                  <a:srgbClr val="202B33"/>
+                </a:solidFill>
+                <a:latin typeface="Arial"/>
+                <a:ea typeface="Arial"/>
+                <a:cs typeface="Arial"/>
+              </a:rPr>
+              <a:t xml:space="preserve">suite, because that is the strike test on</a:t>
+            </a:r>
+            <a:endParaRPr lang="en-US" sz="1500"/>
+          </a:p>
+          <a:p>
+            <a:pPr marL="0" indent="0">
+              <a:lnSpc>
+                <a:spcPts val="1950"/>
+              </a:lnSpc>
+              <a:spcAft>
+                <a:spcPts val="0"/>
+              </a:spcAft>
+              <a:buNone/>
+            </a:pPr>
+            <a:r>
+              <a:rPr lang="en-US" sz="1500" b="0">
+                <a:solidFill>
+                  <a:srgbClr val="202B33"/>
+                </a:solidFill>
+                <a:latin typeface="Arial"/>
+                <a:ea typeface="Arial"/>
+                <a:cs typeface="Arial"/>
+              </a:rPr>
+              <a:t xml:space="preserve">your option. Rehearse one provider</a:t>
+            </a:r>
+            <a:endParaRPr lang="en-US" sz="1500"/>
+          </a:p>
+          <a:p>
+            <a:pPr marL="0" indent="0">
+              <a:lnSpc>
+                <a:spcPts val="1950"/>
+              </a:lnSpc>
+              <a:spcAft>
+                <a:spcPts val="0"/>
+              </a:spcAft>
+              <a:buNone/>
+            </a:pPr>
+            <a:r>
+              <a:rPr lang="en-US" sz="1500" b="0">
+                <a:solidFill>
+                  <a:srgbClr val="202B33"/>
+                </a:solidFill>
+                <a:latin typeface="Arial"/>
+                <a:ea typeface="Arial"/>
+                <a:cs typeface="Arial"/>
+              </a:rPr>
+              <a:t xml:space="preserve">replacement before you need it, latency and</a:t>
+            </a:r>
+            <a:endParaRPr lang="en-US" sz="1500"/>
+          </a:p>
+          <a:p>
+            <a:pPr marL="0" indent="0">
+              <a:lnSpc>
+                <a:spcPts val="1950"/>
+              </a:lnSpc>
+              <a:spcAft>
+                <a:spcPts val="0"/>
+              </a:spcAft>
+              <a:buNone/>
+            </a:pPr>
+            <a:r>
+              <a:rPr lang="en-US" sz="1500" b="0">
+                <a:solidFill>
+                  <a:srgbClr val="202B33"/>
+                </a:solidFill>
+                <a:latin typeface="Arial"/>
+                <a:ea typeface="Arial"/>
+                <a:cs typeface="Arial"/>
+              </a:rPr>
+              <a:t xml:space="preserve">recovery included, because that is how you</a:t>
+            </a:r>
+            <a:endParaRPr lang="en-US" sz="1500"/>
+          </a:p>
+          <a:p>
+            <a:pPr marL="0" indent="0">
+              <a:lnSpc>
+                <a:spcPts val="1950"/>
+              </a:lnSpc>
+              <a:spcAft>
+                <a:spcPts val="0"/>
+              </a:spcAft>
+              <a:buNone/>
+            </a:pPr>
+            <a:r>
+              <a:rPr lang="en-US" sz="1500" b="0">
+                <a:solidFill>
+                  <a:srgbClr val="202B33"/>
+                </a:solidFill>
+                <a:latin typeface="Arial"/>
+                <a:ea typeface="Arial"/>
+                <a:cs typeface="Arial"/>
+              </a:rPr>
+              <a:t xml:space="preserve">reduce asset specificity from a slide into</a:t>
+            </a:r>
+            <a:endParaRPr lang="en-US" sz="1500"/>
+          </a:p>
+          <a:p>
+            <a:pPr marL="0" indent="0">
+              <a:lnSpc>
+                <a:spcPts val="1950"/>
+              </a:lnSpc>
+              <a:spcAft>
+                <a:spcPts val="0"/>
+              </a:spcAft>
+              <a:buNone/>
+            </a:pPr>
+            <a:r>
+              <a:rPr lang="en-US" sz="1500" b="0">
+                <a:solidFill>
+                  <a:srgbClr val="202B33"/>
+                </a:solidFill>
+                <a:latin typeface="Arial"/>
+                <a:ea typeface="Arial"/>
+                <a:cs typeface="Arial"/>
+              </a:rPr>
+              <a:t xml:space="preserve">a fact. And put the estimated cost per</a:t>
+            </a:r>
+            <a:endParaRPr lang="en-US" sz="1500"/>
+          </a:p>
+          <a:p>
+            <a:pPr marL="0" indent="0">
+              <a:lnSpc>
+                <a:spcPts val="1950"/>
+              </a:lnSpc>
+              <a:spcAft>
+                <a:spcPts val="0"/>
+              </a:spcAft>
+              <a:buNone/>
+            </a:pPr>
+            <a:r>
+              <a:rPr lang="en-US" sz="1500" b="0">
+                <a:solidFill>
+                  <a:srgbClr val="202B33"/>
+                </a:solidFill>
+                <a:latin typeface="Arial"/>
+                <a:ea typeface="Arial"/>
+                <a:cs typeface="Arial"/>
+              </a:rPr>
+              <a:t xml:space="preserve">accepted outcome in the design doc next to</a:t>
+            </a:r>
+            <a:endParaRPr lang="en-US" sz="1500"/>
+          </a:p>
+          <a:p>
+            <a:pPr marL="0" indent="0">
+              <a:lnSpc>
+                <a:spcPts val="1950"/>
+              </a:lnSpc>
+              <a:spcAft>
+                <a:spcPts val="0"/>
+              </a:spcAft>
+              <a:buNone/>
+            </a:pPr>
+            <a:r>
+              <a:rPr lang="en-US" sz="1500" b="0">
+                <a:solidFill>
+                  <a:srgbClr val="202B33"/>
+                </a:solidFill>
+                <a:latin typeface="Arial"/>
+                <a:ea typeface="Arial"/>
+                <a:cs typeface="Arial"/>
+              </a:rPr>
+              <a:t xml:space="preserve">the latency budget, because that is the</a:t>
+            </a:r>
+            <a:endParaRPr lang="en-US" sz="1500"/>
+          </a:p>
+          <a:p>
+            <a:pPr marL="0" indent="0">
+              <a:lnSpc>
+                <a:spcPts val="1950"/>
+              </a:lnSpc>
+              <a:spcAft>
+                <a:spcPts val="0"/>
+              </a:spcAft>
+              <a:buNone/>
+            </a:pPr>
+            <a:r>
+              <a:rPr lang="en-US" sz="1500" b="0">
+                <a:solidFill>
+                  <a:srgbClr val="202B33"/>
+                </a:solidFill>
+                <a:latin typeface="Arial"/>
+                <a:ea typeface="Arial"/>
+                <a:cs typeface="Arial"/>
+              </a:rPr>
+              <a:t xml:space="preserve">meter, and the meter is the fix for moral</a:t>
+            </a:r>
+            <a:endParaRPr lang="en-US" sz="1500"/>
+          </a:p>
+          <a:p>
+            <a:pPr marL="0" indent="0">
+              <a:lnSpc>
+                <a:spcPts val="1950"/>
+              </a:lnSpc>
+              <a:spcAft>
+                <a:spcPts val="0"/>
+              </a:spcAft>
+              <a:buNone/>
+            </a:pPr>
+            <a:r>
+              <a:rPr lang="en-US" sz="1500" b="0">
+                <a:solidFill>
+                  <a:srgbClr val="202B33"/>
+                </a:solidFill>
+                <a:latin typeface="Arial"/>
+                <a:ea typeface="Arial"/>
+                <a:cs typeface="Arial"/>
+              </a:rPr>
+              <a:t xml:space="preserve">hazard.</a:t>
             </a:r>
             <a:endParaRPr lang="en-US" sz="1500"/>
           </a:p>
@@ -11702,7 +11634,7 @@
                 <a:ea typeface="Arial"/>
                 <a:cs typeface="Arial"/>
               </a:rPr>
-              <a:t xml:space="preserve">11 / 12    SOURCE SLIDE 14</a:t>
+              <a:t xml:space="preserve">12 / 12    SOURCE SLIDE 15</a:t>
             </a:r>
             <a:endParaRPr lang="en-US" sz="1050"/>
           </a:p>
@@ -11751,7 +11683,7 @@
                 <a:ea typeface="Arial"/>
                 <a:cs typeface="Arial"/>
               </a:rPr>
-              <a:t xml:space="preserve">Three prices for the next design review</a:t>
+              <a:t xml:space="preserve">Cheap intelligence changes incentives first</a:t>
             </a:r>
             <a:endParaRPr lang="en-US" sz="2550"/>
           </a:p>
@@ -11800,30 +11732,30 @@
                 <a:ea typeface="Arial"/>
                 <a:cs typeface="Arial"/>
               </a:rPr>
-              <a:t xml:space="preserve">What we pay today · What we pay without the</a:t>
-            </a:r>
-            <a:endParaRPr lang="en-US" sz="1500"/>
-          </a:p>
-          <a:p>
-            <a:pPr marL="0" indent="0">
-              <a:lnSpc>
-                <a:spcPts val="1950"/>
-              </a:lnSpc>
-              <a:spcAft>
-                <a:spcPts val="0"/>
-              </a:spcAft>
-              <a:buNone/>
-            </a:pPr>
-            <a:r>
-              <a:rPr lang="en-US" sz="1500" b="0">
-                <a:solidFill>
-                  <a:srgbClr val="202B33"/>
-                </a:solidFill>
-                <a:latin typeface="Arial"/>
-                <a:ea typeface="Arial"/>
-                <a:cs typeface="Arial"/>
-              </a:rPr>
-              <a:t xml:space="preserve">offer · What we can survive paying</a:t>
+              <a:t xml:space="preserve">Externality · Induced demand · Jevons</a:t>
+            </a:r>
+            <a:endParaRPr lang="en-US" sz="1500"/>
+          </a:p>
+          <a:p>
+            <a:pPr marL="0" indent="0">
+              <a:lnSpc>
+                <a:spcPts val="1950"/>
+              </a:lnSpc>
+              <a:spcAft>
+                <a:spcPts val="0"/>
+              </a:spcAft>
+              <a:buNone/>
+            </a:pPr>
+            <a:r>
+              <a:rPr lang="en-US" sz="1500" b="0">
+                <a:solidFill>
+                  <a:srgbClr val="202B33"/>
+                </a:solidFill>
+                <a:latin typeface="Arial"/>
+                <a:ea typeface="Arial"/>
+                <a:cs typeface="Arial"/>
+              </a:rPr>
+              <a:t xml:space="preserve">paradox · Path dependence</a:t>
             </a:r>
             <a:endParaRPr lang="en-US" sz="1500"/>
           </a:p>
@@ -11869,7 +11801,30 @@
                 <a:ea typeface="Arial"/>
                 <a:cs typeface="Arial"/>
               </a:rPr>
-              <a:t xml:space="preserve">Record gross usage separately from credits</a:t>
+              <a:t xml:space="preserve">Moral hazard · Credible commitment · Asset</a:t>
+            </a:r>
+            <a:endParaRPr lang="en-US" sz="1500"/>
+          </a:p>
+          <a:p>
+            <a:pPr marL="0" indent="0">
+              <a:lnSpc>
+                <a:spcPts val="1950"/>
+              </a:lnSpc>
+              <a:spcAft>
+                <a:spcPts val="0"/>
+              </a:spcAft>
+              <a:buNone/>
+            </a:pPr>
+            <a:r>
+              <a:rPr lang="en-US" sz="1500" b="0">
+                <a:solidFill>
+                  <a:srgbClr val="202B33"/>
+                </a:solidFill>
+                <a:latin typeface="Arial"/>
+                <a:ea typeface="Arial"/>
+                <a:cs typeface="Arial"/>
+              </a:rPr>
+              <a:t xml:space="preserve">specificity · Real option</a:t>
             </a:r>
             <a:endParaRPr lang="en-US" sz="1500"/>
           </a:p>
@@ -11915,30 +11870,7 @@
                 <a:ea typeface="Arial"/>
                 <a:cs typeface="Arial"/>
               </a:rPr>
-              <a:t xml:space="preserve">Keep an acceptance suite · Rehearse one</a:t>
-            </a:r>
-            <a:endParaRPr lang="en-US" sz="1500"/>
-          </a:p>
-          <a:p>
-            <a:pPr marL="0" indent="0">
-              <a:lnSpc>
-                <a:spcPts val="1950"/>
-              </a:lnSpc>
-              <a:spcAft>
-                <a:spcPts val="0"/>
-              </a:spcAft>
-              <a:buNone/>
-            </a:pPr>
-            <a:r>
-              <a:rPr lang="en-US" sz="1500" b="0">
-                <a:solidFill>
-                  <a:srgbClr val="202B33"/>
-                </a:solidFill>
-                <a:latin typeface="Arial"/>
-                <a:ea typeface="Arial"/>
-                <a:cs typeface="Arial"/>
-              </a:rPr>
-              <a:t xml:space="preserve">replacement · Price the portability</a:t>
+              <a:t xml:space="preserve">Build for more than one price.</a:t>
             </a:r>
             <a:endParaRPr lang="en-US" sz="1500"/>
           </a:p>
@@ -11984,214 +11916,168 @@
                 <a:ea typeface="Arial"/>
                 <a:cs typeface="Arial"/>
               </a:rPr>
-              <a:t xml:space="preserve">Three numbers, and if you take nothing</a:t>
-            </a:r>
-            <a:endParaRPr lang="en-US" sz="1500"/>
-          </a:p>
-          <a:p>
-            <a:pPr marL="0" indent="0">
-              <a:lnSpc>
-                <a:spcPts val="1950"/>
-              </a:lnSpc>
-              <a:spcAft>
-                <a:spcPts val="0"/>
-              </a:spcAft>
-              <a:buNone/>
-            </a:pPr>
-            <a:r>
-              <a:rPr lang="en-US" sz="1500" b="0">
-                <a:solidFill>
-                  <a:srgbClr val="202B33"/>
-                </a:solidFill>
-                <a:latin typeface="Arial"/>
-                <a:ea typeface="Arial"/>
-                <a:cs typeface="Arial"/>
-              </a:rPr>
-              <a:t xml:space="preserve">else, take these. The effective rate you</a:t>
-            </a:r>
-            <a:endParaRPr lang="en-US" sz="1500"/>
-          </a:p>
-          <a:p>
-            <a:pPr marL="0" indent="0">
-              <a:lnSpc>
-                <a:spcPts val="1950"/>
-              </a:lnSpc>
-              <a:spcAft>
-                <a:spcPts val="0"/>
-              </a:spcAft>
-              <a:buNone/>
-            </a:pPr>
-            <a:r>
-              <a:rPr lang="en-US" sz="1500" b="0">
-                <a:solidFill>
-                  <a:srgbClr val="202B33"/>
-                </a:solidFill>
-                <a:latin typeface="Arial"/>
-                <a:ea typeface="Arial"/>
-                <a:cs typeface="Arial"/>
-              </a:rPr>
-              <a:t xml:space="preserve">pay today. The gross rate with no</a:t>
-            </a:r>
-            <a:endParaRPr lang="en-US" sz="1500"/>
-          </a:p>
-          <a:p>
-            <a:pPr marL="0" indent="0">
-              <a:lnSpc>
-                <a:spcPts val="1950"/>
-              </a:lnSpc>
-              <a:spcAft>
-                <a:spcPts val="0"/>
-              </a:spcAft>
-              <a:buNone/>
-            </a:pPr>
-            <a:r>
-              <a:rPr lang="en-US" sz="1500" b="0">
-                <a:solidFill>
-                  <a:srgbClr val="202B33"/>
-                </a:solidFill>
-                <a:latin typeface="Arial"/>
-                <a:ea typeface="Arial"/>
-                <a:cs typeface="Arial"/>
-              </a:rPr>
-              <a:t xml:space="preserve">promotional treatment, which is your</a:t>
-            </a:r>
-            <a:endParaRPr lang="en-US" sz="1500"/>
-          </a:p>
-          <a:p>
-            <a:pPr marL="0" indent="0">
-              <a:lnSpc>
-                <a:spcPts val="1950"/>
-              </a:lnSpc>
-              <a:spcAft>
-                <a:spcPts val="0"/>
-              </a:spcAft>
-              <a:buNone/>
-            </a:pPr>
-            <a:r>
-              <a:rPr lang="en-US" sz="1500" b="0">
-                <a:solidFill>
-                  <a:srgbClr val="202B33"/>
-                </a:solidFill>
-                <a:latin typeface="Arial"/>
-                <a:ea typeface="Arial"/>
-                <a:cs typeface="Arial"/>
-              </a:rPr>
-              <a:t xml:space="preserve">exposure if the offer ends. And the highest</a:t>
-            </a:r>
-            <a:endParaRPr lang="en-US" sz="1500"/>
-          </a:p>
-          <a:p>
-            <a:pPr marL="0" indent="0">
-              <a:lnSpc>
-                <a:spcPts val="1950"/>
-              </a:lnSpc>
-              <a:spcAft>
-                <a:spcPts val="0"/>
-              </a:spcAft>
-              <a:buNone/>
-            </a:pPr>
-            <a:r>
-              <a:rPr lang="en-US" sz="1500" b="0">
-                <a:solidFill>
-                  <a:srgbClr val="202B33"/>
-                </a:solidFill>
-                <a:latin typeface="Arial"/>
-                <a:ea typeface="Arial"/>
-                <a:cs typeface="Arial"/>
-              </a:rPr>
-              <a:t xml:space="preserve">rate at which this product still makes</a:t>
-            </a:r>
-            <a:endParaRPr lang="en-US" sz="1500"/>
-          </a:p>
-          <a:p>
-            <a:pPr marL="0" indent="0">
-              <a:lnSpc>
-                <a:spcPts val="1950"/>
-              </a:lnSpc>
-              <a:spcAft>
-                <a:spcPts val="0"/>
-              </a:spcAft>
-              <a:buNone/>
-            </a:pPr>
-            <a:r>
-              <a:rPr lang="en-US" sz="1500" b="0">
-                <a:solidFill>
-                  <a:srgbClr val="202B33"/>
-                </a:solidFill>
-                <a:latin typeface="Arial"/>
-                <a:ea typeface="Arial"/>
-                <a:cs typeface="Arial"/>
-              </a:rPr>
-              <a:t xml:space="preserve">sense, which is the number nobody has ever</a:t>
-            </a:r>
-            <a:endParaRPr lang="en-US" sz="1500"/>
-          </a:p>
-          <a:p>
-            <a:pPr marL="0" indent="0">
-              <a:lnSpc>
-                <a:spcPts val="1950"/>
-              </a:lnSpc>
-              <a:spcAft>
-                <a:spcPts val="0"/>
-              </a:spcAft>
-              <a:buNone/>
-            </a:pPr>
-            <a:r>
-              <a:rPr lang="en-US" sz="1500" b="0">
-                <a:solidFill>
-                  <a:srgbClr val="202B33"/>
-                </a:solidFill>
-                <a:latin typeface="Arial"/>
-                <a:ea typeface="Arial"/>
-                <a:cs typeface="Arial"/>
-              </a:rPr>
-              <a:t xml:space="preserve">calculated and everybody should. Sweep</a:t>
-            </a:r>
-            <a:endParaRPr lang="en-US" sz="1500"/>
-          </a:p>
-          <a:p>
-            <a:pPr marL="0" indent="0">
-              <a:lnSpc>
-                <a:spcPts val="1950"/>
-              </a:lnSpc>
-              <a:spcAft>
-                <a:spcPts val="0"/>
-              </a:spcAft>
-              <a:buNone/>
-            </a:pPr>
-            <a:r>
-              <a:rPr lang="en-US" sz="1500" b="0">
-                <a:solidFill>
-                  <a:srgbClr val="202B33"/>
-                </a:solidFill>
-                <a:latin typeface="Arial"/>
-                <a:ea typeface="Arial"/>
-                <a:cs typeface="Arial"/>
-              </a:rPr>
-              <a:t xml:space="preserve">downward too, so you can cancel the</a:t>
-            </a:r>
-            <a:endParaRPr lang="en-US" sz="1500"/>
-          </a:p>
-          <a:p>
-            <a:pPr marL="0" indent="0">
-              <a:lnSpc>
-                <a:spcPts val="1950"/>
-              </a:lnSpc>
-              <a:spcAft>
-                <a:spcPts val="0"/>
-              </a:spcAft>
-              <a:buNone/>
-            </a:pPr>
-            <a:r>
-              <a:rPr lang="en-US" sz="1500" b="0">
-                <a:solidFill>
-                  <a:srgbClr val="202B33"/>
-                </a:solidFill>
-                <a:latin typeface="Arial"/>
-                <a:ea typeface="Arial"/>
-                <a:cs typeface="Arial"/>
-              </a:rPr>
-              <a:t xml:space="preserve">optimization project when efficiency makes</a:t>
+              <a:t xml:space="preserve">Back to the electricity. Use the cheap</a:t>
+            </a:r>
+            <a:endParaRPr lang="en-US" sz="1500"/>
+          </a:p>
+          <a:p>
+            <a:pPr marL="0" indent="0">
+              <a:lnSpc>
+                <a:spcPts val="1950"/>
+              </a:lnSpc>
+              <a:spcAft>
+                <a:spcPts val="0"/>
+              </a:spcAft>
+              <a:buNone/>
+            </a:pPr>
+            <a:r>
+              <a:rPr lang="en-US" sz="1500" b="0">
+                <a:solidFill>
+                  <a:srgbClr val="202B33"/>
+                </a:solidFill>
+                <a:latin typeface="Arial"/>
+                <a:ea typeface="Arial"/>
+                <a:cs typeface="Arial"/>
+              </a:rPr>
+              <a:t xml:space="preserve">input. It is genuinely great and I am not</a:t>
+            </a:r>
+            <a:endParaRPr lang="en-US" sz="1500"/>
+          </a:p>
+          <a:p>
+            <a:pPr marL="0" indent="0">
+              <a:lnSpc>
+                <a:spcPts val="1950"/>
+              </a:lnSpc>
+              <a:spcAft>
+                <a:spcPts val="0"/>
+              </a:spcAft>
+              <a:buNone/>
+            </a:pPr>
+            <a:r>
+              <a:rPr lang="en-US" sz="1500" b="0">
+                <a:solidFill>
+                  <a:srgbClr val="202B33"/>
+                </a:solidFill>
+                <a:latin typeface="Arial"/>
+                <a:ea typeface="Arial"/>
+                <a:cs typeface="Arial"/>
+              </a:rPr>
+              <a:t xml:space="preserve">asking anyone to be miserable about it.</a:t>
+            </a:r>
+            <a:endParaRPr lang="en-US" sz="1500"/>
+          </a:p>
+          <a:p>
+            <a:pPr marL="0" indent="0">
+              <a:lnSpc>
+                <a:spcPts val="1950"/>
+              </a:lnSpc>
+              <a:spcAft>
+                <a:spcPts val="0"/>
+              </a:spcAft>
+              <a:buNone/>
+            </a:pPr>
+            <a:r>
+              <a:rPr lang="en-US" sz="1500" b="0">
+                <a:solidFill>
+                  <a:srgbClr val="202B33"/>
+                </a:solidFill>
+                <a:latin typeface="Arial"/>
+                <a:ea typeface="Arial"/>
+                <a:cs typeface="Arial"/>
+              </a:rPr>
+              <a:t xml:space="preserve">Just understand what it encouraged you to</a:t>
+            </a:r>
+            <a:endParaRPr lang="en-US" sz="1500"/>
+          </a:p>
+          <a:p>
+            <a:pPr marL="0" indent="0">
+              <a:lnSpc>
+                <a:spcPts val="1950"/>
+              </a:lnSpc>
+              <a:spcAft>
+                <a:spcPts val="0"/>
+              </a:spcAft>
+              <a:buNone/>
+            </a:pPr>
+            <a:r>
+              <a:rPr lang="en-US" sz="1500" b="0">
+                <a:solidFill>
+                  <a:srgbClr val="202B33"/>
+                </a:solidFill>
+                <a:latin typeface="Arial"/>
+                <a:ea typeface="Arial"/>
+                <a:cs typeface="Arial"/>
+              </a:rPr>
+              <a:t xml:space="preserve">build, and keep the expensive decisions</a:t>
+            </a:r>
+            <a:endParaRPr lang="en-US" sz="1500"/>
+          </a:p>
+          <a:p>
+            <a:pPr marL="0" indent="0">
+              <a:lnSpc>
+                <a:spcPts val="1950"/>
+              </a:lnSpc>
+              <a:spcAft>
+                <a:spcPts val="0"/>
+              </a:spcAft>
+              <a:buNone/>
+            </a:pPr>
+            <a:r>
+              <a:rPr lang="en-US" sz="1500" b="0">
+                <a:solidFill>
+                  <a:srgbClr val="202B33"/>
+                </a:solidFill>
+                <a:latin typeface="Arial"/>
+                <a:ea typeface="Arial"/>
+                <a:cs typeface="Arial"/>
+              </a:rPr>
+              <a:t xml:space="preserve">reversible while you find out.</a:t>
+            </a:r>
+            <a:endParaRPr lang="en-US" sz="1500"/>
+          </a:p>
+          <a:p>
+            <a:pPr marL="0" indent="0">
+              <a:lnSpc>
+                <a:spcPts val="1950"/>
+              </a:lnSpc>
+              <a:spcAft>
+                <a:spcPts val="0"/>
+              </a:spcAft>
+              <a:buNone/>
+            </a:pPr>
+            <a:r>
+              <a:rPr lang="en-US" sz="1500" b="0">
+                <a:solidFill>
+                  <a:srgbClr val="202B33"/>
+                </a:solidFill>
+                <a:latin typeface="Arial"/>
+                <a:ea typeface="Arial"/>
+                <a:cs typeface="Arial"/>
+              </a:rPr>
+              <a:t xml:space="preserve"/>
+            </a:r>
+            <a:endParaRPr lang="en-US" sz="1500"/>
+          </a:p>
+          <a:p>
+            <a:pPr marL="0" indent="0">
+              <a:lnSpc>
+                <a:spcPts val="1950"/>
+              </a:lnSpc>
+              <a:spcAft>
+                <a:spcPts val="0"/>
+              </a:spcAft>
+              <a:buNone/>
+            </a:pPr>
+            <a:r>
+              <a:rPr lang="en-US" sz="1500" b="0">
+                <a:solidFill>
+                  <a:srgbClr val="202B33"/>
+                </a:solidFill>
+                <a:latin typeface="Arial"/>
+                <a:ea typeface="Arial"/>
+                <a:cs typeface="Arial"/>
+              </a:rPr>
+              <a:t xml:space="preserve">There are your eight words. Externality,</a:t>
             </a:r>
             <a:endParaRPr lang="en-US" sz="1500"/>
           </a:p>
@@ -12240,7 +12126,283 @@
                 <a:ea typeface="Arial"/>
                 <a:cs typeface="Arial"/>
               </a:rPr>
-              <a:t xml:space="preserve">it pointless.</a:t>
+              <a:t xml:space="preserve">because the cost moved rather than</a:t>
+            </a:r>
+            <a:endParaRPr lang="en-US" sz="1500"/>
+          </a:p>
+          <a:p>
+            <a:pPr marL="0" indent="0">
+              <a:lnSpc>
+                <a:spcPts val="1950"/>
+              </a:lnSpc>
+              <a:spcAft>
+                <a:spcPts val="0"/>
+              </a:spcAft>
+              <a:buNone/>
+            </a:pPr>
+            <a:r>
+              <a:rPr lang="en-US" sz="1500" b="0">
+                <a:solidFill>
+                  <a:srgbClr val="202B33"/>
+                </a:solidFill>
+                <a:latin typeface="Arial"/>
+                <a:ea typeface="Arial"/>
+                <a:cs typeface="Arial"/>
+              </a:rPr>
+              <a:t xml:space="preserve">vanished. Induced demand and Jevons,</a:t>
+            </a:r>
+            <a:endParaRPr lang="en-US" sz="1500"/>
+          </a:p>
+          <a:p>
+            <a:pPr marL="0" indent="0">
+              <a:lnSpc>
+                <a:spcPts val="1950"/>
+              </a:lnSpc>
+              <a:spcAft>
+                <a:spcPts val="0"/>
+              </a:spcAft>
+              <a:buNone/>
+            </a:pPr>
+            <a:r>
+              <a:rPr lang="en-US" sz="1500" b="0">
+                <a:solidFill>
+                  <a:srgbClr val="202B33"/>
+                </a:solidFill>
+                <a:latin typeface="Arial"/>
+                <a:ea typeface="Arial"/>
+                <a:cs typeface="Arial"/>
+              </a:rPr>
+              <a:t xml:space="preserve">because cheaper made you use more, not</a:t>
+            </a:r>
+            <a:endParaRPr lang="en-US" sz="1500"/>
+          </a:p>
+          <a:p>
+            <a:pPr marL="0" indent="0">
+              <a:lnSpc>
+                <a:spcPts val="1950"/>
+              </a:lnSpc>
+              <a:spcAft>
+                <a:spcPts val="0"/>
+              </a:spcAft>
+              <a:buNone/>
+            </a:pPr>
+            <a:r>
+              <a:rPr lang="en-US" sz="1500" b="0">
+                <a:solidFill>
+                  <a:srgbClr val="202B33"/>
+                </a:solidFill>
+                <a:latin typeface="Arial"/>
+                <a:ea typeface="Arial"/>
+                <a:cs typeface="Arial"/>
+              </a:rPr>
+              <a:t xml:space="preserve">less. Path dependence, because the lots</a:t>
+            </a:r>
+            <a:endParaRPr lang="en-US" sz="1500"/>
+          </a:p>
+          <a:p>
+            <a:pPr marL="0" indent="0">
+              <a:lnSpc>
+                <a:spcPts val="1950"/>
+              </a:lnSpc>
+              <a:spcAft>
+                <a:spcPts val="0"/>
+              </a:spcAft>
+              <a:buNone/>
+            </a:pPr>
+            <a:r>
+              <a:rPr lang="en-US" sz="1500" b="0">
+                <a:solidFill>
+                  <a:srgbClr val="202B33"/>
+                </a:solidFill>
+                <a:latin typeface="Arial"/>
+                <a:ea typeface="Arial"/>
+                <a:cs typeface="Arial"/>
+              </a:rPr>
+              <a:t xml:space="preserve">stay built. Moral hazard, because whoever</a:t>
+            </a:r>
+            <a:endParaRPr lang="en-US" sz="1500"/>
+          </a:p>
+          <a:p>
+            <a:pPr marL="0" indent="0">
+              <a:lnSpc>
+                <a:spcPts val="1950"/>
+              </a:lnSpc>
+              <a:spcAft>
+                <a:spcPts val="0"/>
+              </a:spcAft>
+              <a:buNone/>
+            </a:pPr>
+            <a:r>
+              <a:rPr lang="en-US" sz="1500" b="0">
+                <a:solidFill>
+                  <a:srgbClr val="202B33"/>
+                </a:solidFill>
+                <a:latin typeface="Arial"/>
+                <a:ea typeface="Arial"/>
+                <a:cs typeface="Arial"/>
+              </a:rPr>
+              <a:t xml:space="preserve">chooses is not whoever pays. Credible</a:t>
+            </a:r>
+            <a:endParaRPr lang="en-US" sz="1500"/>
+          </a:p>
+          <a:p>
+            <a:pPr marL="0" indent="0">
+              <a:lnSpc>
+                <a:spcPts val="1950"/>
+              </a:lnSpc>
+              <a:spcAft>
+                <a:spcPts val="0"/>
+              </a:spcAft>
+              <a:buNone/>
+            </a:pPr>
+            <a:r>
+              <a:rPr lang="en-US" sz="1500" b="0">
+                <a:solidFill>
+                  <a:srgbClr val="202B33"/>
+                </a:solidFill>
+                <a:latin typeface="Arial"/>
+                <a:ea typeface="Arial"/>
+                <a:cs typeface="Arial"/>
+              </a:rPr>
+              <a:t xml:space="preserve">commitment, because those contracts are</a:t>
+            </a:r>
+            <a:endParaRPr lang="en-US" sz="1500"/>
+          </a:p>
+          <a:p>
+            <a:pPr marL="0" indent="0">
+              <a:lnSpc>
+                <a:spcPts val="1950"/>
+              </a:lnSpc>
+              <a:spcAft>
+                <a:spcPts val="0"/>
+              </a:spcAft>
+              <a:buNone/>
+            </a:pPr>
+            <a:r>
+              <a:rPr lang="en-US" sz="1500" b="0">
+                <a:solidFill>
+                  <a:srgbClr val="202B33"/>
+                </a:solidFill>
+                <a:latin typeface="Arial"/>
+                <a:ea typeface="Arial"/>
+                <a:cs typeface="Arial"/>
+              </a:rPr>
+              <a:t xml:space="preserve">moves in a game and not disclosures about</a:t>
+            </a:r>
+            <a:endParaRPr lang="en-US" sz="1500"/>
+          </a:p>
+          <a:p>
+            <a:pPr marL="0" indent="0">
+              <a:lnSpc>
+                <a:spcPts val="1950"/>
+              </a:lnSpc>
+              <a:spcAft>
+                <a:spcPts val="0"/>
+              </a:spcAft>
+              <a:buNone/>
+            </a:pPr>
+            <a:r>
+              <a:rPr lang="en-US" sz="1500" b="0">
+                <a:solidFill>
+                  <a:srgbClr val="202B33"/>
+                </a:solidFill>
+                <a:latin typeface="Arial"/>
+                <a:ea typeface="Arial"/>
+                <a:cs typeface="Arial"/>
+              </a:rPr>
+              <a:t xml:space="preserve">it. Asset specificity, because your</a:t>
+            </a:r>
+            <a:endParaRPr lang="en-US" sz="1500"/>
+          </a:p>
+          <a:p>
+            <a:pPr marL="0" indent="0">
+              <a:lnSpc>
+                <a:spcPts val="1950"/>
+              </a:lnSpc>
+              <a:spcAft>
+                <a:spcPts val="0"/>
+              </a:spcAft>
+              <a:buNone/>
+            </a:pPr>
+            <a:r>
+              <a:rPr lang="en-US" sz="1500" b="0">
+                <a:solidFill>
+                  <a:srgbClr val="202B33"/>
+                </a:solidFill>
+                <a:latin typeface="Arial"/>
+                <a:ea typeface="Arial"/>
+                <a:cs typeface="Arial"/>
+              </a:rPr>
+              <a:t xml:space="preserve">architecture is worth more here than</a:t>
+            </a:r>
+            <a:endParaRPr lang="en-US" sz="1500"/>
+          </a:p>
+          <a:p>
+            <a:pPr marL="0" indent="0">
+              <a:lnSpc>
+                <a:spcPts val="1950"/>
+              </a:lnSpc>
+              <a:spcAft>
+                <a:spcPts val="0"/>
+              </a:spcAft>
+              <a:buNone/>
+            </a:pPr>
+            <a:r>
+              <a:rPr lang="en-US" sz="1500" b="0">
+                <a:solidFill>
+                  <a:srgbClr val="202B33"/>
+                </a:solidFill>
+                <a:latin typeface="Arial"/>
+                <a:ea typeface="Arial"/>
+                <a:cs typeface="Arial"/>
+              </a:rPr>
+              <a:t xml:space="preserve">anywhere else. And real option, because</a:t>
+            </a:r>
+            <a:endParaRPr lang="en-US" sz="1500"/>
+          </a:p>
+          <a:p>
+            <a:pPr marL="0" indent="0">
+              <a:lnSpc>
+                <a:spcPts val="1950"/>
+              </a:lnSpc>
+              <a:spcAft>
+                <a:spcPts val="0"/>
+              </a:spcAft>
+              <a:buNone/>
+            </a:pPr>
+            <a:r>
+              <a:rPr lang="en-US" sz="1500" b="0">
+                <a:solidFill>
+                  <a:srgbClr val="202B33"/>
+                </a:solidFill>
+                <a:latin typeface="Arial"/>
+                <a:ea typeface="Arial"/>
+                <a:cs typeface="Arial"/>
+              </a:rPr>
+              <a:t xml:space="preserve">reversibility is something you buy, not</a:t>
+            </a:r>
+            <a:endParaRPr lang="en-US" sz="1500"/>
+          </a:p>
+          <a:p>
+            <a:pPr marL="0" indent="0">
+              <a:lnSpc>
+                <a:spcPts val="1950"/>
+              </a:lnSpc>
+              <a:spcAft>
+                <a:spcPts val="0"/>
+              </a:spcAft>
+              <a:buNone/>
+            </a:pPr>
+            <a:r>
+              <a:rPr lang="en-US" sz="1500" b="0">
+                <a:solidFill>
+                  <a:srgbClr val="202B33"/>
+                </a:solidFill>
+                <a:latin typeface="Arial"/>
+                <a:ea typeface="Arial"/>
+                <a:cs typeface="Arial"/>
+              </a:rPr>
+              <a:t xml:space="preserve">something you feel.</a:t>
             </a:r>
             <a:endParaRPr lang="en-US" sz="1500"/>
           </a:p>
@@ -12286,329 +12448,30 @@
                 <a:ea typeface="Arial"/>
                 <a:cs typeface="Arial"/>
               </a:rPr>
-              <a:t xml:space="preserve">Four actions, and each one is one of the</a:t>
-            </a:r>
-            <a:endParaRPr lang="en-US" sz="1500"/>
-          </a:p>
-          <a:p>
-            <a:pPr marL="0" indent="0">
-              <a:lnSpc>
-                <a:spcPts val="1950"/>
-              </a:lnSpc>
-              <a:spcAft>
-                <a:spcPts val="0"/>
-              </a:spcAft>
-              <a:buNone/>
-            </a:pPr>
-            <a:r>
-              <a:rPr lang="en-US" sz="1500" b="0">
-                <a:solidFill>
-                  <a:srgbClr val="202B33"/>
-                </a:solidFill>
-                <a:latin typeface="Arial"/>
-                <a:ea typeface="Arial"/>
-                <a:cs typeface="Arial"/>
-              </a:rPr>
-              <a:t xml:space="preserve">words. Record gross consumption separately</a:t>
-            </a:r>
-            <a:endParaRPr lang="en-US" sz="1500"/>
-          </a:p>
-          <a:p>
-            <a:pPr marL="0" indent="0">
-              <a:lnSpc>
-                <a:spcPts val="1950"/>
-              </a:lnSpc>
-              <a:spcAft>
-                <a:spcPts val="0"/>
-              </a:spcAft>
-              <a:buNone/>
-            </a:pPr>
-            <a:r>
-              <a:rPr lang="en-US" sz="1500" b="0">
-                <a:solidFill>
-                  <a:srgbClr val="202B33"/>
-                </a:solidFill>
-                <a:latin typeface="Arial"/>
-                <a:ea typeface="Arial"/>
-                <a:cs typeface="Arial"/>
-              </a:rPr>
-              <a:t xml:space="preserve">from credits, so price and subsidy stop</a:t>
-            </a:r>
-            <a:endParaRPr lang="en-US" sz="1500"/>
-          </a:p>
-          <a:p>
-            <a:pPr marL="0" indent="0">
-              <a:lnSpc>
-                <a:spcPts val="1950"/>
-              </a:lnSpc>
-              <a:spcAft>
-                <a:spcPts val="0"/>
-              </a:spcAft>
-              <a:buNone/>
-            </a:pPr>
-            <a:r>
-              <a:rPr lang="en-US" sz="1500" b="0">
-                <a:solidFill>
-                  <a:srgbClr val="202B33"/>
-                </a:solidFill>
-                <a:latin typeface="Arial"/>
-                <a:ea typeface="Arial"/>
-                <a:cs typeface="Arial"/>
-              </a:rPr>
-              <a:t xml:space="preserve">being the same number on your dashboard.</a:t>
-            </a:r>
-            <a:endParaRPr lang="en-US" sz="1500"/>
-          </a:p>
-          <a:p>
-            <a:pPr marL="0" indent="0">
-              <a:lnSpc>
-                <a:spcPts val="1950"/>
-              </a:lnSpc>
-              <a:spcAft>
-                <a:spcPts val="0"/>
-              </a:spcAft>
-              <a:buNone/>
-            </a:pPr>
-            <a:r>
-              <a:rPr lang="en-US" sz="1500" b="0">
-                <a:solidFill>
-                  <a:srgbClr val="202B33"/>
-                </a:solidFill>
-                <a:latin typeface="Arial"/>
-                <a:ea typeface="Arial"/>
-                <a:cs typeface="Arial"/>
-              </a:rPr>
-              <a:t xml:space="preserve">Keep a small representative acceptance</a:t>
-            </a:r>
-            <a:endParaRPr lang="en-US" sz="1500"/>
-          </a:p>
-          <a:p>
-            <a:pPr marL="0" indent="0">
-              <a:lnSpc>
-                <a:spcPts val="1950"/>
-              </a:lnSpc>
-              <a:spcAft>
-                <a:spcPts val="0"/>
-              </a:spcAft>
-              <a:buNone/>
-            </a:pPr>
-            <a:r>
-              <a:rPr lang="en-US" sz="1500" b="0">
-                <a:solidFill>
-                  <a:srgbClr val="202B33"/>
-                </a:solidFill>
-                <a:latin typeface="Arial"/>
-                <a:ea typeface="Arial"/>
-                <a:cs typeface="Arial"/>
-              </a:rPr>
-              <a:t xml:space="preserve">suite, because that is the strike test on</a:t>
-            </a:r>
-            <a:endParaRPr lang="en-US" sz="1500"/>
-          </a:p>
-          <a:p>
-            <a:pPr marL="0" indent="0">
-              <a:lnSpc>
-                <a:spcPts val="1950"/>
-              </a:lnSpc>
-              <a:spcAft>
-                <a:spcPts val="0"/>
-              </a:spcAft>
-              <a:buNone/>
-            </a:pPr>
-            <a:r>
-              <a:rPr lang="en-US" sz="1500" b="0">
-                <a:solidFill>
-                  <a:srgbClr val="202B33"/>
-                </a:solidFill>
-                <a:latin typeface="Arial"/>
-                <a:ea typeface="Arial"/>
-                <a:cs typeface="Arial"/>
-              </a:rPr>
-              <a:t xml:space="preserve">your option. Rehearse one provider</a:t>
-            </a:r>
-            <a:endParaRPr lang="en-US" sz="1500"/>
-          </a:p>
-          <a:p>
-            <a:pPr marL="0" indent="0">
-              <a:lnSpc>
-                <a:spcPts val="1950"/>
-              </a:lnSpc>
-              <a:spcAft>
-                <a:spcPts val="0"/>
-              </a:spcAft>
-              <a:buNone/>
-            </a:pPr>
-            <a:r>
-              <a:rPr lang="en-US" sz="1500" b="0">
-                <a:solidFill>
-                  <a:srgbClr val="202B33"/>
-                </a:solidFill>
-                <a:latin typeface="Arial"/>
-                <a:ea typeface="Arial"/>
-                <a:cs typeface="Arial"/>
-              </a:rPr>
-              <a:t xml:space="preserve">replacement before you need it, latency and</a:t>
-            </a:r>
-            <a:endParaRPr lang="en-US" sz="1500"/>
-          </a:p>
-          <a:p>
-            <a:pPr marL="0" indent="0">
-              <a:lnSpc>
-                <a:spcPts val="1950"/>
-              </a:lnSpc>
-              <a:spcAft>
-                <a:spcPts val="0"/>
-              </a:spcAft>
-              <a:buNone/>
-            </a:pPr>
-            <a:r>
-              <a:rPr lang="en-US" sz="1500" b="0">
-                <a:solidFill>
-                  <a:srgbClr val="202B33"/>
-                </a:solidFill>
-                <a:latin typeface="Arial"/>
-                <a:ea typeface="Arial"/>
-                <a:cs typeface="Arial"/>
-              </a:rPr>
-              <a:t xml:space="preserve">recovery included, because that is how you</a:t>
-            </a:r>
-            <a:endParaRPr lang="en-US" sz="1500"/>
-          </a:p>
-          <a:p>
-            <a:pPr marL="0" indent="0">
-              <a:lnSpc>
-                <a:spcPts val="1950"/>
-              </a:lnSpc>
-              <a:spcAft>
-                <a:spcPts val="0"/>
-              </a:spcAft>
-              <a:buNone/>
-            </a:pPr>
-            <a:r>
-              <a:rPr lang="en-US" sz="1500" b="0">
-                <a:solidFill>
-                  <a:srgbClr val="202B33"/>
-                </a:solidFill>
-                <a:latin typeface="Arial"/>
-                <a:ea typeface="Arial"/>
-                <a:cs typeface="Arial"/>
-              </a:rPr>
-              <a:t xml:space="preserve">reduce asset specificity from a slide into</a:t>
-            </a:r>
-            <a:endParaRPr lang="en-US" sz="1500"/>
-          </a:p>
-          <a:p>
-            <a:pPr marL="0" indent="0">
-              <a:lnSpc>
-                <a:spcPts val="1950"/>
-              </a:lnSpc>
-              <a:spcAft>
-                <a:spcPts val="0"/>
-              </a:spcAft>
-              <a:buNone/>
-            </a:pPr>
-            <a:r>
-              <a:rPr lang="en-US" sz="1500" b="0">
-                <a:solidFill>
-                  <a:srgbClr val="202B33"/>
-                </a:solidFill>
-                <a:latin typeface="Arial"/>
-                <a:ea typeface="Arial"/>
-                <a:cs typeface="Arial"/>
-              </a:rPr>
-              <a:t xml:space="preserve">a fact. And put the estimated cost per</a:t>
-            </a:r>
-            <a:endParaRPr lang="en-US" sz="1500"/>
-          </a:p>
-          <a:p>
-            <a:pPr marL="0" indent="0">
-              <a:lnSpc>
-                <a:spcPts val="1950"/>
-              </a:lnSpc>
-              <a:spcAft>
-                <a:spcPts val="0"/>
-              </a:spcAft>
-              <a:buNone/>
-            </a:pPr>
-            <a:r>
-              <a:rPr lang="en-US" sz="1500" b="0">
-                <a:solidFill>
-                  <a:srgbClr val="202B33"/>
-                </a:solidFill>
-                <a:latin typeface="Arial"/>
-                <a:ea typeface="Arial"/>
-                <a:cs typeface="Arial"/>
-              </a:rPr>
-              <a:t xml:space="preserve">accepted outcome in the design doc next to</a:t>
-            </a:r>
-            <a:endParaRPr lang="en-US" sz="1500"/>
-          </a:p>
-          <a:p>
-            <a:pPr marL="0" indent="0">
-              <a:lnSpc>
-                <a:spcPts val="1950"/>
-              </a:lnSpc>
-              <a:spcAft>
-                <a:spcPts val="0"/>
-              </a:spcAft>
-              <a:buNone/>
-            </a:pPr>
-            <a:r>
-              <a:rPr lang="en-US" sz="1500" b="0">
-                <a:solidFill>
-                  <a:srgbClr val="202B33"/>
-                </a:solidFill>
-                <a:latin typeface="Arial"/>
-                <a:ea typeface="Arial"/>
-                <a:cs typeface="Arial"/>
-              </a:rPr>
-              <a:t xml:space="preserve">the latency budget, because that is the</a:t>
-            </a:r>
-            <a:endParaRPr lang="en-US" sz="1500"/>
-          </a:p>
-          <a:p>
-            <a:pPr marL="0" indent="0">
-              <a:lnSpc>
-                <a:spcPts val="1950"/>
-              </a:lnSpc>
-              <a:spcAft>
-                <a:spcPts val="0"/>
-              </a:spcAft>
-              <a:buNone/>
-            </a:pPr>
-            <a:r>
-              <a:rPr lang="en-US" sz="1500" b="0">
-                <a:solidFill>
-                  <a:srgbClr val="202B33"/>
-                </a:solidFill>
-                <a:latin typeface="Arial"/>
-                <a:ea typeface="Arial"/>
-                <a:cs typeface="Arial"/>
-              </a:rPr>
-              <a:t xml:space="preserve">meter, and the meter is the fix for moral</a:t>
-            </a:r>
-            <a:endParaRPr lang="en-US" sz="1500"/>
-          </a:p>
-          <a:p>
-            <a:pPr marL="0" indent="0">
-              <a:lnSpc>
-                <a:spcPts val="1950"/>
-              </a:lnSpc>
-              <a:spcAft>
-                <a:spcPts val="0"/>
-              </a:spcAft>
-              <a:buNone/>
-            </a:pPr>
-            <a:r>
-              <a:rPr lang="en-US" sz="1500" b="0">
-                <a:solidFill>
-                  <a:srgbClr val="202B33"/>
-                </a:solidFill>
-                <a:latin typeface="Arial"/>
-                <a:ea typeface="Arial"/>
-                <a:cs typeface="Arial"/>
-              </a:rPr>
-              <a:t xml:space="preserve">hazard.</a:t>
+              <a:t xml:space="preserve">Cheap intelligence changes incentives</a:t>
+            </a:r>
+            <a:endParaRPr lang="en-US" sz="1500"/>
+          </a:p>
+          <a:p>
+            <a:pPr marL="0" indent="0">
+              <a:lnSpc>
+                <a:spcPts val="1950"/>
+              </a:lnSpc>
+              <a:spcAft>
+                <a:spcPts val="0"/>
+              </a:spcAft>
+              <a:buNone/>
+            </a:pPr>
+            <a:r>
+              <a:rPr lang="en-US" sz="1500" b="0">
+                <a:solidFill>
+                  <a:srgbClr val="202B33"/>
+                </a:solidFill>
+                <a:latin typeface="Arial"/>
+                <a:ea typeface="Arial"/>
+                <a:cs typeface="Arial"/>
+              </a:rPr>
+              <a:t xml:space="preserve">before it changes organizations.</a:t>
             </a:r>
             <a:endParaRPr lang="en-US" sz="1500"/>
           </a:p>
@@ -12788,7 +12651,7 @@
                 <a:ea typeface="Arial"/>
                 <a:cs typeface="Arial"/>
               </a:rPr>
-              <a:t xml:space="preserve">12 / 12    SOURCE SLIDE 15</a:t>
+              <a:t xml:space="preserve">SOURCE REFERENCES</a:t>
             </a:r>
             <a:endParaRPr lang="en-US" sz="1050"/>
           </a:p>
@@ -12837,7 +12700,7 @@
                 <a:ea typeface="Arial"/>
                 <a:cs typeface="Arial"/>
               </a:rPr>
-              <a:t xml:space="preserve">Cheap intelligence changes incentives first</a:t>
+              <a:t xml:space="preserve">References</a:t>
             </a:r>
             <a:endParaRPr lang="en-US" sz="2550"/>
           </a:p>
@@ -12886,30 +12749,76 @@
                 <a:ea typeface="Arial"/>
                 <a:cs typeface="Arial"/>
               </a:rPr>
-              <a:t xml:space="preserve">Externality · Induced demand · Jevons</a:t>
-            </a:r>
-            <a:endParaRPr lang="en-US" sz="1500"/>
-          </a:p>
-          <a:p>
-            <a:pPr marL="0" indent="0">
-              <a:lnSpc>
-                <a:spcPts val="1950"/>
-              </a:lnSpc>
-              <a:spcAft>
-                <a:spcPts val="0"/>
-              </a:spcAft>
-              <a:buNone/>
-            </a:pPr>
-            <a:r>
-              <a:rPr lang="en-US" sz="1500" b="0">
-                <a:solidFill>
-                  <a:srgbClr val="202B33"/>
-                </a:solidFill>
-                <a:latin typeface="Arial"/>
-                <a:ea typeface="Arial"/>
-                <a:cs typeface="Arial"/>
-              </a:rPr>
-              <a:t xml:space="preserve">paradox · Path dependence</a:t>
+              <a:t xml:space="preserve">Brooke Group Ltd. v. Brown &amp; Williamson</a:t>
+            </a:r>
+            <a:endParaRPr lang="en-US" sz="1500"/>
+          </a:p>
+          <a:p>
+            <a:pPr marL="0" indent="0">
+              <a:lnSpc>
+                <a:spcPts val="1950"/>
+              </a:lnSpc>
+              <a:spcAft>
+                <a:spcPts val="0"/>
+              </a:spcAft>
+              <a:buNone/>
+            </a:pPr>
+            <a:r>
+              <a:rPr lang="en-US" sz="1500" b="0">
+                <a:solidFill>
+                  <a:srgbClr val="202B33"/>
+                </a:solidFill>
+                <a:latin typeface="Arial"/>
+                <a:ea typeface="Arial"/>
+                <a:cs typeface="Arial"/>
+              </a:rPr>
+              <a:t xml:space="preserve">Tobacco Corp., 509 U.S. 209 (1993), on the</a:t>
+            </a:r>
+            <a:endParaRPr lang="en-US" sz="1500"/>
+          </a:p>
+          <a:p>
+            <a:pPr marL="0" indent="0">
+              <a:lnSpc>
+                <a:spcPts val="1950"/>
+              </a:lnSpc>
+              <a:spcAft>
+                <a:spcPts val="0"/>
+              </a:spcAft>
+              <a:buNone/>
+            </a:pPr>
+            <a:r>
+              <a:rPr lang="en-US" sz="1500" b="0">
+                <a:solidFill>
+                  <a:srgbClr val="202B33"/>
+                </a:solidFill>
+                <a:latin typeface="Arial"/>
+                <a:ea typeface="Arial"/>
+                <a:cs typeface="Arial"/>
+              </a:rPr>
+              <a:t xml:space="preserve">recoupment requirement in predatory-pricing</a:t>
+            </a:r>
+            <a:endParaRPr lang="en-US" sz="1500"/>
+          </a:p>
+          <a:p>
+            <a:pPr marL="0" indent="0">
+              <a:lnSpc>
+                <a:spcPts val="1950"/>
+              </a:lnSpc>
+              <a:spcAft>
+                <a:spcPts val="0"/>
+              </a:spcAft>
+              <a:buNone/>
+            </a:pPr>
+            <a:r>
+              <a:rPr lang="en-US" sz="1500" b="0">
+                <a:solidFill>
+                  <a:srgbClr val="202B33"/>
+                </a:solidFill>
+                <a:latin typeface="Arial"/>
+                <a:ea typeface="Arial"/>
+                <a:cs typeface="Arial"/>
+              </a:rPr>
+              <a:t xml:space="preserve">claims.</a:t>
             </a:r>
             <a:endParaRPr lang="en-US" sz="1500"/>
           </a:p>
@@ -12955,30 +12864,76 @@
                 <a:ea typeface="Arial"/>
                 <a:cs typeface="Arial"/>
               </a:rPr>
-              <a:t xml:space="preserve">Moral hazard · Credible commitment · Asset</a:t>
-            </a:r>
-            <a:endParaRPr lang="en-US" sz="1500"/>
-          </a:p>
-          <a:p>
-            <a:pPr marL="0" indent="0">
-              <a:lnSpc>
-                <a:spcPts val="1950"/>
-              </a:lnSpc>
-              <a:spcAft>
-                <a:spcPts val="0"/>
-              </a:spcAft>
-              <a:buNone/>
-            </a:pPr>
-            <a:r>
-              <a:rPr lang="en-US" sz="1500" b="0">
-                <a:solidFill>
-                  <a:srgbClr val="202B33"/>
-                </a:solidFill>
-                <a:latin typeface="Arial"/>
-                <a:ea typeface="Arial"/>
-                <a:cs typeface="Arial"/>
-              </a:rPr>
-              <a:t xml:space="preserve">specificity · Real option</a:t>
+              <a:t xml:space="preserve">Rochet and Tirole (2003), Platform</a:t>
+            </a:r>
+            <a:endParaRPr lang="en-US" sz="1500"/>
+          </a:p>
+          <a:p>
+            <a:pPr marL="0" indent="0">
+              <a:lnSpc>
+                <a:spcPts val="1950"/>
+              </a:lnSpc>
+              <a:spcAft>
+                <a:spcPts val="0"/>
+              </a:spcAft>
+              <a:buNone/>
+            </a:pPr>
+            <a:r>
+              <a:rPr lang="en-US" sz="1500" b="0">
+                <a:solidFill>
+                  <a:srgbClr val="202B33"/>
+                </a:solidFill>
+                <a:latin typeface="Arial"/>
+                <a:ea typeface="Arial"/>
+                <a:cs typeface="Arial"/>
+              </a:rPr>
+              <a:t xml:space="preserve">Competition in Two-Sided Markets, Journal</a:t>
+            </a:r>
+            <a:endParaRPr lang="en-US" sz="1500"/>
+          </a:p>
+          <a:p>
+            <a:pPr marL="0" indent="0">
+              <a:lnSpc>
+                <a:spcPts val="1950"/>
+              </a:lnSpc>
+              <a:spcAft>
+                <a:spcPts val="0"/>
+              </a:spcAft>
+              <a:buNone/>
+            </a:pPr>
+            <a:r>
+              <a:rPr lang="en-US" sz="1500" b="0">
+                <a:solidFill>
+                  <a:srgbClr val="202B33"/>
+                </a:solidFill>
+                <a:latin typeface="Arial"/>
+                <a:ea typeface="Arial"/>
+                <a:cs typeface="Arial"/>
+              </a:rPr>
+              <a:t xml:space="preserve">of the European Economic Association, on</a:t>
+            </a:r>
+            <a:endParaRPr lang="en-US" sz="1500"/>
+          </a:p>
+          <a:p>
+            <a:pPr marL="0" indent="0">
+              <a:lnSpc>
+                <a:spcPts val="1950"/>
+              </a:lnSpc>
+              <a:spcAft>
+                <a:spcPts val="0"/>
+              </a:spcAft>
+              <a:buNone/>
+            </a:pPr>
+            <a:r>
+              <a:rPr lang="en-US" sz="1500" b="0">
+                <a:solidFill>
+                  <a:srgbClr val="202B33"/>
+                </a:solidFill>
+                <a:latin typeface="Arial"/>
+                <a:ea typeface="Arial"/>
+                <a:cs typeface="Arial"/>
+              </a:rPr>
+              <a:t xml:space="preserve">cross-subsidy between sides of a market.</a:t>
             </a:r>
             <a:endParaRPr lang="en-US" sz="1500"/>
           </a:p>
@@ -13024,283 +12979,122 @@
                 <a:ea typeface="Arial"/>
                 <a:cs typeface="Arial"/>
               </a:rPr>
-              <a:t xml:space="preserve">Build for more than one price.</a:t>
-            </a:r>
-            <a:endParaRPr lang="en-US" sz="1500"/>
-          </a:p>
-          <a:p>
-            <a:pPr marL="0" indent="0">
-              <a:lnSpc>
-                <a:spcPts val="1950"/>
-              </a:lnSpc>
-              <a:spcAft>
-                <a:spcPts val="0"/>
-              </a:spcAft>
-              <a:buNone/>
-            </a:pPr>
-            <a:r>
-              <a:rPr lang="en-US" sz="1500" b="0">
-                <a:solidFill>
-                  <a:srgbClr val="202B33"/>
-                </a:solidFill>
-                <a:latin typeface="Arial"/>
-                <a:ea typeface="Arial"/>
-                <a:cs typeface="Arial"/>
-              </a:rPr>
-              <a:t xml:space="preserve"/>
-            </a:r>
-            <a:endParaRPr lang="en-US" sz="1500"/>
-          </a:p>
-          <a:p>
-            <a:pPr marL="0" indent="0">
-              <a:lnSpc>
-                <a:spcPts val="1950"/>
-              </a:lnSpc>
-              <a:spcAft>
-                <a:spcPts val="0"/>
-              </a:spcAft>
-              <a:buNone/>
-            </a:pPr>
-            <a:r>
-              <a:rPr lang="en-US" sz="1500" b="0">
-                <a:solidFill>
-                  <a:srgbClr val="202B33"/>
-                </a:solidFill>
-                <a:latin typeface="Arial"/>
-                <a:ea typeface="Arial"/>
-                <a:cs typeface="Arial"/>
-              </a:rPr>
-              <a:t xml:space="preserve">Back to the electricity. Use the cheap</a:t>
-            </a:r>
-            <a:endParaRPr lang="en-US" sz="1500"/>
-          </a:p>
-          <a:p>
-            <a:pPr marL="0" indent="0">
-              <a:lnSpc>
-                <a:spcPts val="1950"/>
-              </a:lnSpc>
-              <a:spcAft>
-                <a:spcPts val="0"/>
-              </a:spcAft>
-              <a:buNone/>
-            </a:pPr>
-            <a:r>
-              <a:rPr lang="en-US" sz="1500" b="0">
-                <a:solidFill>
-                  <a:srgbClr val="202B33"/>
-                </a:solidFill>
-                <a:latin typeface="Arial"/>
-                <a:ea typeface="Arial"/>
-                <a:cs typeface="Arial"/>
-              </a:rPr>
-              <a:t xml:space="preserve">input. It is genuinely great and I am not</a:t>
-            </a:r>
-            <a:endParaRPr lang="en-US" sz="1500"/>
-          </a:p>
-          <a:p>
-            <a:pPr marL="0" indent="0">
-              <a:lnSpc>
-                <a:spcPts val="1950"/>
-              </a:lnSpc>
-              <a:spcAft>
-                <a:spcPts val="0"/>
-              </a:spcAft>
-              <a:buNone/>
-            </a:pPr>
-            <a:r>
-              <a:rPr lang="en-US" sz="1500" b="0">
-                <a:solidFill>
-                  <a:srgbClr val="202B33"/>
-                </a:solidFill>
-                <a:latin typeface="Arial"/>
-                <a:ea typeface="Arial"/>
-                <a:cs typeface="Arial"/>
-              </a:rPr>
-              <a:t xml:space="preserve">asking anyone to be miserable about it.</a:t>
-            </a:r>
-            <a:endParaRPr lang="en-US" sz="1500"/>
-          </a:p>
-          <a:p>
-            <a:pPr marL="0" indent="0">
-              <a:lnSpc>
-                <a:spcPts val="1950"/>
-              </a:lnSpc>
-              <a:spcAft>
-                <a:spcPts val="0"/>
-              </a:spcAft>
-              <a:buNone/>
-            </a:pPr>
-            <a:r>
-              <a:rPr lang="en-US" sz="1500" b="0">
-                <a:solidFill>
-                  <a:srgbClr val="202B33"/>
-                </a:solidFill>
-                <a:latin typeface="Arial"/>
-                <a:ea typeface="Arial"/>
-                <a:cs typeface="Arial"/>
-              </a:rPr>
-              <a:t xml:space="preserve">Just understand what it encouraged you to</a:t>
-            </a:r>
-            <a:endParaRPr lang="en-US" sz="1500"/>
-          </a:p>
-          <a:p>
-            <a:pPr marL="0" indent="0">
-              <a:lnSpc>
-                <a:spcPts val="1950"/>
-              </a:lnSpc>
-              <a:spcAft>
-                <a:spcPts val="0"/>
-              </a:spcAft>
-              <a:buNone/>
-            </a:pPr>
-            <a:r>
-              <a:rPr lang="en-US" sz="1500" b="0">
-                <a:solidFill>
-                  <a:srgbClr val="202B33"/>
-                </a:solidFill>
-                <a:latin typeface="Arial"/>
-                <a:ea typeface="Arial"/>
-                <a:cs typeface="Arial"/>
-              </a:rPr>
-              <a:t xml:space="preserve">build, and keep the expensive decisions</a:t>
-            </a:r>
-            <a:endParaRPr lang="en-US" sz="1500"/>
-          </a:p>
-          <a:p>
-            <a:pPr marL="0" indent="0">
-              <a:lnSpc>
-                <a:spcPts val="1950"/>
-              </a:lnSpc>
-              <a:spcAft>
-                <a:spcPts val="0"/>
-              </a:spcAft>
-              <a:buNone/>
-            </a:pPr>
-            <a:r>
-              <a:rPr lang="en-US" sz="1500" b="0">
-                <a:solidFill>
-                  <a:srgbClr val="202B33"/>
-                </a:solidFill>
-                <a:latin typeface="Arial"/>
-                <a:ea typeface="Arial"/>
-                <a:cs typeface="Arial"/>
-              </a:rPr>
-              <a:t xml:space="preserve">reversible while you find out.</a:t>
-            </a:r>
-            <a:endParaRPr lang="en-US" sz="1500"/>
-          </a:p>
-          <a:p>
-            <a:pPr marL="0" indent="0">
-              <a:lnSpc>
-                <a:spcPts val="1950"/>
-              </a:lnSpc>
-              <a:spcAft>
-                <a:spcPts val="0"/>
-              </a:spcAft>
-              <a:buNone/>
-            </a:pPr>
-            <a:r>
-              <a:rPr lang="en-US" sz="1500" b="0">
-                <a:solidFill>
-                  <a:srgbClr val="202B33"/>
-                </a:solidFill>
-                <a:latin typeface="Arial"/>
-                <a:ea typeface="Arial"/>
-                <a:cs typeface="Arial"/>
-              </a:rPr>
-              <a:t xml:space="preserve"/>
-            </a:r>
-            <a:endParaRPr lang="en-US" sz="1500"/>
-          </a:p>
-          <a:p>
-            <a:pPr marL="0" indent="0">
-              <a:lnSpc>
-                <a:spcPts val="1950"/>
-              </a:lnSpc>
-              <a:spcAft>
-                <a:spcPts val="0"/>
-              </a:spcAft>
-              <a:buNone/>
-            </a:pPr>
-            <a:r>
-              <a:rPr lang="en-US" sz="1500" b="0">
-                <a:solidFill>
-                  <a:srgbClr val="202B33"/>
-                </a:solidFill>
-                <a:latin typeface="Arial"/>
-                <a:ea typeface="Arial"/>
-                <a:cs typeface="Arial"/>
-              </a:rPr>
-              <a:t xml:space="preserve">There are your eight words. Externality,</a:t>
-            </a:r>
-            <a:endParaRPr lang="en-US" sz="1500"/>
-          </a:p>
-          <a:p>
-            <a:pPr marL="0" indent="0">
-              <a:lnSpc>
-                <a:spcPts val="1950"/>
-              </a:lnSpc>
-              <a:spcAft>
-                <a:spcPts val="0"/>
-              </a:spcAft>
-              <a:buNone/>
-            </a:pPr>
-            <a:r>
-              <a:rPr lang="en-US" sz="1500" b="0">
-                <a:solidFill>
-                  <a:srgbClr val="202B33"/>
-                </a:solidFill>
-                <a:latin typeface="Arial"/>
-                <a:ea typeface="Arial"/>
-                <a:cs typeface="Arial"/>
-              </a:rPr>
-              <a:t xml:space="preserve">because the cost moved rather than</a:t>
-            </a:r>
-            <a:endParaRPr lang="en-US" sz="1500"/>
-          </a:p>
-          <a:p>
-            <a:pPr marL="0" indent="0">
-              <a:lnSpc>
-                <a:spcPts val="1950"/>
-              </a:lnSpc>
-              <a:spcAft>
-                <a:spcPts val="0"/>
-              </a:spcAft>
-              <a:buNone/>
-            </a:pPr>
-            <a:r>
-              <a:rPr lang="en-US" sz="1500" b="0">
-                <a:solidFill>
-                  <a:srgbClr val="202B33"/>
-                </a:solidFill>
-                <a:latin typeface="Arial"/>
-                <a:ea typeface="Arial"/>
-                <a:cs typeface="Arial"/>
-              </a:rPr>
-              <a:t xml:space="preserve">vanished. Induced demand and Jevons,</a:t>
-            </a:r>
-            <a:endParaRPr lang="en-US" sz="1500"/>
-          </a:p>
-          <a:p>
-            <a:pPr marL="0" indent="0">
-              <a:lnSpc>
-                <a:spcPts val="1950"/>
-              </a:lnSpc>
-              <a:spcAft>
-                <a:spcPts val="0"/>
-              </a:spcAft>
-              <a:buNone/>
-            </a:pPr>
-            <a:r>
-              <a:rPr lang="en-US" sz="1500" b="0">
-                <a:solidFill>
-                  <a:srgbClr val="202B33"/>
-                </a:solidFill>
-                <a:latin typeface="Arial"/>
-                <a:ea typeface="Arial"/>
-                <a:cs typeface="Arial"/>
-              </a:rPr>
-              <a:t xml:space="preserve">because cheaper made you use more, not</a:t>
+              <a:t xml:space="preserve">Shoup (2005, updated 2011), The High Cost</a:t>
+            </a:r>
+            <a:endParaRPr lang="en-US" sz="1500"/>
+          </a:p>
+          <a:p>
+            <a:pPr marL="0" indent="0">
+              <a:lnSpc>
+                <a:spcPts val="1950"/>
+              </a:lnSpc>
+              <a:spcAft>
+                <a:spcPts val="0"/>
+              </a:spcAft>
+              <a:buNone/>
+            </a:pPr>
+            <a:r>
+              <a:rPr lang="en-US" sz="1500" b="0">
+                <a:solidFill>
+                  <a:srgbClr val="202B33"/>
+                </a:solidFill>
+                <a:latin typeface="Arial"/>
+                <a:ea typeface="Arial"/>
+                <a:cs typeface="Arial"/>
+              </a:rPr>
+              <a:t xml:space="preserve">of Free Parking, American Planning</a:t>
+            </a:r>
+            <a:endParaRPr lang="en-US" sz="1500"/>
+          </a:p>
+          <a:p>
+            <a:pPr marL="0" indent="0">
+              <a:lnSpc>
+                <a:spcPts val="1950"/>
+              </a:lnSpc>
+              <a:spcAft>
+                <a:spcPts val="0"/>
+              </a:spcAft>
+              <a:buNone/>
+            </a:pPr>
+            <a:r>
+              <a:rPr lang="en-US" sz="1500" b="0">
+                <a:solidFill>
+                  <a:srgbClr val="202B33"/>
+                </a:solidFill>
+                <a:latin typeface="Arial"/>
+                <a:ea typeface="Arial"/>
+                <a:cs typeface="Arial"/>
+              </a:rPr>
+              <a:t xml:space="preserve">Association. Also Shoup (2011), Free</a:t>
+            </a:r>
+            <a:endParaRPr lang="en-US" sz="1500"/>
+          </a:p>
+          <a:p>
+            <a:pPr marL="0" indent="0">
+              <a:lnSpc>
+                <a:spcPts val="1950"/>
+              </a:lnSpc>
+              <a:spcAft>
+                <a:spcPts val="0"/>
+              </a:spcAft>
+              <a:buNone/>
+            </a:pPr>
+            <a:r>
+              <a:rPr lang="en-US" sz="1500" b="0">
+                <a:solidFill>
+                  <a:srgbClr val="202B33"/>
+                </a:solidFill>
+                <a:latin typeface="Arial"/>
+                <a:ea typeface="Arial"/>
+                <a:cs typeface="Arial"/>
+              </a:rPr>
+              <a:t xml:space="preserve">parking or free markets —</a:t>
+            </a:r>
+            <a:endParaRPr lang="en-US" sz="1500"/>
+          </a:p>
+          <a:p>
+            <a:pPr marL="0" indent="0">
+              <a:lnSpc>
+                <a:spcPts val="1950"/>
+              </a:lnSpc>
+              <a:spcAft>
+                <a:spcPts val="0"/>
+              </a:spcAft>
+              <a:buNone/>
+            </a:pPr>
+            <a:r>
+              <a:rPr lang="en-US" sz="1500" b="0">
+                <a:solidFill>
+                  <a:srgbClr val="202B33"/>
+                </a:solidFill>
+                <a:latin typeface="Arial"/>
+                <a:ea typeface="Arial"/>
+                <a:cs typeface="Arial"/>
+              </a:rPr>
+              <a:t xml:space="preserve">https://www.accessmagazine.org/spring-2011/free-parking-free-markets/,</a:t>
+            </a:r>
+            <a:endParaRPr lang="en-US" sz="1500"/>
+          </a:p>
+          <a:p>
+            <a:pPr marL="0" indent="0">
+              <a:lnSpc>
+                <a:spcPts val="1950"/>
+              </a:lnSpc>
+              <a:spcAft>
+                <a:spcPts val="0"/>
+              </a:spcAft>
+              <a:buNone/>
+            </a:pPr>
+            <a:r>
+              <a:rPr lang="en-US" sz="1500" b="0">
+                <a:solidFill>
+                  <a:srgbClr val="202B33"/>
+                </a:solidFill>
+                <a:latin typeface="Arial"/>
+                <a:ea typeface="Arial"/>
+                <a:cs typeface="Arial"/>
+              </a:rPr>
+              <a:t xml:space="preserve">ACCESS Magazine.</a:t>
             </a:r>
             <a:endParaRPr lang="en-US" sz="1500"/>
           </a:p>
@@ -13349,236 +13143,6 @@
                 <a:ea typeface="Arial"/>
                 <a:cs typeface="Arial"/>
               </a:rPr>
-              <a:t xml:space="preserve">less. Path dependence, because the lots</a:t>
-            </a:r>
-            <a:endParaRPr lang="en-US" sz="1500"/>
-          </a:p>
-          <a:p>
-            <a:pPr marL="0" indent="0">
-              <a:lnSpc>
-                <a:spcPts val="1950"/>
-              </a:lnSpc>
-              <a:spcAft>
-                <a:spcPts val="0"/>
-              </a:spcAft>
-              <a:buNone/>
-            </a:pPr>
-            <a:r>
-              <a:rPr lang="en-US" sz="1500" b="0">
-                <a:solidFill>
-                  <a:srgbClr val="202B33"/>
-                </a:solidFill>
-                <a:latin typeface="Arial"/>
-                <a:ea typeface="Arial"/>
-                <a:cs typeface="Arial"/>
-              </a:rPr>
-              <a:t xml:space="preserve">stay built. Moral hazard, because whoever</a:t>
-            </a:r>
-            <a:endParaRPr lang="en-US" sz="1500"/>
-          </a:p>
-          <a:p>
-            <a:pPr marL="0" indent="0">
-              <a:lnSpc>
-                <a:spcPts val="1950"/>
-              </a:lnSpc>
-              <a:spcAft>
-                <a:spcPts val="0"/>
-              </a:spcAft>
-              <a:buNone/>
-            </a:pPr>
-            <a:r>
-              <a:rPr lang="en-US" sz="1500" b="0">
-                <a:solidFill>
-                  <a:srgbClr val="202B33"/>
-                </a:solidFill>
-                <a:latin typeface="Arial"/>
-                <a:ea typeface="Arial"/>
-                <a:cs typeface="Arial"/>
-              </a:rPr>
-              <a:t xml:space="preserve">chooses is not whoever pays. Credible</a:t>
-            </a:r>
-            <a:endParaRPr lang="en-US" sz="1500"/>
-          </a:p>
-          <a:p>
-            <a:pPr marL="0" indent="0">
-              <a:lnSpc>
-                <a:spcPts val="1950"/>
-              </a:lnSpc>
-              <a:spcAft>
-                <a:spcPts val="0"/>
-              </a:spcAft>
-              <a:buNone/>
-            </a:pPr>
-            <a:r>
-              <a:rPr lang="en-US" sz="1500" b="0">
-                <a:solidFill>
-                  <a:srgbClr val="202B33"/>
-                </a:solidFill>
-                <a:latin typeface="Arial"/>
-                <a:ea typeface="Arial"/>
-                <a:cs typeface="Arial"/>
-              </a:rPr>
-              <a:t xml:space="preserve">commitment, because those contracts are</a:t>
-            </a:r>
-            <a:endParaRPr lang="en-US" sz="1500"/>
-          </a:p>
-          <a:p>
-            <a:pPr marL="0" indent="0">
-              <a:lnSpc>
-                <a:spcPts val="1950"/>
-              </a:lnSpc>
-              <a:spcAft>
-                <a:spcPts val="0"/>
-              </a:spcAft>
-              <a:buNone/>
-            </a:pPr>
-            <a:r>
-              <a:rPr lang="en-US" sz="1500" b="0">
-                <a:solidFill>
-                  <a:srgbClr val="202B33"/>
-                </a:solidFill>
-                <a:latin typeface="Arial"/>
-                <a:ea typeface="Arial"/>
-                <a:cs typeface="Arial"/>
-              </a:rPr>
-              <a:t xml:space="preserve">moves in a game and not disclosures about</a:t>
-            </a:r>
-            <a:endParaRPr lang="en-US" sz="1500"/>
-          </a:p>
-          <a:p>
-            <a:pPr marL="0" indent="0">
-              <a:lnSpc>
-                <a:spcPts val="1950"/>
-              </a:lnSpc>
-              <a:spcAft>
-                <a:spcPts val="0"/>
-              </a:spcAft>
-              <a:buNone/>
-            </a:pPr>
-            <a:r>
-              <a:rPr lang="en-US" sz="1500" b="0">
-                <a:solidFill>
-                  <a:srgbClr val="202B33"/>
-                </a:solidFill>
-                <a:latin typeface="Arial"/>
-                <a:ea typeface="Arial"/>
-                <a:cs typeface="Arial"/>
-              </a:rPr>
-              <a:t xml:space="preserve">it. Asset specificity, because your</a:t>
-            </a:r>
-            <a:endParaRPr lang="en-US" sz="1500"/>
-          </a:p>
-          <a:p>
-            <a:pPr marL="0" indent="0">
-              <a:lnSpc>
-                <a:spcPts val="1950"/>
-              </a:lnSpc>
-              <a:spcAft>
-                <a:spcPts val="0"/>
-              </a:spcAft>
-              <a:buNone/>
-            </a:pPr>
-            <a:r>
-              <a:rPr lang="en-US" sz="1500" b="0">
-                <a:solidFill>
-                  <a:srgbClr val="202B33"/>
-                </a:solidFill>
-                <a:latin typeface="Arial"/>
-                <a:ea typeface="Arial"/>
-                <a:cs typeface="Arial"/>
-              </a:rPr>
-              <a:t xml:space="preserve">architecture is worth more here than</a:t>
-            </a:r>
-            <a:endParaRPr lang="en-US" sz="1500"/>
-          </a:p>
-          <a:p>
-            <a:pPr marL="0" indent="0">
-              <a:lnSpc>
-                <a:spcPts val="1950"/>
-              </a:lnSpc>
-              <a:spcAft>
-                <a:spcPts val="0"/>
-              </a:spcAft>
-              <a:buNone/>
-            </a:pPr>
-            <a:r>
-              <a:rPr lang="en-US" sz="1500" b="0">
-                <a:solidFill>
-                  <a:srgbClr val="202B33"/>
-                </a:solidFill>
-                <a:latin typeface="Arial"/>
-                <a:ea typeface="Arial"/>
-                <a:cs typeface="Arial"/>
-              </a:rPr>
-              <a:t xml:space="preserve">anywhere else. And real option, because</a:t>
-            </a:r>
-            <a:endParaRPr lang="en-US" sz="1500"/>
-          </a:p>
-          <a:p>
-            <a:pPr marL="0" indent="0">
-              <a:lnSpc>
-                <a:spcPts val="1950"/>
-              </a:lnSpc>
-              <a:spcAft>
-                <a:spcPts val="0"/>
-              </a:spcAft>
-              <a:buNone/>
-            </a:pPr>
-            <a:r>
-              <a:rPr lang="en-US" sz="1500" b="0">
-                <a:solidFill>
-                  <a:srgbClr val="202B33"/>
-                </a:solidFill>
-                <a:latin typeface="Arial"/>
-                <a:ea typeface="Arial"/>
-                <a:cs typeface="Arial"/>
-              </a:rPr>
-              <a:t xml:space="preserve">reversibility is something you buy, not</a:t>
-            </a:r>
-            <a:endParaRPr lang="en-US" sz="1500"/>
-          </a:p>
-          <a:p>
-            <a:pPr marL="0" indent="0">
-              <a:lnSpc>
-                <a:spcPts val="1950"/>
-              </a:lnSpc>
-              <a:spcAft>
-                <a:spcPts val="0"/>
-              </a:spcAft>
-              <a:buNone/>
-            </a:pPr>
-            <a:r>
-              <a:rPr lang="en-US" sz="1500" b="0">
-                <a:solidFill>
-                  <a:srgbClr val="202B33"/>
-                </a:solidFill>
-                <a:latin typeface="Arial"/>
-                <a:ea typeface="Arial"/>
-                <a:cs typeface="Arial"/>
-              </a:rPr>
-              <a:t xml:space="preserve">something you feel.</a:t>
-            </a:r>
-            <a:endParaRPr lang="en-US" sz="1500"/>
-          </a:p>
-          <a:p>
-            <a:pPr marL="0" indent="0">
-              <a:lnSpc>
-                <a:spcPts val="1950"/>
-              </a:lnSpc>
-              <a:spcAft>
-                <a:spcPts val="0"/>
-              </a:spcAft>
-              <a:buNone/>
-            </a:pPr>
-            <a:r>
-              <a:rPr lang="en-US" sz="1500" b="0">
-                <a:solidFill>
-                  <a:srgbClr val="202B33"/>
-                </a:solidFill>
-                <a:latin typeface="Arial"/>
-                <a:ea typeface="Arial"/>
-                <a:cs typeface="Arial"/>
-              </a:rPr>
               <a:t xml:space="preserve"/>
             </a:r>
             <a:endParaRPr lang="en-US" sz="1500"/>
@@ -13602,99 +13166,76 @@
                 <a:ea typeface="Arial"/>
                 <a:cs typeface="Arial"/>
               </a:rPr>
-              <a:t xml:space="preserve">Some low prices are temporary. Some are a</a:t>
-            </a:r>
-            <a:endParaRPr lang="en-US" sz="1500"/>
-          </a:p>
-          <a:p>
-            <a:pPr marL="0" indent="0">
-              <a:lnSpc>
-                <a:spcPts val="1950"/>
-              </a:lnSpc>
-              <a:spcAft>
-                <a:spcPts val="0"/>
-              </a:spcAft>
-              <a:buNone/>
-            </a:pPr>
-            <a:r>
-              <a:rPr lang="en-US" sz="1500" b="0">
-                <a:solidFill>
-                  <a:srgbClr val="202B33"/>
-                </a:solidFill>
-                <a:latin typeface="Arial"/>
-                <a:ea typeface="Arial"/>
-                <a:cs typeface="Arial"/>
-              </a:rPr>
-              <a:t xml:space="preserve">preview of genuinely cheaper production.</a:t>
-            </a:r>
-            <a:endParaRPr lang="en-US" sz="1500"/>
-          </a:p>
-          <a:p>
-            <a:pPr marL="0" indent="0">
-              <a:lnSpc>
-                <a:spcPts val="1950"/>
-              </a:lnSpc>
-              <a:spcAft>
-                <a:spcPts val="0"/>
-              </a:spcAft>
-              <a:buNone/>
-            </a:pPr>
-            <a:r>
-              <a:rPr lang="en-US" sz="1500" b="0">
-                <a:solidFill>
-                  <a:srgbClr val="202B33"/>
-                </a:solidFill>
-                <a:latin typeface="Arial"/>
-                <a:ea typeface="Arial"/>
-                <a:cs typeface="Arial"/>
-              </a:rPr>
-              <a:t xml:space="preserve">You do not have to know which. You have to</a:t>
-            </a:r>
-            <a:endParaRPr lang="en-US" sz="1500"/>
-          </a:p>
-          <a:p>
-            <a:pPr marL="0" indent="0">
-              <a:lnSpc>
-                <a:spcPts val="1950"/>
-              </a:lnSpc>
-              <a:spcAft>
-                <a:spcPts val="0"/>
-              </a:spcAft>
-              <a:buNone/>
-            </a:pPr>
-            <a:r>
-              <a:rPr lang="en-US" sz="1500" b="0">
-                <a:solidFill>
-                  <a:srgbClr val="202B33"/>
-                </a:solidFill>
-                <a:latin typeface="Arial"/>
-                <a:ea typeface="Arial"/>
-                <a:cs typeface="Arial"/>
-              </a:rPr>
-              <a:t xml:space="preserve">measure outcomes and keep the big choices</a:t>
-            </a:r>
-            <a:endParaRPr lang="en-US" sz="1500"/>
-          </a:p>
-          <a:p>
-            <a:pPr marL="0" indent="0">
-              <a:lnSpc>
-                <a:spcPts val="1950"/>
-              </a:lnSpc>
-              <a:spcAft>
-                <a:spcPts val="0"/>
-              </a:spcAft>
-              <a:buNone/>
-            </a:pPr>
-            <a:r>
-              <a:rPr lang="en-US" sz="1500" b="0">
-                <a:solidFill>
-                  <a:srgbClr val="202B33"/>
-                </a:solidFill>
-                <a:latin typeface="Arial"/>
-                <a:ea typeface="Arial"/>
-                <a:cs typeface="Arial"/>
-              </a:rPr>
-              <a:t xml:space="preserve">reversible either way.</a:t>
+              <a:t xml:space="preserve">Jevons (1865), The Coal Question, chapter</a:t>
+            </a:r>
+            <a:endParaRPr lang="en-US" sz="1500"/>
+          </a:p>
+          <a:p>
+            <a:pPr marL="0" indent="0">
+              <a:lnSpc>
+                <a:spcPts val="1950"/>
+              </a:lnSpc>
+              <a:spcAft>
+                <a:spcPts val="0"/>
+              </a:spcAft>
+              <a:buNone/>
+            </a:pPr>
+            <a:r>
+              <a:rPr lang="en-US" sz="1500" b="0">
+                <a:solidFill>
+                  <a:srgbClr val="202B33"/>
+                </a:solidFill>
+                <a:latin typeface="Arial"/>
+                <a:ea typeface="Arial"/>
+                <a:cs typeface="Arial"/>
+              </a:rPr>
+              <a:t xml:space="preserve">VII. Duranton and Turner (2011), The</a:t>
+            </a:r>
+            <a:endParaRPr lang="en-US" sz="1500"/>
+          </a:p>
+          <a:p>
+            <a:pPr marL="0" indent="0">
+              <a:lnSpc>
+                <a:spcPts val="1950"/>
+              </a:lnSpc>
+              <a:spcAft>
+                <a:spcPts val="0"/>
+              </a:spcAft>
+              <a:buNone/>
+            </a:pPr>
+            <a:r>
+              <a:rPr lang="en-US" sz="1500" b="0">
+                <a:solidFill>
+                  <a:srgbClr val="202B33"/>
+                </a:solidFill>
+                <a:latin typeface="Arial"/>
+                <a:ea typeface="Arial"/>
+                <a:cs typeface="Arial"/>
+              </a:rPr>
+              <a:t xml:space="preserve">Fundamental Law of Road Congestion,</a:t>
+            </a:r>
+            <a:endParaRPr lang="en-US" sz="1500"/>
+          </a:p>
+          <a:p>
+            <a:pPr marL="0" indent="0">
+              <a:lnSpc>
+                <a:spcPts val="1950"/>
+              </a:lnSpc>
+              <a:spcAft>
+                <a:spcPts val="0"/>
+              </a:spcAft>
+              <a:buNone/>
+            </a:pPr>
+            <a:r>
+              <a:rPr lang="en-US" sz="1500" b="0">
+                <a:solidFill>
+                  <a:srgbClr val="202B33"/>
+                </a:solidFill>
+                <a:latin typeface="Arial"/>
+                <a:ea typeface="Arial"/>
+                <a:cs typeface="Arial"/>
+              </a:rPr>
+              <a:t xml:space="preserve">American Economic Review 101(6).</a:t>
             </a:r>
             <a:endParaRPr lang="en-US" sz="1500"/>
           </a:p>
@@ -13740,30 +13281,214 @@
                 <a:ea typeface="Arial"/>
                 <a:cs typeface="Arial"/>
               </a:rPr>
-              <a:t xml:space="preserve">Cheap intelligence changes incentives</a:t>
-            </a:r>
-            <a:endParaRPr lang="en-US" sz="1500"/>
-          </a:p>
-          <a:p>
-            <a:pPr marL="0" indent="0">
-              <a:lnSpc>
-                <a:spcPts val="1950"/>
-              </a:lnSpc>
-              <a:spcAft>
-                <a:spcPts val="0"/>
-              </a:spcAft>
-              <a:buNone/>
-            </a:pPr>
-            <a:r>
-              <a:rPr lang="en-US" sz="1500" b="0">
-                <a:solidFill>
-                  <a:srgbClr val="202B33"/>
-                </a:solidFill>
-                <a:latin typeface="Arial"/>
-                <a:ea typeface="Arial"/>
-                <a:cs typeface="Arial"/>
-              </a:rPr>
-              <a:t xml:space="preserve">before it changes organizations.</a:t>
+              <a:t xml:space="preserve">Cottier, Snodin, Owen, Adamczewski (Epoch</a:t>
+            </a:r>
+            <a:endParaRPr lang="en-US" sz="1500"/>
+          </a:p>
+          <a:p>
+            <a:pPr marL="0" indent="0">
+              <a:lnSpc>
+                <a:spcPts val="1950"/>
+              </a:lnSpc>
+              <a:spcAft>
+                <a:spcPts val="0"/>
+              </a:spcAft>
+              <a:buNone/>
+            </a:pPr>
+            <a:r>
+              <a:rPr lang="en-US" sz="1500" b="0">
+                <a:solidFill>
+                  <a:srgbClr val="202B33"/>
+                </a:solidFill>
+                <a:latin typeface="Arial"/>
+                <a:ea typeface="Arial"/>
+                <a:cs typeface="Arial"/>
+              </a:rPr>
+              <a:t xml:space="preserve">AI, March 2025), LLM inference prices have</a:t>
+            </a:r>
+            <a:endParaRPr lang="en-US" sz="1500"/>
+          </a:p>
+          <a:p>
+            <a:pPr marL="0" indent="0">
+              <a:lnSpc>
+                <a:spcPts val="1950"/>
+              </a:lnSpc>
+              <a:spcAft>
+                <a:spcPts val="0"/>
+              </a:spcAft>
+              <a:buNone/>
+            </a:pPr>
+            <a:r>
+              <a:rPr lang="en-US" sz="1500" b="0">
+                <a:solidFill>
+                  <a:srgbClr val="202B33"/>
+                </a:solidFill>
+                <a:latin typeface="Arial"/>
+                <a:ea typeface="Arial"/>
+                <a:cs typeface="Arial"/>
+              </a:rPr>
+              <a:t xml:space="preserve">fallen rapidly but unequally across tasks —</a:t>
+            </a:r>
+            <a:endParaRPr lang="en-US" sz="1500"/>
+          </a:p>
+          <a:p>
+            <a:pPr marL="0" indent="0">
+              <a:lnSpc>
+                <a:spcPts val="1950"/>
+              </a:lnSpc>
+              <a:spcAft>
+                <a:spcPts val="0"/>
+              </a:spcAft>
+              <a:buNone/>
+            </a:pPr>
+            <a:r>
+              <a:rPr lang="en-US" sz="1500" b="0">
+                <a:solidFill>
+                  <a:srgbClr val="202B33"/>
+                </a:solidFill>
+                <a:latin typeface="Arial"/>
+                <a:ea typeface="Arial"/>
+                <a:cs typeface="Arial"/>
+              </a:rPr>
+              <a:t xml:space="preserve">https://epoch.ai/data-insights/llm-inference-price-trends.</a:t>
+            </a:r>
+            <a:endParaRPr lang="en-US" sz="1500"/>
+          </a:p>
+          <a:p>
+            <a:pPr marL="0" indent="0">
+              <a:lnSpc>
+                <a:spcPts val="1950"/>
+              </a:lnSpc>
+              <a:spcAft>
+                <a:spcPts val="0"/>
+              </a:spcAft>
+              <a:buNone/>
+            </a:pPr>
+            <a:r>
+              <a:rPr lang="en-US" sz="1500" b="0">
+                <a:solidFill>
+                  <a:srgbClr val="202B33"/>
+                </a:solidFill>
+                <a:latin typeface="Arial"/>
+                <a:ea typeface="Arial"/>
+                <a:cs typeface="Arial"/>
+              </a:rPr>
+              <a:t xml:space="preserve">Check for a newer edition before each</a:t>
+            </a:r>
+            <a:endParaRPr lang="en-US" sz="1500"/>
+          </a:p>
+          <a:p>
+            <a:pPr marL="0" indent="0">
+              <a:lnSpc>
+                <a:spcPts val="1950"/>
+              </a:lnSpc>
+              <a:spcAft>
+                <a:spcPts val="0"/>
+              </a:spcAft>
+              <a:buNone/>
+            </a:pPr>
+            <a:r>
+              <a:rPr lang="en-US" sz="1500" b="0">
+                <a:solidFill>
+                  <a:srgbClr val="202B33"/>
+                </a:solidFill>
+                <a:latin typeface="Arial"/>
+                <a:ea typeface="Arial"/>
+                <a:cs typeface="Arial"/>
+              </a:rPr>
+              <a:t xml:space="preserve">delivery.</a:t>
+            </a:r>
+            <a:endParaRPr lang="en-US" sz="1500"/>
+          </a:p>
+          <a:p>
+            <a:pPr marL="0" indent="0">
+              <a:lnSpc>
+                <a:spcPts val="1950"/>
+              </a:lnSpc>
+              <a:spcAft>
+                <a:spcPts val="0"/>
+              </a:spcAft>
+              <a:buNone/>
+            </a:pPr>
+            <a:r>
+              <a:rPr lang="en-US" sz="1500" b="0">
+                <a:solidFill>
+                  <a:srgbClr val="202B33"/>
+                </a:solidFill>
+                <a:latin typeface="Arial"/>
+                <a:ea typeface="Arial"/>
+                <a:cs typeface="Arial"/>
+              </a:rPr>
+              <a:t xml:space="preserve"/>
+            </a:r>
+            <a:endParaRPr lang="en-US" sz="1500"/>
+          </a:p>
+          <a:p>
+            <a:pPr marL="0" indent="0">
+              <a:lnSpc>
+                <a:spcPts val="1950"/>
+              </a:lnSpc>
+              <a:spcAft>
+                <a:spcPts val="0"/>
+              </a:spcAft>
+              <a:buNone/>
+            </a:pPr>
+            <a:r>
+              <a:rPr lang="en-US" sz="1500" b="0">
+                <a:solidFill>
+                  <a:srgbClr val="202B33"/>
+                </a:solidFill>
+                <a:latin typeface="Arial"/>
+                <a:ea typeface="Arial"/>
+                <a:cs typeface="Arial"/>
+              </a:rPr>
+              <a:t xml:space="preserve">Holmstrom (1979), Moral Hazard and</a:t>
+            </a:r>
+            <a:endParaRPr lang="en-US" sz="1500"/>
+          </a:p>
+          <a:p>
+            <a:pPr marL="0" indent="0">
+              <a:lnSpc>
+                <a:spcPts val="1950"/>
+              </a:lnSpc>
+              <a:spcAft>
+                <a:spcPts val="0"/>
+              </a:spcAft>
+              <a:buNone/>
+            </a:pPr>
+            <a:r>
+              <a:rPr lang="en-US" sz="1500" b="0">
+                <a:solidFill>
+                  <a:srgbClr val="202B33"/>
+                </a:solidFill>
+                <a:latin typeface="Arial"/>
+                <a:ea typeface="Arial"/>
+                <a:cs typeface="Arial"/>
+              </a:rPr>
+              <a:t xml:space="preserve">Observability, Bell Journal of Economics</a:t>
+            </a:r>
+            <a:endParaRPr lang="en-US" sz="1500"/>
+          </a:p>
+          <a:p>
+            <a:pPr marL="0" indent="0">
+              <a:lnSpc>
+                <a:spcPts val="1950"/>
+              </a:lnSpc>
+              <a:spcAft>
+                <a:spcPts val="0"/>
+              </a:spcAft>
+              <a:buNone/>
+            </a:pPr>
+            <a:r>
+              <a:rPr lang="en-US" sz="1500" b="0">
+                <a:solidFill>
+                  <a:srgbClr val="202B33"/>
+                </a:solidFill>
+                <a:latin typeface="Arial"/>
+                <a:ea typeface="Arial"/>
+                <a:cs typeface="Arial"/>
+              </a:rPr>
+              <a:t xml:space="preserve">10(1), 74 to 91. Nobel 2016.</a:t>
             </a:r>
             <a:endParaRPr lang="en-US" sz="1500"/>
           </a:p>
@@ -13862,1023 +13587,6 @@
                 <a:cs typeface="Arial"/>
               </a:rPr>
               <a:t xml:space="preserve">15</a:t>
-            </a:r>
-            <a:endParaRPr lang="en-US" sz="975"/>
-          </a:p>
-        </p:txBody>
-      </p:sp>
-    </p:spTree>
-  </p:cSld>
-  <p:clrMapOvr>
-    <a:masterClrMapping/>
-  </p:clrMapOvr>
-</p:sld>
-</file>
-
-<file path=ppt/slides/slide16.xml><?xml version="1.0" encoding="utf-8"?>
-<p:sld xmlns:a="http://schemas.openxmlformats.org/drawingml/2006/main" xmlns:r="http://schemas.openxmlformats.org/officeDocument/2006/relationships" xmlns:p="http://schemas.openxmlformats.org/presentationml/2006/main">
-  <p:cSld name="Slide 16">
-    <p:bg>
-      <p:bgPr>
-        <a:solidFill>
-          <a:srgbClr val="FAFAF7"/>
-        </a:solidFill>
-        <a:effectLst/>
-      </p:bgPr>
-    </p:bg>
-    <p:spTree>
-      <p:nvGrpSpPr>
-        <p:cNvPr id="1" name=""/>
-        <p:cNvGrpSpPr/>
-        <p:nvPr/>
-      </p:nvGrpSpPr>
-      <p:grpSpPr>
-        <a:xfrm>
-          <a:off x="0" y="0"/>
-          <a:ext cx="0" cy="0"/>
-          <a:chOff x="0" y="0"/>
-          <a:chExt cx="0" cy="0"/>
-        </a:xfrm>
-      </p:grpSpPr>
-      <p:sp>
-        <p:nvSpPr>
-          <p:cNvPr id="2" name="Text 2"/>
-          <p:cNvSpPr txBox="1"/>
-          <p:nvPr/>
-        </p:nvSpPr>
-        <p:spPr>
-          <a:xfrm>
-            <a:off x="457200" y="266700"/>
-            <a:ext cx="9144000" cy="228600"/>
-          </a:xfrm>
-          <a:prstGeom prst="rect">
-            <a:avLst/>
-          </a:prstGeom>
-          <a:noFill/>
-          <a:ln>
-            <a:noFill/>
-          </a:ln>
-        </p:spPr>
-        <p:txBody>
-          <a:bodyPr wrap="none" lIns="0" tIns="0" rIns="0" bIns="0" anchor="t">
-            <a:noAutofit/>
-          </a:bodyPr>
-          <a:lstStyle/>
-          <a:p>
-            <a:pPr marL="0" indent="0">
-              <a:lnSpc>
-                <a:spcPts val="1365"/>
-              </a:lnSpc>
-              <a:spcAft>
-                <a:spcPts val="0"/>
-              </a:spcAft>
-              <a:buNone/>
-            </a:pPr>
-            <a:r>
-              <a:rPr lang="en-US" sz="1050" b="1">
-                <a:solidFill>
-                  <a:srgbClr val="246957"/>
-                </a:solidFill>
-                <a:latin typeface="Arial"/>
-                <a:ea typeface="Arial"/>
-                <a:cs typeface="Arial"/>
-              </a:rPr>
-              <a:t xml:space="preserve">SOURCE REFERENCES</a:t>
-            </a:r>
-            <a:endParaRPr lang="en-US" sz="1050"/>
-          </a:p>
-        </p:txBody>
-      </p:sp>
-      <p:sp>
-        <p:nvSpPr>
-          <p:cNvPr id="3" name="Text 3"/>
-          <p:cNvSpPr txBox="1"/>
-          <p:nvPr/>
-        </p:nvSpPr>
-        <p:spPr>
-          <a:xfrm>
-            <a:off x="457200" y="657225"/>
-            <a:ext cx="9144000" cy="1104900"/>
-          </a:xfrm>
-          <a:prstGeom prst="rect">
-            <a:avLst/>
-          </a:prstGeom>
-          <a:noFill/>
-          <a:ln>
-            <a:noFill/>
-          </a:ln>
-        </p:spPr>
-        <p:txBody>
-          <a:bodyPr wrap="none" lIns="0" tIns="0" rIns="0" bIns="0" anchor="t">
-            <a:noAutofit/>
-          </a:bodyPr>
-          <a:lstStyle/>
-          <a:p>
-            <a:pPr marL="0" indent="0">
-              <a:lnSpc>
-                <a:spcPts val="3060"/>
-              </a:lnSpc>
-              <a:spcAft>
-                <a:spcPts val="0"/>
-              </a:spcAft>
-              <a:buNone/>
-            </a:pPr>
-            <a:r>
-              <a:rPr lang="en-US" sz="2550" b="1">
-                <a:solidFill>
-                  <a:srgbClr val="202B33"/>
-                </a:solidFill>
-                <a:latin typeface="Arial"/>
-                <a:ea typeface="Arial"/>
-                <a:cs typeface="Arial"/>
-              </a:rPr>
-              <a:t xml:space="preserve">References</a:t>
-            </a:r>
-            <a:endParaRPr lang="en-US" sz="2550"/>
-          </a:p>
-        </p:txBody>
-      </p:sp>
-      <p:sp>
-        <p:nvSpPr>
-          <p:cNvPr id="4" name="Text 4"/>
-          <p:cNvSpPr txBox="1"/>
-          <p:nvPr/>
-        </p:nvSpPr>
-        <p:spPr>
-          <a:xfrm>
-            <a:off x="457200" y="1971675"/>
-            <a:ext cx="4352925" cy="5314950"/>
-          </a:xfrm>
-          <a:prstGeom prst="rect">
-            <a:avLst/>
-          </a:prstGeom>
-          <a:noFill/>
-          <a:ln>
-            <a:noFill/>
-          </a:ln>
-        </p:spPr>
-        <p:txBody>
-          <a:bodyPr wrap="none" lIns="0" tIns="0" rIns="0" bIns="0" anchor="t">
-            <a:noAutofit/>
-          </a:bodyPr>
-          <a:lstStyle/>
-          <a:p>
-            <a:pPr marL="0" indent="0">
-              <a:lnSpc>
-                <a:spcPts val="1950"/>
-              </a:lnSpc>
-              <a:spcAft>
-                <a:spcPts val="0"/>
-              </a:spcAft>
-              <a:buNone/>
-            </a:pPr>
-            <a:r>
-              <a:rPr lang="en-US" sz="1500" b="0">
-                <a:solidFill>
-                  <a:srgbClr val="202B33"/>
-                </a:solidFill>
-                <a:latin typeface="Arial"/>
-                <a:ea typeface="Arial"/>
-                <a:cs typeface="Arial"/>
-              </a:rPr>
-              <a:t xml:space="preserve">Brooke Group Ltd. v. Brown &amp; Williamson</a:t>
-            </a:r>
-            <a:endParaRPr lang="en-US" sz="1500"/>
-          </a:p>
-          <a:p>
-            <a:pPr marL="0" indent="0">
-              <a:lnSpc>
-                <a:spcPts val="1950"/>
-              </a:lnSpc>
-              <a:spcAft>
-                <a:spcPts val="0"/>
-              </a:spcAft>
-              <a:buNone/>
-            </a:pPr>
-            <a:r>
-              <a:rPr lang="en-US" sz="1500" b="0">
-                <a:solidFill>
-                  <a:srgbClr val="202B33"/>
-                </a:solidFill>
-                <a:latin typeface="Arial"/>
-                <a:ea typeface="Arial"/>
-                <a:cs typeface="Arial"/>
-              </a:rPr>
-              <a:t xml:space="preserve">Tobacco Corp., 509 U.S. 209 (1993), on the</a:t>
-            </a:r>
-            <a:endParaRPr lang="en-US" sz="1500"/>
-          </a:p>
-          <a:p>
-            <a:pPr marL="0" indent="0">
-              <a:lnSpc>
-                <a:spcPts val="1950"/>
-              </a:lnSpc>
-              <a:spcAft>
-                <a:spcPts val="0"/>
-              </a:spcAft>
-              <a:buNone/>
-            </a:pPr>
-            <a:r>
-              <a:rPr lang="en-US" sz="1500" b="0">
-                <a:solidFill>
-                  <a:srgbClr val="202B33"/>
-                </a:solidFill>
-                <a:latin typeface="Arial"/>
-                <a:ea typeface="Arial"/>
-                <a:cs typeface="Arial"/>
-              </a:rPr>
-              <a:t xml:space="preserve">recoupment requirement in predatory-pricing</a:t>
-            </a:r>
-            <a:endParaRPr lang="en-US" sz="1500"/>
-          </a:p>
-          <a:p>
-            <a:pPr marL="0" indent="0">
-              <a:lnSpc>
-                <a:spcPts val="1950"/>
-              </a:lnSpc>
-              <a:spcAft>
-                <a:spcPts val="0"/>
-              </a:spcAft>
-              <a:buNone/>
-            </a:pPr>
-            <a:r>
-              <a:rPr lang="en-US" sz="1500" b="0">
-                <a:solidFill>
-                  <a:srgbClr val="202B33"/>
-                </a:solidFill>
-                <a:latin typeface="Arial"/>
-                <a:ea typeface="Arial"/>
-                <a:cs typeface="Arial"/>
-              </a:rPr>
-              <a:t xml:space="preserve">claims.</a:t>
-            </a:r>
-            <a:endParaRPr lang="en-US" sz="1500"/>
-          </a:p>
-          <a:p>
-            <a:pPr marL="0" indent="0">
-              <a:lnSpc>
-                <a:spcPts val="1950"/>
-              </a:lnSpc>
-              <a:spcAft>
-                <a:spcPts val="0"/>
-              </a:spcAft>
-              <a:buNone/>
-            </a:pPr>
-            <a:r>
-              <a:rPr lang="en-US" sz="1500" b="0">
-                <a:solidFill>
-                  <a:srgbClr val="202B33"/>
-                </a:solidFill>
-                <a:latin typeface="Arial"/>
-                <a:ea typeface="Arial"/>
-                <a:cs typeface="Arial"/>
-              </a:rPr>
-              <a:t xml:space="preserve"/>
-            </a:r>
-            <a:endParaRPr lang="en-US" sz="1500"/>
-          </a:p>
-          <a:p>
-            <a:pPr marL="0" indent="0">
-              <a:lnSpc>
-                <a:spcPts val="1950"/>
-              </a:lnSpc>
-              <a:spcAft>
-                <a:spcPts val="0"/>
-              </a:spcAft>
-              <a:buNone/>
-            </a:pPr>
-            <a:r>
-              <a:rPr lang="en-US" sz="1500" b="0">
-                <a:solidFill>
-                  <a:srgbClr val="202B33"/>
-                </a:solidFill>
-                <a:latin typeface="Arial"/>
-                <a:ea typeface="Arial"/>
-                <a:cs typeface="Arial"/>
-              </a:rPr>
-              <a:t xml:space="preserve">Rochet and Tirole (2003), Platform</a:t>
-            </a:r>
-            <a:endParaRPr lang="en-US" sz="1500"/>
-          </a:p>
-          <a:p>
-            <a:pPr marL="0" indent="0">
-              <a:lnSpc>
-                <a:spcPts val="1950"/>
-              </a:lnSpc>
-              <a:spcAft>
-                <a:spcPts val="0"/>
-              </a:spcAft>
-              <a:buNone/>
-            </a:pPr>
-            <a:r>
-              <a:rPr lang="en-US" sz="1500" b="0">
-                <a:solidFill>
-                  <a:srgbClr val="202B33"/>
-                </a:solidFill>
-                <a:latin typeface="Arial"/>
-                <a:ea typeface="Arial"/>
-                <a:cs typeface="Arial"/>
-              </a:rPr>
-              <a:t xml:space="preserve">Competition in Two-Sided Markets, Journal</a:t>
-            </a:r>
-            <a:endParaRPr lang="en-US" sz="1500"/>
-          </a:p>
-          <a:p>
-            <a:pPr marL="0" indent="0">
-              <a:lnSpc>
-                <a:spcPts val="1950"/>
-              </a:lnSpc>
-              <a:spcAft>
-                <a:spcPts val="0"/>
-              </a:spcAft>
-              <a:buNone/>
-            </a:pPr>
-            <a:r>
-              <a:rPr lang="en-US" sz="1500" b="0">
-                <a:solidFill>
-                  <a:srgbClr val="202B33"/>
-                </a:solidFill>
-                <a:latin typeface="Arial"/>
-                <a:ea typeface="Arial"/>
-                <a:cs typeface="Arial"/>
-              </a:rPr>
-              <a:t xml:space="preserve">of the European Economic Association, on</a:t>
-            </a:r>
-            <a:endParaRPr lang="en-US" sz="1500"/>
-          </a:p>
-          <a:p>
-            <a:pPr marL="0" indent="0">
-              <a:lnSpc>
-                <a:spcPts val="1950"/>
-              </a:lnSpc>
-              <a:spcAft>
-                <a:spcPts val="0"/>
-              </a:spcAft>
-              <a:buNone/>
-            </a:pPr>
-            <a:r>
-              <a:rPr lang="en-US" sz="1500" b="0">
-                <a:solidFill>
-                  <a:srgbClr val="202B33"/>
-                </a:solidFill>
-                <a:latin typeface="Arial"/>
-                <a:ea typeface="Arial"/>
-                <a:cs typeface="Arial"/>
-              </a:rPr>
-              <a:t xml:space="preserve">cross-subsidy between sides of a market.</a:t>
-            </a:r>
-            <a:endParaRPr lang="en-US" sz="1500"/>
-          </a:p>
-          <a:p>
-            <a:pPr marL="0" indent="0">
-              <a:lnSpc>
-                <a:spcPts val="1950"/>
-              </a:lnSpc>
-              <a:spcAft>
-                <a:spcPts val="0"/>
-              </a:spcAft>
-              <a:buNone/>
-            </a:pPr>
-            <a:r>
-              <a:rPr lang="en-US" sz="1500" b="0">
-                <a:solidFill>
-                  <a:srgbClr val="202B33"/>
-                </a:solidFill>
-                <a:latin typeface="Arial"/>
-                <a:ea typeface="Arial"/>
-                <a:cs typeface="Arial"/>
-              </a:rPr>
-              <a:t xml:space="preserve"/>
-            </a:r>
-            <a:endParaRPr lang="en-US" sz="1500"/>
-          </a:p>
-          <a:p>
-            <a:pPr marL="0" indent="0">
-              <a:lnSpc>
-                <a:spcPts val="1950"/>
-              </a:lnSpc>
-              <a:spcAft>
-                <a:spcPts val="0"/>
-              </a:spcAft>
-              <a:buNone/>
-            </a:pPr>
-            <a:r>
-              <a:rPr lang="en-US" sz="1500" b="0">
-                <a:solidFill>
-                  <a:srgbClr val="202B33"/>
-                </a:solidFill>
-                <a:latin typeface="Arial"/>
-                <a:ea typeface="Arial"/>
-                <a:cs typeface="Arial"/>
-              </a:rPr>
-              <a:t xml:space="preserve">Shoup (2005, updated 2011), The High Cost</a:t>
-            </a:r>
-            <a:endParaRPr lang="en-US" sz="1500"/>
-          </a:p>
-          <a:p>
-            <a:pPr marL="0" indent="0">
-              <a:lnSpc>
-                <a:spcPts val="1950"/>
-              </a:lnSpc>
-              <a:spcAft>
-                <a:spcPts val="0"/>
-              </a:spcAft>
-              <a:buNone/>
-            </a:pPr>
-            <a:r>
-              <a:rPr lang="en-US" sz="1500" b="0">
-                <a:solidFill>
-                  <a:srgbClr val="202B33"/>
-                </a:solidFill>
-                <a:latin typeface="Arial"/>
-                <a:ea typeface="Arial"/>
-                <a:cs typeface="Arial"/>
-              </a:rPr>
-              <a:t xml:space="preserve">of Free Parking, American Planning</a:t>
-            </a:r>
-            <a:endParaRPr lang="en-US" sz="1500"/>
-          </a:p>
-          <a:p>
-            <a:pPr marL="0" indent="0">
-              <a:lnSpc>
-                <a:spcPts val="1950"/>
-              </a:lnSpc>
-              <a:spcAft>
-                <a:spcPts val="0"/>
-              </a:spcAft>
-              <a:buNone/>
-            </a:pPr>
-            <a:r>
-              <a:rPr lang="en-US" sz="1500" b="0">
-                <a:solidFill>
-                  <a:srgbClr val="202B33"/>
-                </a:solidFill>
-                <a:latin typeface="Arial"/>
-                <a:ea typeface="Arial"/>
-                <a:cs typeface="Arial"/>
-              </a:rPr>
-              <a:t xml:space="preserve">Association. Also Shoup (2011), Free</a:t>
-            </a:r>
-            <a:endParaRPr lang="en-US" sz="1500"/>
-          </a:p>
-          <a:p>
-            <a:pPr marL="0" indent="0">
-              <a:lnSpc>
-                <a:spcPts val="1950"/>
-              </a:lnSpc>
-              <a:spcAft>
-                <a:spcPts val="0"/>
-              </a:spcAft>
-              <a:buNone/>
-            </a:pPr>
-            <a:r>
-              <a:rPr lang="en-US" sz="1500" b="0">
-                <a:solidFill>
-                  <a:srgbClr val="202B33"/>
-                </a:solidFill>
-                <a:latin typeface="Arial"/>
-                <a:ea typeface="Arial"/>
-                <a:cs typeface="Arial"/>
-              </a:rPr>
-              <a:t xml:space="preserve">parking or free markets —</a:t>
-            </a:r>
-            <a:endParaRPr lang="en-US" sz="1500"/>
-          </a:p>
-          <a:p>
-            <a:pPr marL="0" indent="0">
-              <a:lnSpc>
-                <a:spcPts val="1950"/>
-              </a:lnSpc>
-              <a:spcAft>
-                <a:spcPts val="0"/>
-              </a:spcAft>
-              <a:buNone/>
-            </a:pPr>
-            <a:r>
-              <a:rPr lang="en-US" sz="1500" b="0">
-                <a:solidFill>
-                  <a:srgbClr val="202B33"/>
-                </a:solidFill>
-                <a:latin typeface="Arial"/>
-                <a:ea typeface="Arial"/>
-                <a:cs typeface="Arial"/>
-              </a:rPr>
-              <a:t xml:space="preserve">https://www.accessmagazine.org/spring-2011/free-parking-free-markets/,</a:t>
-            </a:r>
-            <a:endParaRPr lang="en-US" sz="1500"/>
-          </a:p>
-          <a:p>
-            <a:pPr marL="0" indent="0">
-              <a:lnSpc>
-                <a:spcPts val="1950"/>
-              </a:lnSpc>
-              <a:spcAft>
-                <a:spcPts val="0"/>
-              </a:spcAft>
-              <a:buNone/>
-            </a:pPr>
-            <a:r>
-              <a:rPr lang="en-US" sz="1500" b="0">
-                <a:solidFill>
-                  <a:srgbClr val="202B33"/>
-                </a:solidFill>
-                <a:latin typeface="Arial"/>
-                <a:ea typeface="Arial"/>
-                <a:cs typeface="Arial"/>
-              </a:rPr>
-              <a:t xml:space="preserve">ACCESS Magazine.</a:t>
-            </a:r>
-            <a:endParaRPr lang="en-US" sz="1500"/>
-          </a:p>
-        </p:txBody>
-      </p:sp>
-      <p:sp>
-        <p:nvSpPr>
-          <p:cNvPr id="5" name="Text 5"/>
-          <p:cNvSpPr txBox="1"/>
-          <p:nvPr/>
-        </p:nvSpPr>
-        <p:spPr>
-          <a:xfrm>
-            <a:off x="5238750" y="1971675"/>
-            <a:ext cx="4362450" cy="5314950"/>
-          </a:xfrm>
-          <a:prstGeom prst="rect">
-            <a:avLst/>
-          </a:prstGeom>
-          <a:noFill/>
-          <a:ln>
-            <a:noFill/>
-          </a:ln>
-        </p:spPr>
-        <p:txBody>
-          <a:bodyPr wrap="none" lIns="0" tIns="0" rIns="0" bIns="0" anchor="t">
-            <a:noAutofit/>
-          </a:bodyPr>
-          <a:lstStyle/>
-          <a:p>
-            <a:pPr marL="0" indent="0">
-              <a:lnSpc>
-                <a:spcPts val="1950"/>
-              </a:lnSpc>
-              <a:spcAft>
-                <a:spcPts val="0"/>
-              </a:spcAft>
-              <a:buNone/>
-            </a:pPr>
-            <a:r>
-              <a:rPr lang="en-US" sz="1500" b="0">
-                <a:solidFill>
-                  <a:srgbClr val="202B33"/>
-                </a:solidFill>
-                <a:latin typeface="Arial"/>
-                <a:ea typeface="Arial"/>
-                <a:cs typeface="Arial"/>
-              </a:rPr>
-              <a:t xml:space="preserve"/>
-            </a:r>
-            <a:endParaRPr lang="en-US" sz="1500"/>
-          </a:p>
-          <a:p>
-            <a:pPr marL="0" indent="0">
-              <a:lnSpc>
-                <a:spcPts val="1950"/>
-              </a:lnSpc>
-              <a:spcAft>
-                <a:spcPts val="0"/>
-              </a:spcAft>
-              <a:buNone/>
-            </a:pPr>
-            <a:r>
-              <a:rPr lang="en-US" sz="1500" b="0">
-                <a:solidFill>
-                  <a:srgbClr val="202B33"/>
-                </a:solidFill>
-                <a:latin typeface="Arial"/>
-                <a:ea typeface="Arial"/>
-                <a:cs typeface="Arial"/>
-              </a:rPr>
-              <a:t xml:space="preserve">Jevons (1865), The Coal Question, chapter</a:t>
-            </a:r>
-            <a:endParaRPr lang="en-US" sz="1500"/>
-          </a:p>
-          <a:p>
-            <a:pPr marL="0" indent="0">
-              <a:lnSpc>
-                <a:spcPts val="1950"/>
-              </a:lnSpc>
-              <a:spcAft>
-                <a:spcPts val="0"/>
-              </a:spcAft>
-              <a:buNone/>
-            </a:pPr>
-            <a:r>
-              <a:rPr lang="en-US" sz="1500" b="0">
-                <a:solidFill>
-                  <a:srgbClr val="202B33"/>
-                </a:solidFill>
-                <a:latin typeface="Arial"/>
-                <a:ea typeface="Arial"/>
-                <a:cs typeface="Arial"/>
-              </a:rPr>
-              <a:t xml:space="preserve">VII. Duranton and Turner (2011), The</a:t>
-            </a:r>
-            <a:endParaRPr lang="en-US" sz="1500"/>
-          </a:p>
-          <a:p>
-            <a:pPr marL="0" indent="0">
-              <a:lnSpc>
-                <a:spcPts val="1950"/>
-              </a:lnSpc>
-              <a:spcAft>
-                <a:spcPts val="0"/>
-              </a:spcAft>
-              <a:buNone/>
-            </a:pPr>
-            <a:r>
-              <a:rPr lang="en-US" sz="1500" b="0">
-                <a:solidFill>
-                  <a:srgbClr val="202B33"/>
-                </a:solidFill>
-                <a:latin typeface="Arial"/>
-                <a:ea typeface="Arial"/>
-                <a:cs typeface="Arial"/>
-              </a:rPr>
-              <a:t xml:space="preserve">Fundamental Law of Road Congestion,</a:t>
-            </a:r>
-            <a:endParaRPr lang="en-US" sz="1500"/>
-          </a:p>
-          <a:p>
-            <a:pPr marL="0" indent="0">
-              <a:lnSpc>
-                <a:spcPts val="1950"/>
-              </a:lnSpc>
-              <a:spcAft>
-                <a:spcPts val="0"/>
-              </a:spcAft>
-              <a:buNone/>
-            </a:pPr>
-            <a:r>
-              <a:rPr lang="en-US" sz="1500" b="0">
-                <a:solidFill>
-                  <a:srgbClr val="202B33"/>
-                </a:solidFill>
-                <a:latin typeface="Arial"/>
-                <a:ea typeface="Arial"/>
-                <a:cs typeface="Arial"/>
-              </a:rPr>
-              <a:t xml:space="preserve">American Economic Review 101(6).</a:t>
-            </a:r>
-            <a:endParaRPr lang="en-US" sz="1500"/>
-          </a:p>
-          <a:p>
-            <a:pPr marL="0" indent="0">
-              <a:lnSpc>
-                <a:spcPts val="1950"/>
-              </a:lnSpc>
-              <a:spcAft>
-                <a:spcPts val="0"/>
-              </a:spcAft>
-              <a:buNone/>
-            </a:pPr>
-            <a:r>
-              <a:rPr lang="en-US" sz="1500" b="0">
-                <a:solidFill>
-                  <a:srgbClr val="202B33"/>
-                </a:solidFill>
-                <a:latin typeface="Arial"/>
-                <a:ea typeface="Arial"/>
-                <a:cs typeface="Arial"/>
-              </a:rPr>
-              <a:t xml:space="preserve"/>
-            </a:r>
-            <a:endParaRPr lang="en-US" sz="1500"/>
-          </a:p>
-          <a:p>
-            <a:pPr marL="0" indent="0">
-              <a:lnSpc>
-                <a:spcPts val="1950"/>
-              </a:lnSpc>
-              <a:spcAft>
-                <a:spcPts val="0"/>
-              </a:spcAft>
-              <a:buNone/>
-            </a:pPr>
-            <a:r>
-              <a:rPr lang="en-US" sz="1500" b="0">
-                <a:solidFill>
-                  <a:srgbClr val="202B33"/>
-                </a:solidFill>
-                <a:latin typeface="Arial"/>
-                <a:ea typeface="Arial"/>
-                <a:cs typeface="Arial"/>
-              </a:rPr>
-              <a:t xml:space="preserve">Cottier, Snodin, Owen, Adamczewski (Epoch</a:t>
-            </a:r>
-            <a:endParaRPr lang="en-US" sz="1500"/>
-          </a:p>
-          <a:p>
-            <a:pPr marL="0" indent="0">
-              <a:lnSpc>
-                <a:spcPts val="1950"/>
-              </a:lnSpc>
-              <a:spcAft>
-                <a:spcPts val="0"/>
-              </a:spcAft>
-              <a:buNone/>
-            </a:pPr>
-            <a:r>
-              <a:rPr lang="en-US" sz="1500" b="0">
-                <a:solidFill>
-                  <a:srgbClr val="202B33"/>
-                </a:solidFill>
-                <a:latin typeface="Arial"/>
-                <a:ea typeface="Arial"/>
-                <a:cs typeface="Arial"/>
-              </a:rPr>
-              <a:t xml:space="preserve">AI, March 2025), LLM inference prices have</a:t>
-            </a:r>
-            <a:endParaRPr lang="en-US" sz="1500"/>
-          </a:p>
-          <a:p>
-            <a:pPr marL="0" indent="0">
-              <a:lnSpc>
-                <a:spcPts val="1950"/>
-              </a:lnSpc>
-              <a:spcAft>
-                <a:spcPts val="0"/>
-              </a:spcAft>
-              <a:buNone/>
-            </a:pPr>
-            <a:r>
-              <a:rPr lang="en-US" sz="1500" b="0">
-                <a:solidFill>
-                  <a:srgbClr val="202B33"/>
-                </a:solidFill>
-                <a:latin typeface="Arial"/>
-                <a:ea typeface="Arial"/>
-                <a:cs typeface="Arial"/>
-              </a:rPr>
-              <a:t xml:space="preserve">fallen rapidly but unequally across tasks —</a:t>
-            </a:r>
-            <a:endParaRPr lang="en-US" sz="1500"/>
-          </a:p>
-          <a:p>
-            <a:pPr marL="0" indent="0">
-              <a:lnSpc>
-                <a:spcPts val="1950"/>
-              </a:lnSpc>
-              <a:spcAft>
-                <a:spcPts val="0"/>
-              </a:spcAft>
-              <a:buNone/>
-            </a:pPr>
-            <a:r>
-              <a:rPr lang="en-US" sz="1500" b="0">
-                <a:solidFill>
-                  <a:srgbClr val="202B33"/>
-                </a:solidFill>
-                <a:latin typeface="Arial"/>
-                <a:ea typeface="Arial"/>
-                <a:cs typeface="Arial"/>
-              </a:rPr>
-              <a:t xml:space="preserve">https://epoch.ai/data-insights/llm-inference-price-trends.</a:t>
-            </a:r>
-            <a:endParaRPr lang="en-US" sz="1500"/>
-          </a:p>
-          <a:p>
-            <a:pPr marL="0" indent="0">
-              <a:lnSpc>
-                <a:spcPts val="1950"/>
-              </a:lnSpc>
-              <a:spcAft>
-                <a:spcPts val="0"/>
-              </a:spcAft>
-              <a:buNone/>
-            </a:pPr>
-            <a:r>
-              <a:rPr lang="en-US" sz="1500" b="0">
-                <a:solidFill>
-                  <a:srgbClr val="202B33"/>
-                </a:solidFill>
-                <a:latin typeface="Arial"/>
-                <a:ea typeface="Arial"/>
-                <a:cs typeface="Arial"/>
-              </a:rPr>
-              <a:t xml:space="preserve">Check for a newer edition before each</a:t>
-            </a:r>
-            <a:endParaRPr lang="en-US" sz="1500"/>
-          </a:p>
-          <a:p>
-            <a:pPr marL="0" indent="0">
-              <a:lnSpc>
-                <a:spcPts val="1950"/>
-              </a:lnSpc>
-              <a:spcAft>
-                <a:spcPts val="0"/>
-              </a:spcAft>
-              <a:buNone/>
-            </a:pPr>
-            <a:r>
-              <a:rPr lang="en-US" sz="1500" b="0">
-                <a:solidFill>
-                  <a:srgbClr val="202B33"/>
-                </a:solidFill>
-                <a:latin typeface="Arial"/>
-                <a:ea typeface="Arial"/>
-                <a:cs typeface="Arial"/>
-              </a:rPr>
-              <a:t xml:space="preserve">delivery.</a:t>
-            </a:r>
-            <a:endParaRPr lang="en-US" sz="1500"/>
-          </a:p>
-          <a:p>
-            <a:pPr marL="0" indent="0">
-              <a:lnSpc>
-                <a:spcPts val="1950"/>
-              </a:lnSpc>
-              <a:spcAft>
-                <a:spcPts val="0"/>
-              </a:spcAft>
-              <a:buNone/>
-            </a:pPr>
-            <a:r>
-              <a:rPr lang="en-US" sz="1500" b="0">
-                <a:solidFill>
-                  <a:srgbClr val="202B33"/>
-                </a:solidFill>
-                <a:latin typeface="Arial"/>
-                <a:ea typeface="Arial"/>
-                <a:cs typeface="Arial"/>
-              </a:rPr>
-              <a:t xml:space="preserve"/>
-            </a:r>
-            <a:endParaRPr lang="en-US" sz="1500"/>
-          </a:p>
-          <a:p>
-            <a:pPr marL="0" indent="0">
-              <a:lnSpc>
-                <a:spcPts val="1950"/>
-              </a:lnSpc>
-              <a:spcAft>
-                <a:spcPts val="0"/>
-              </a:spcAft>
-              <a:buNone/>
-            </a:pPr>
-            <a:r>
-              <a:rPr lang="en-US" sz="1500" b="0">
-                <a:solidFill>
-                  <a:srgbClr val="202B33"/>
-                </a:solidFill>
-                <a:latin typeface="Arial"/>
-                <a:ea typeface="Arial"/>
-                <a:cs typeface="Arial"/>
-              </a:rPr>
-              <a:t xml:space="preserve">Holmstrom (1979), Moral Hazard and</a:t>
-            </a:r>
-            <a:endParaRPr lang="en-US" sz="1500"/>
-          </a:p>
-          <a:p>
-            <a:pPr marL="0" indent="0">
-              <a:lnSpc>
-                <a:spcPts val="1950"/>
-              </a:lnSpc>
-              <a:spcAft>
-                <a:spcPts val="0"/>
-              </a:spcAft>
-              <a:buNone/>
-            </a:pPr>
-            <a:r>
-              <a:rPr lang="en-US" sz="1500" b="0">
-                <a:solidFill>
-                  <a:srgbClr val="202B33"/>
-                </a:solidFill>
-                <a:latin typeface="Arial"/>
-                <a:ea typeface="Arial"/>
-                <a:cs typeface="Arial"/>
-              </a:rPr>
-              <a:t xml:space="preserve">Observability, Bell Journal of Economics</a:t>
-            </a:r>
-            <a:endParaRPr lang="en-US" sz="1500"/>
-          </a:p>
-          <a:p>
-            <a:pPr marL="0" indent="0">
-              <a:lnSpc>
-                <a:spcPts val="1950"/>
-              </a:lnSpc>
-              <a:spcAft>
-                <a:spcPts val="0"/>
-              </a:spcAft>
-              <a:buNone/>
-            </a:pPr>
-            <a:r>
-              <a:rPr lang="en-US" sz="1500" b="0">
-                <a:solidFill>
-                  <a:srgbClr val="202B33"/>
-                </a:solidFill>
-                <a:latin typeface="Arial"/>
-                <a:ea typeface="Arial"/>
-                <a:cs typeface="Arial"/>
-              </a:rPr>
-              <a:t xml:space="preserve">10(1), 74 to 91. Nobel 2016.</a:t>
-            </a:r>
-            <a:endParaRPr lang="en-US" sz="1500"/>
-          </a:p>
-        </p:txBody>
-      </p:sp>
-      <p:sp>
-        <p:nvSpPr>
-          <p:cNvPr id="6" name="Text 6"/>
-          <p:cNvSpPr txBox="1"/>
-          <p:nvPr/>
-        </p:nvSpPr>
-        <p:spPr>
-          <a:xfrm>
-            <a:off x="457200" y="7486650"/>
-            <a:ext cx="8820150" cy="190500"/>
-          </a:xfrm>
-          <a:prstGeom prst="rect">
-            <a:avLst/>
-          </a:prstGeom>
-          <a:noFill/>
-          <a:ln>
-            <a:noFill/>
-          </a:ln>
-        </p:spPr>
-        <p:txBody>
-          <a:bodyPr wrap="none" lIns="0" tIns="0" rIns="0" bIns="0" anchor="t">
-            <a:noAutofit/>
-          </a:bodyPr>
-          <a:lstStyle/>
-          <a:p>
-            <a:pPr marL="0" indent="0">
-              <a:lnSpc>
-                <a:spcPts val="1268"/>
-              </a:lnSpc>
-              <a:spcAft>
-                <a:spcPts val="0"/>
-              </a:spcAft>
-              <a:buNone/>
-            </a:pPr>
-            <a:r>
-              <a:rPr lang="en-US" sz="975" b="0">
-                <a:solidFill>
-                  <a:srgbClr val="48555B"/>
-                </a:solidFill>
-                <a:latin typeface="Arial"/>
-                <a:ea typeface="Arial"/>
-                <a:cs typeface="Arial"/>
-              </a:rPr>
-              <a:t xml:space="preserve">Buy Me a Free Tier</a:t>
-            </a:r>
-            <a:endParaRPr lang="en-US" sz="975"/>
-          </a:p>
-        </p:txBody>
-      </p:sp>
-      <p:sp>
-        <p:nvSpPr>
-          <p:cNvPr id="7" name="Text 7"/>
-          <p:cNvSpPr txBox="1"/>
-          <p:nvPr/>
-        </p:nvSpPr>
-        <p:spPr>
-          <a:xfrm>
-            <a:off x="9391650" y="7486650"/>
-            <a:ext cx="238125" cy="190500"/>
-          </a:xfrm>
-          <a:prstGeom prst="rect">
-            <a:avLst/>
-          </a:prstGeom>
-          <a:noFill/>
-          <a:ln>
-            <a:noFill/>
-          </a:ln>
-        </p:spPr>
-        <p:txBody>
-          <a:bodyPr wrap="none" lIns="0" tIns="0" rIns="0" bIns="0" anchor="t">
-            <a:noAutofit/>
-          </a:bodyPr>
-          <a:lstStyle/>
-          <a:p>
-            <a:pPr marL="0" indent="0">
-              <a:lnSpc>
-                <a:spcPts val="1268"/>
-              </a:lnSpc>
-              <a:spcAft>
-                <a:spcPts val="0"/>
-              </a:spcAft>
-              <a:buNone/>
-            </a:pPr>
-            <a:r>
-              <a:rPr lang="en-US" sz="975" b="0">
-                <a:solidFill>
-                  <a:srgbClr val="48555B"/>
-                </a:solidFill>
-                <a:latin typeface="Arial"/>
-                <a:ea typeface="Arial"/>
-                <a:cs typeface="Arial"/>
-              </a:rPr>
-              <a:t xml:space="preserve">16</a:t>
             </a:r>
             <a:endParaRPr lang="en-US" sz="975"/>
           </a:p>
@@ -19475,98 +18183,6 @@
             </a:r>
             <a:endParaRPr lang="en-US" sz="1500"/>
           </a:p>
-          <a:p>
-            <a:pPr marL="0" indent="0">
-              <a:lnSpc>
-                <a:spcPts val="1950"/>
-              </a:lnSpc>
-              <a:spcAft>
-                <a:spcPts val="0"/>
-              </a:spcAft>
-              <a:buNone/>
-            </a:pPr>
-            <a:r>
-              <a:rPr lang="en-US" sz="1500" b="0">
-                <a:solidFill>
-                  <a:srgbClr val="202B33"/>
-                </a:solidFill>
-                <a:latin typeface="Arial"/>
-                <a:ea typeface="Arial"/>
-                <a:cs typeface="Arial"/>
-              </a:rPr>
-              <a:t xml:space="preserve"/>
-            </a:r>
-            <a:endParaRPr lang="en-US" sz="1500"/>
-          </a:p>
-          <a:p>
-            <a:pPr marL="0" indent="0">
-              <a:lnSpc>
-                <a:spcPts val="1950"/>
-              </a:lnSpc>
-              <a:spcAft>
-                <a:spcPts val="0"/>
-              </a:spcAft>
-              <a:buNone/>
-            </a:pPr>
-            <a:r>
-              <a:rPr lang="en-US" sz="1500" b="0">
-                <a:solidFill>
-                  <a:srgbClr val="202B33"/>
-                </a:solidFill>
-                <a:latin typeface="Arial"/>
-                <a:ea typeface="Arial"/>
-                <a:cs typeface="Arial"/>
-              </a:rPr>
-              <a:t xml:space="preserve">The transport version is word three,</a:t>
-            </a:r>
-            <a:endParaRPr lang="en-US" sz="1500"/>
-          </a:p>
-          <a:p>
-            <a:pPr marL="0" indent="0">
-              <a:lnSpc>
-                <a:spcPts val="1950"/>
-              </a:lnSpc>
-              <a:spcAft>
-                <a:spcPts val="0"/>
-              </a:spcAft>
-              <a:buNone/>
-            </a:pPr>
-            <a:r>
-              <a:rPr lang="en-US" sz="1500" b="0">
-                <a:solidFill>
-                  <a:srgbClr val="202B33"/>
-                </a:solidFill>
-                <a:latin typeface="Arial"/>
-                <a:ea typeface="Arial"/>
-                <a:cs typeface="Arial"/>
-              </a:rPr>
-              <a:t xml:space="preserve">induced demand. Add a lane to a congested</a:t>
-            </a:r>
-            <a:endParaRPr lang="en-US" sz="1500"/>
-          </a:p>
-          <a:p>
-            <a:pPr marL="0" indent="0">
-              <a:lnSpc>
-                <a:spcPts val="1950"/>
-              </a:lnSpc>
-              <a:spcAft>
-                <a:spcPts val="0"/>
-              </a:spcAft>
-              <a:buNone/>
-            </a:pPr>
-            <a:r>
-              <a:rPr lang="en-US" sz="1500" b="0">
-                <a:solidFill>
-                  <a:srgbClr val="202B33"/>
-                </a:solidFill>
-                <a:latin typeface="Arial"/>
-                <a:ea typeface="Arial"/>
-                <a:cs typeface="Arial"/>
-              </a:rPr>
-              <a:t xml:space="preserve">highway and you get more traffic. Duranton</a:t>
-            </a:r>
-            <a:endParaRPr lang="en-US" sz="1500"/>
-          </a:p>
         </p:txBody>
       </p:sp>
       <p:sp>
@@ -19612,6 +18228,98 @@
                 <a:ea typeface="Arial"/>
                 <a:cs typeface="Arial"/>
               </a:rPr>
+              <a:t xml:space="preserve"/>
+            </a:r>
+            <a:endParaRPr lang="en-US" sz="1500"/>
+          </a:p>
+          <a:p>
+            <a:pPr marL="0" indent="0">
+              <a:lnSpc>
+                <a:spcPts val="1950"/>
+              </a:lnSpc>
+              <a:spcAft>
+                <a:spcPts val="0"/>
+              </a:spcAft>
+              <a:buNone/>
+            </a:pPr>
+            <a:r>
+              <a:rPr lang="en-US" sz="1500" b="0">
+                <a:solidFill>
+                  <a:srgbClr val="202B33"/>
+                </a:solidFill>
+                <a:latin typeface="Arial"/>
+                <a:ea typeface="Arial"/>
+                <a:cs typeface="Arial"/>
+              </a:rPr>
+              <a:t xml:space="preserve">The transport version is word three,</a:t>
+            </a:r>
+            <a:endParaRPr lang="en-US" sz="1500"/>
+          </a:p>
+          <a:p>
+            <a:pPr marL="0" indent="0">
+              <a:lnSpc>
+                <a:spcPts val="1950"/>
+              </a:lnSpc>
+              <a:spcAft>
+                <a:spcPts val="0"/>
+              </a:spcAft>
+              <a:buNone/>
+            </a:pPr>
+            <a:r>
+              <a:rPr lang="en-US" sz="1500" b="0">
+                <a:solidFill>
+                  <a:srgbClr val="202B33"/>
+                </a:solidFill>
+                <a:latin typeface="Arial"/>
+                <a:ea typeface="Arial"/>
+                <a:cs typeface="Arial"/>
+              </a:rPr>
+              <a:t xml:space="preserve">induced demand. Add a lane to a congested</a:t>
+            </a:r>
+            <a:endParaRPr lang="en-US" sz="1500"/>
+          </a:p>
+          <a:p>
+            <a:pPr marL="0" indent="0">
+              <a:lnSpc>
+                <a:spcPts val="1950"/>
+              </a:lnSpc>
+              <a:spcAft>
+                <a:spcPts val="0"/>
+              </a:spcAft>
+              <a:buNone/>
+            </a:pPr>
+            <a:r>
+              <a:rPr lang="en-US" sz="1500" b="0">
+                <a:solidFill>
+                  <a:srgbClr val="202B33"/>
+                </a:solidFill>
+                <a:latin typeface="Arial"/>
+                <a:ea typeface="Arial"/>
+                <a:cs typeface="Arial"/>
+              </a:rPr>
+              <a:t xml:space="preserve">highway and you get more traffic. Duranton</a:t>
+            </a:r>
+            <a:endParaRPr lang="en-US" sz="1500"/>
+          </a:p>
+          <a:p>
+            <a:pPr marL="0" indent="0">
+              <a:lnSpc>
+                <a:spcPts val="1950"/>
+              </a:lnSpc>
+              <a:spcAft>
+                <a:spcPts val="0"/>
+              </a:spcAft>
+              <a:buNone/>
+            </a:pPr>
+            <a:r>
+              <a:rPr lang="en-US" sz="1500" b="0">
+                <a:solidFill>
+                  <a:srgbClr val="202B33"/>
+                </a:solidFill>
+                <a:latin typeface="Arial"/>
+                <a:ea typeface="Arial"/>
+                <a:cs typeface="Arial"/>
+              </a:rPr>
               <a:t xml:space="preserve">and Turner measured it across US cities in</a:t>
             </a:r>
             <a:endParaRPr lang="en-US" sz="1500"/>
@@ -19773,306 +18481,99 @@
                 <a:ea typeface="Arial"/>
                 <a:cs typeface="Arial"/>
               </a:rPr>
-              <a:t xml:space="preserve">So: your per-token price has fallen off a</a:t>
-            </a:r>
-            <a:endParaRPr lang="en-US" sz="1500"/>
-          </a:p>
-          <a:p>
-            <a:pPr marL="0" indent="0">
-              <a:lnSpc>
-                <a:spcPts val="1950"/>
-              </a:lnSpc>
-              <a:spcAft>
-                <a:spcPts val="0"/>
-              </a:spcAft>
-              <a:buNone/>
-            </a:pPr>
-            <a:r>
-              <a:rPr lang="en-US" sz="1500" b="0">
-                <a:solidFill>
-                  <a:srgbClr val="202B33"/>
-                </a:solidFill>
-                <a:latin typeface="Arial"/>
-                <a:ea typeface="Arial"/>
-                <a:cs typeface="Arial"/>
-              </a:rPr>
-              <a:t xml:space="preserve">cliff over the last few years, and your</a:t>
-            </a:r>
-            <a:endParaRPr lang="en-US" sz="1500"/>
-          </a:p>
-          <a:p>
-            <a:pPr marL="0" indent="0">
-              <a:lnSpc>
-                <a:spcPts val="1950"/>
-              </a:lnSpc>
-              <a:spcAft>
-                <a:spcPts val="0"/>
-              </a:spcAft>
-              <a:buNone/>
-            </a:pPr>
-            <a:r>
-              <a:rPr lang="en-US" sz="1500" b="0">
-                <a:solidFill>
-                  <a:srgbClr val="202B33"/>
-                </a:solidFill>
-                <a:latin typeface="Arial"/>
-                <a:ea typeface="Arial"/>
-                <a:cs typeface="Arial"/>
-              </a:rPr>
-              <a:t xml:space="preserve">bill went up. Everyone in this room has had</a:t>
-            </a:r>
-            <a:endParaRPr lang="en-US" sz="1500"/>
-          </a:p>
-          <a:p>
-            <a:pPr marL="0" indent="0">
-              <a:lnSpc>
-                <a:spcPts val="1950"/>
-              </a:lnSpc>
-              <a:spcAft>
-                <a:spcPts val="0"/>
-              </a:spcAft>
-              <a:buNone/>
-            </a:pPr>
-            <a:r>
-              <a:rPr lang="en-US" sz="1500" b="0">
-                <a:solidFill>
-                  <a:srgbClr val="202B33"/>
-                </a:solidFill>
-                <a:latin typeface="Arial"/>
-                <a:ea typeface="Arial"/>
-                <a:cs typeface="Arial"/>
-              </a:rPr>
-              <a:t xml:space="preserve">that conversation with a CFO and lost it.</a:t>
-            </a:r>
-            <a:endParaRPr lang="en-US" sz="1500"/>
-          </a:p>
-          <a:p>
-            <a:pPr marL="0" indent="0">
-              <a:lnSpc>
-                <a:spcPts val="1950"/>
-              </a:lnSpc>
-              <a:spcAft>
-                <a:spcPts val="0"/>
-              </a:spcAft>
-              <a:buNone/>
-            </a:pPr>
-            <a:r>
-              <a:rPr lang="en-US" sz="1500" b="0">
-                <a:solidFill>
-                  <a:srgbClr val="202B33"/>
-                </a:solidFill>
-                <a:latin typeface="Arial"/>
-                <a:ea typeface="Arial"/>
-                <a:cs typeface="Arial"/>
-              </a:rPr>
-              <a:t xml:space="preserve">You are not being gouged and you did not do</a:t>
-            </a:r>
-            <a:endParaRPr lang="en-US" sz="1500"/>
-          </a:p>
-          <a:p>
-            <a:pPr marL="0" indent="0">
-              <a:lnSpc>
-                <a:spcPts val="1950"/>
-              </a:lnSpc>
-              <a:spcAft>
-                <a:spcPts val="0"/>
-              </a:spcAft>
-              <a:buNone/>
-            </a:pPr>
-            <a:r>
-              <a:rPr lang="en-US" sz="1500" b="0">
-                <a:solidFill>
-                  <a:srgbClr val="202B33"/>
-                </a:solidFill>
-                <a:latin typeface="Arial"/>
-                <a:ea typeface="Arial"/>
-                <a:cs typeface="Arial"/>
-              </a:rPr>
-              <a:t xml:space="preserve">anything wrong. Spend is price times</a:t>
-            </a:r>
-            <a:endParaRPr lang="en-US" sz="1500"/>
-          </a:p>
-          <a:p>
-            <a:pPr marL="0" indent="0">
-              <a:lnSpc>
-                <a:spcPts val="1950"/>
-              </a:lnSpc>
-              <a:spcAft>
-                <a:spcPts val="0"/>
-              </a:spcAft>
-              <a:buNone/>
-            </a:pPr>
-            <a:r>
-              <a:rPr lang="en-US" sz="1500" b="0">
-                <a:solidFill>
-                  <a:srgbClr val="202B33"/>
-                </a:solidFill>
-                <a:latin typeface="Arial"/>
-                <a:ea typeface="Arial"/>
-                <a:cs typeface="Arial"/>
-              </a:rPr>
-              <a:t xml:space="preserve">consumption, and consumption is jobs times</a:t>
-            </a:r>
-            <a:endParaRPr lang="en-US" sz="1500"/>
-          </a:p>
-          <a:p>
-            <a:pPr marL="0" indent="0">
-              <a:lnSpc>
-                <a:spcPts val="1950"/>
-              </a:lnSpc>
-              <a:spcAft>
-                <a:spcPts val="0"/>
-              </a:spcAft>
-              <a:buNone/>
-            </a:pPr>
-            <a:r>
-              <a:rPr lang="en-US" sz="1500" b="0">
-                <a:solidFill>
-                  <a:srgbClr val="202B33"/>
-                </a:solidFill>
-                <a:latin typeface="Arial"/>
-                <a:ea typeface="Arial"/>
-                <a:cs typeface="Arial"/>
-              </a:rPr>
-              <a:t xml:space="preserve">calls per job times tokens per call.</a:t>
-            </a:r>
-            <a:endParaRPr lang="en-US" sz="1500"/>
-          </a:p>
-          <a:p>
-            <a:pPr marL="0" indent="0">
-              <a:lnSpc>
-                <a:spcPts val="1950"/>
-              </a:lnSpc>
-              <a:spcAft>
-                <a:spcPts val="0"/>
-              </a:spcAft>
-              <a:buNone/>
-            </a:pPr>
-            <a:r>
-              <a:rPr lang="en-US" sz="1500" b="0">
-                <a:solidFill>
-                  <a:srgbClr val="202B33"/>
-                </a:solidFill>
-                <a:latin typeface="Arial"/>
-                <a:ea typeface="Arial"/>
-                <a:cs typeface="Arial"/>
-              </a:rPr>
-              <a:t xml:space="preserve">Cheapness moved every term on the right.</a:t>
-            </a:r>
-            <a:endParaRPr lang="en-US" sz="1500"/>
-          </a:p>
-          <a:p>
-            <a:pPr marL="0" indent="0">
-              <a:lnSpc>
-                <a:spcPts val="1950"/>
-              </a:lnSpc>
-              <a:spcAft>
-                <a:spcPts val="0"/>
-              </a:spcAft>
-              <a:buNone/>
-            </a:pPr>
-            <a:r>
-              <a:rPr lang="en-US" sz="1500" b="0">
-                <a:solidFill>
-                  <a:srgbClr val="202B33"/>
-                </a:solidFill>
-                <a:latin typeface="Arial"/>
-                <a:ea typeface="Arial"/>
-                <a:cs typeface="Arial"/>
-              </a:rPr>
-              <a:t xml:space="preserve">Epoch's data through 2025 shows the price</a:t>
-            </a:r>
-            <a:endParaRPr lang="en-US" sz="1500"/>
-          </a:p>
-          <a:p>
-            <a:pPr marL="0" indent="0">
-              <a:lnSpc>
-                <a:spcPts val="1950"/>
-              </a:lnSpc>
-              <a:spcAft>
-                <a:spcPts val="0"/>
-              </a:spcAft>
-              <a:buNone/>
-            </a:pPr>
-            <a:r>
-              <a:rPr lang="en-US" sz="1500" b="0">
-                <a:solidFill>
-                  <a:srgbClr val="202B33"/>
-                </a:solidFill>
-                <a:latin typeface="Arial"/>
-                <a:ea typeface="Arial"/>
-                <a:cs typeface="Arial"/>
-              </a:rPr>
-              <a:t xml:space="preserve">of a fixed capability falling fast and very</a:t>
-            </a:r>
-            <a:endParaRPr lang="en-US" sz="1500"/>
-          </a:p>
-          <a:p>
-            <a:pPr marL="0" indent="0">
-              <a:lnSpc>
-                <a:spcPts val="1950"/>
-              </a:lnSpc>
-              <a:spcAft>
-                <a:spcPts val="0"/>
-              </a:spcAft>
-              <a:buNone/>
-            </a:pPr>
-            <a:r>
-              <a:rPr lang="en-US" sz="1500" b="0">
-                <a:solidFill>
-                  <a:srgbClr val="202B33"/>
-                </a:solidFill>
-                <a:latin typeface="Arial"/>
-                <a:ea typeface="Arial"/>
-                <a:cs typeface="Arial"/>
-              </a:rPr>
-              <a:t xml:space="preserve">unevenly by task, which is real and worth</a:t>
-            </a:r>
-            <a:endParaRPr lang="en-US" sz="1500"/>
-          </a:p>
-          <a:p>
-            <a:pPr marL="0" indent="0">
-              <a:lnSpc>
-                <a:spcPts val="1950"/>
-              </a:lnSpc>
-              <a:spcAft>
-                <a:spcPts val="0"/>
-              </a:spcAft>
-              <a:buNone/>
-            </a:pPr>
-            <a:r>
-              <a:rPr lang="en-US" sz="1500" b="0">
-                <a:solidFill>
-                  <a:srgbClr val="202B33"/>
-                </a:solidFill>
-                <a:latin typeface="Arial"/>
-                <a:ea typeface="Arial"/>
-                <a:cs typeface="Arial"/>
-              </a:rPr>
-              <a:t xml:space="preserve">knowing, and is also exactly the condition</a:t>
-            </a:r>
-            <a:endParaRPr lang="en-US" sz="1500"/>
-          </a:p>
-          <a:p>
-            <a:pPr marL="0" indent="0">
-              <a:lnSpc>
-                <a:spcPts val="1950"/>
-              </a:lnSpc>
-              <a:spcAft>
-                <a:spcPts val="0"/>
-              </a:spcAft>
-              <a:buNone/>
-            </a:pPr>
-            <a:r>
-              <a:rPr lang="en-US" sz="1500" b="0">
-                <a:solidFill>
-                  <a:srgbClr val="202B33"/>
-                </a:solidFill>
-                <a:latin typeface="Arial"/>
-                <a:ea typeface="Arial"/>
-                <a:cs typeface="Arial"/>
-              </a:rPr>
-              <a:t xml:space="preserve">under which total spend rises.</a:t>
+              <a:t xml:space="preserve">Both things can be fine. A falling price</a:t>
+            </a:r>
+            <a:endParaRPr lang="en-US" sz="1500"/>
+          </a:p>
+          <a:p>
+            <a:pPr marL="0" indent="0">
+              <a:lnSpc>
+                <a:spcPts val="1950"/>
+              </a:lnSpc>
+              <a:spcAft>
+                <a:spcPts val="0"/>
+              </a:spcAft>
+              <a:buNone/>
+            </a:pPr>
+            <a:r>
+              <a:rPr lang="en-US" sz="1500" b="0">
+                <a:solidFill>
+                  <a:srgbClr val="202B33"/>
+                </a:solidFill>
+                <a:latin typeface="Arial"/>
+                <a:ea typeface="Arial"/>
+                <a:cs typeface="Arial"/>
+              </a:rPr>
+              <a:t xml:space="preserve">and a growing bill coexist comfortably as</a:t>
+            </a:r>
+            <a:endParaRPr lang="en-US" sz="1500"/>
+          </a:p>
+          <a:p>
+            <a:pPr marL="0" indent="0">
+              <a:lnSpc>
+                <a:spcPts val="1950"/>
+              </a:lnSpc>
+              <a:spcAft>
+                <a:spcPts val="0"/>
+              </a:spcAft>
+              <a:buNone/>
+            </a:pPr>
+            <a:r>
+              <a:rPr lang="en-US" sz="1500" b="0">
+                <a:solidFill>
+                  <a:srgbClr val="202B33"/>
+                </a:solidFill>
+                <a:latin typeface="Arial"/>
+                <a:ea typeface="Arial"/>
+                <a:cs typeface="Arial"/>
+              </a:rPr>
+              <a:t xml:space="preserve">long as customer value grows faster. That</a:t>
+            </a:r>
+            <a:endParaRPr lang="en-US" sz="1500"/>
+          </a:p>
+          <a:p>
+            <a:pPr marL="0" indent="0">
+              <a:lnSpc>
+                <a:spcPts val="1950"/>
+              </a:lnSpc>
+              <a:spcAft>
+                <a:spcPts val="0"/>
+              </a:spcAft>
+              <a:buNone/>
+            </a:pPr>
+            <a:r>
+              <a:rPr lang="en-US" sz="1500" b="0">
+                <a:solidFill>
+                  <a:srgbClr val="202B33"/>
+                </a:solidFill>
+                <a:latin typeface="Arial"/>
+                <a:ea typeface="Arial"/>
+                <a:cs typeface="Arial"/>
+              </a:rPr>
+              <a:t xml:space="preserve">is the relationship to measure, and almost</a:t>
+            </a:r>
+            <a:endParaRPr lang="en-US" sz="1500"/>
+          </a:p>
+          <a:p>
+            <a:pPr marL="0" indent="0">
+              <a:lnSpc>
+                <a:spcPts val="1950"/>
+              </a:lnSpc>
+              <a:spcAft>
+                <a:spcPts val="0"/>
+              </a:spcAft>
+              <a:buNone/>
+            </a:pPr>
+            <a:r>
+              <a:rPr lang="en-US" sz="1500" b="0">
+                <a:solidFill>
+                  <a:srgbClr val="202B33"/>
+                </a:solidFill>
+                <a:latin typeface="Arial"/>
+                <a:ea typeface="Arial"/>
+                <a:cs typeface="Arial"/>
+              </a:rPr>
+              <a:t xml:space="preserve">nobody measures it.</a:t>
             </a:r>
             <a:endParaRPr lang="en-US" sz="1500"/>
           </a:p>

--- a/artifacts/speaking-portfolio-expanded/decks/free-tier-30min-handout.pptx
+++ b/artifacts/speaking-portfolio-expanded/decks/free-tier-30min-handout.pptx
@@ -6636,7 +6636,7 @@
                 <a:ea typeface="Arial"/>
                 <a:cs typeface="Arial"/>
               </a:rPr>
-              <a:t xml:space="preserve">And notice what Shoup actually recommended, because everyone gets this wrong. He never said ban parking. He said charge the right price for it, and give the money back to the neighborhood. Same here. The fix is not austerity and it is not a policy forbidding the model. It is putting the number in front of the person making the choice, at the moment they make it. Estimated cost per accepted outcome, in the design doc, next to the latency budget.</a:t>
+              <a:t xml:space="preserve">And notice what Shoup actually recommended, because everyone gets this wrong. He never said ban parking. He said charge the right price and give the money back to the neighborhood. Same here. The fix is not austerity or a policy forbidding the model. It is putting the number in front of the person choosing, at the moment they choose: estimated cost per accepted outcome, in the design doc, next to the latency budget.</a:t>
             </a:r>
             <a:endParaRPr lang="en-US" sz="1200"/>
           </a:p>
@@ -20676,168 +20676,145 @@
                 <a:ea typeface="Arial"/>
                 <a:cs typeface="Arial"/>
               </a:rPr>
-              <a:t xml:space="preserve">price for it, and give the money back to</a:t>
-            </a:r>
-            <a:endParaRPr lang="en-US" sz="1500"/>
-          </a:p>
-          <a:p>
-            <a:pPr marL="0" indent="0">
-              <a:lnSpc>
-                <a:spcPts val="1950"/>
-              </a:lnSpc>
-              <a:spcAft>
-                <a:spcPts val="0"/>
-              </a:spcAft>
-              <a:buNone/>
-            </a:pPr>
-            <a:r>
-              <a:rPr lang="en-US" sz="1500" b="0">
-                <a:solidFill>
-                  <a:srgbClr val="202B33"/>
-                </a:solidFill>
-                <a:latin typeface="Arial"/>
-                <a:ea typeface="Arial"/>
-                <a:cs typeface="Arial"/>
-              </a:rPr>
-              <a:t xml:space="preserve">the neighborhood. Same here. The fix is not</a:t>
-            </a:r>
-            <a:endParaRPr lang="en-US" sz="1500"/>
-          </a:p>
-          <a:p>
-            <a:pPr marL="0" indent="0">
-              <a:lnSpc>
-                <a:spcPts val="1950"/>
-              </a:lnSpc>
-              <a:spcAft>
-                <a:spcPts val="0"/>
-              </a:spcAft>
-              <a:buNone/>
-            </a:pPr>
-            <a:r>
-              <a:rPr lang="en-US" sz="1500" b="0">
-                <a:solidFill>
-                  <a:srgbClr val="202B33"/>
-                </a:solidFill>
-                <a:latin typeface="Arial"/>
-                <a:ea typeface="Arial"/>
-                <a:cs typeface="Arial"/>
-              </a:rPr>
-              <a:t xml:space="preserve">austerity and it is not a policy forbidding</a:t>
-            </a:r>
-            <a:endParaRPr lang="en-US" sz="1500"/>
-          </a:p>
-          <a:p>
-            <a:pPr marL="0" indent="0">
-              <a:lnSpc>
-                <a:spcPts val="1950"/>
-              </a:lnSpc>
-              <a:spcAft>
-                <a:spcPts val="0"/>
-              </a:spcAft>
-              <a:buNone/>
-            </a:pPr>
-            <a:r>
-              <a:rPr lang="en-US" sz="1500" b="0">
-                <a:solidFill>
-                  <a:srgbClr val="202B33"/>
-                </a:solidFill>
-                <a:latin typeface="Arial"/>
-                <a:ea typeface="Arial"/>
-                <a:cs typeface="Arial"/>
-              </a:rPr>
-              <a:t xml:space="preserve">the model. It is putting the number in</a:t>
-            </a:r>
-            <a:endParaRPr lang="en-US" sz="1500"/>
-          </a:p>
-          <a:p>
-            <a:pPr marL="0" indent="0">
-              <a:lnSpc>
-                <a:spcPts val="1950"/>
-              </a:lnSpc>
-              <a:spcAft>
-                <a:spcPts val="0"/>
-              </a:spcAft>
-              <a:buNone/>
-            </a:pPr>
-            <a:r>
-              <a:rPr lang="en-US" sz="1500" b="0">
-                <a:solidFill>
-                  <a:srgbClr val="202B33"/>
-                </a:solidFill>
-                <a:latin typeface="Arial"/>
-                <a:ea typeface="Arial"/>
-                <a:cs typeface="Arial"/>
-              </a:rPr>
-              <a:t xml:space="preserve">front of the person making the choice, at</a:t>
-            </a:r>
-            <a:endParaRPr lang="en-US" sz="1500"/>
-          </a:p>
-          <a:p>
-            <a:pPr marL="0" indent="0">
-              <a:lnSpc>
-                <a:spcPts val="1950"/>
-              </a:lnSpc>
-              <a:spcAft>
-                <a:spcPts val="0"/>
-              </a:spcAft>
-              <a:buNone/>
-            </a:pPr>
-            <a:r>
-              <a:rPr lang="en-US" sz="1500" b="0">
-                <a:solidFill>
-                  <a:srgbClr val="202B33"/>
-                </a:solidFill>
-                <a:latin typeface="Arial"/>
-                <a:ea typeface="Arial"/>
-                <a:cs typeface="Arial"/>
-              </a:rPr>
-              <a:t xml:space="preserve">the moment they make it. Estimated cost per</a:t>
-            </a:r>
-            <a:endParaRPr lang="en-US" sz="1500"/>
-          </a:p>
-          <a:p>
-            <a:pPr marL="0" indent="0">
-              <a:lnSpc>
-                <a:spcPts val="1950"/>
-              </a:lnSpc>
-              <a:spcAft>
-                <a:spcPts val="0"/>
-              </a:spcAft>
-              <a:buNone/>
-            </a:pPr>
-            <a:r>
-              <a:rPr lang="en-US" sz="1500" b="0">
-                <a:solidFill>
-                  <a:srgbClr val="202B33"/>
-                </a:solidFill>
-                <a:latin typeface="Arial"/>
-                <a:ea typeface="Arial"/>
-                <a:cs typeface="Arial"/>
-              </a:rPr>
-              <a:t xml:space="preserve">accepted outcome, in the design doc, next</a:t>
-            </a:r>
-            <a:endParaRPr lang="en-US" sz="1500"/>
-          </a:p>
-          <a:p>
-            <a:pPr marL="0" indent="0">
-              <a:lnSpc>
-                <a:spcPts val="1950"/>
-              </a:lnSpc>
-              <a:spcAft>
-                <a:spcPts val="0"/>
-              </a:spcAft>
-              <a:buNone/>
-            </a:pPr>
-            <a:r>
-              <a:rPr lang="en-US" sz="1500" b="0">
-                <a:solidFill>
-                  <a:srgbClr val="202B33"/>
-                </a:solidFill>
-                <a:latin typeface="Arial"/>
-                <a:ea typeface="Arial"/>
-                <a:cs typeface="Arial"/>
-              </a:rPr>
-              <a:t xml:space="preserve">to the latency budget.</a:t>
+              <a:t xml:space="preserve">price and give the money back to the</a:t>
+            </a:r>
+            <a:endParaRPr lang="en-US" sz="1500"/>
+          </a:p>
+          <a:p>
+            <a:pPr marL="0" indent="0">
+              <a:lnSpc>
+                <a:spcPts val="1950"/>
+              </a:lnSpc>
+              <a:spcAft>
+                <a:spcPts val="0"/>
+              </a:spcAft>
+              <a:buNone/>
+            </a:pPr>
+            <a:r>
+              <a:rPr lang="en-US" sz="1500" b="0">
+                <a:solidFill>
+                  <a:srgbClr val="202B33"/>
+                </a:solidFill>
+                <a:latin typeface="Arial"/>
+                <a:ea typeface="Arial"/>
+                <a:cs typeface="Arial"/>
+              </a:rPr>
+              <a:t xml:space="preserve">neighborhood. Same here. The fix is not</a:t>
+            </a:r>
+            <a:endParaRPr lang="en-US" sz="1500"/>
+          </a:p>
+          <a:p>
+            <a:pPr marL="0" indent="0">
+              <a:lnSpc>
+                <a:spcPts val="1950"/>
+              </a:lnSpc>
+              <a:spcAft>
+                <a:spcPts val="0"/>
+              </a:spcAft>
+              <a:buNone/>
+            </a:pPr>
+            <a:r>
+              <a:rPr lang="en-US" sz="1500" b="0">
+                <a:solidFill>
+                  <a:srgbClr val="202B33"/>
+                </a:solidFill>
+                <a:latin typeface="Arial"/>
+                <a:ea typeface="Arial"/>
+                <a:cs typeface="Arial"/>
+              </a:rPr>
+              <a:t xml:space="preserve">austerity or a policy forbidding the model.</a:t>
+            </a:r>
+            <a:endParaRPr lang="en-US" sz="1500"/>
+          </a:p>
+          <a:p>
+            <a:pPr marL="0" indent="0">
+              <a:lnSpc>
+                <a:spcPts val="1950"/>
+              </a:lnSpc>
+              <a:spcAft>
+                <a:spcPts val="0"/>
+              </a:spcAft>
+              <a:buNone/>
+            </a:pPr>
+            <a:r>
+              <a:rPr lang="en-US" sz="1500" b="0">
+                <a:solidFill>
+                  <a:srgbClr val="202B33"/>
+                </a:solidFill>
+                <a:latin typeface="Arial"/>
+                <a:ea typeface="Arial"/>
+                <a:cs typeface="Arial"/>
+              </a:rPr>
+              <a:t xml:space="preserve">It is putting the number in front of the</a:t>
+            </a:r>
+            <a:endParaRPr lang="en-US" sz="1500"/>
+          </a:p>
+          <a:p>
+            <a:pPr marL="0" indent="0">
+              <a:lnSpc>
+                <a:spcPts val="1950"/>
+              </a:lnSpc>
+              <a:spcAft>
+                <a:spcPts val="0"/>
+              </a:spcAft>
+              <a:buNone/>
+            </a:pPr>
+            <a:r>
+              <a:rPr lang="en-US" sz="1500" b="0">
+                <a:solidFill>
+                  <a:srgbClr val="202B33"/>
+                </a:solidFill>
+                <a:latin typeface="Arial"/>
+                <a:ea typeface="Arial"/>
+                <a:cs typeface="Arial"/>
+              </a:rPr>
+              <a:t xml:space="preserve">person choosing, at the moment they choose:</a:t>
+            </a:r>
+            <a:endParaRPr lang="en-US" sz="1500"/>
+          </a:p>
+          <a:p>
+            <a:pPr marL="0" indent="0">
+              <a:lnSpc>
+                <a:spcPts val="1950"/>
+              </a:lnSpc>
+              <a:spcAft>
+                <a:spcPts val="0"/>
+              </a:spcAft>
+              <a:buNone/>
+            </a:pPr>
+            <a:r>
+              <a:rPr lang="en-US" sz="1500" b="0">
+                <a:solidFill>
+                  <a:srgbClr val="202B33"/>
+                </a:solidFill>
+                <a:latin typeface="Arial"/>
+                <a:ea typeface="Arial"/>
+                <a:cs typeface="Arial"/>
+              </a:rPr>
+              <a:t xml:space="preserve">estimated cost per accepted outcome, in the</a:t>
+            </a:r>
+            <a:endParaRPr lang="en-US" sz="1500"/>
+          </a:p>
+          <a:p>
+            <a:pPr marL="0" indent="0">
+              <a:lnSpc>
+                <a:spcPts val="1950"/>
+              </a:lnSpc>
+              <a:spcAft>
+                <a:spcPts val="0"/>
+              </a:spcAft>
+              <a:buNone/>
+            </a:pPr>
+            <a:r>
+              <a:rPr lang="en-US" sz="1500" b="0">
+                <a:solidFill>
+                  <a:srgbClr val="202B33"/>
+                </a:solidFill>
+                <a:latin typeface="Arial"/>
+                <a:ea typeface="Arial"/>
+                <a:cs typeface="Arial"/>
+              </a:rPr>
+              <a:t xml:space="preserve">design doc, next to the latency budget.</a:t>
             </a:r>
             <a:endParaRPr lang="en-US" sz="1500"/>
           </a:p>
